--- a/basics/8_refactoring/Refactoring_Code_Qualität_LS8_PYB.pptx
+++ b/basics/8_refactoring/Refactoring_Code_Qualität_LS8_PYB.pptx
@@ -14071,7 +14071,7 @@
           <a:p>
             <a:r>
               <a:rPr lang="de-DE" b="1" dirty="0"/>
-              <a:t>Der Sudoku-Löser als Praxisbeispiel</a:t>
+              <a:t>Das Verkaufsskript als Praxisbeispiel</a:t>
             </a:r>
           </a:p>
         </p:txBody>
@@ -14114,7 +14114,7 @@
             </a:r>
             <a:r>
               <a:rPr lang="de-DE" sz="2400" dirty="0"/>
-              <a:t>“ und Stilbrüchen im Beispiel eines Sudoku-Lösers</a:t>
+              <a:t>“ und Stilbrüchen in einem gewachsenen Auswertungsskript für Verkaufsdaten</a:t>
             </a:r>
           </a:p>
           <a:p>

--- a/basics/8_refactoring/Refactoring_Code_Qualität_LS8_PYB.pptx
+++ b/basics/8_refactoring/Refactoring_Code_Qualität_LS8_PYB.pptx
@@ -1,40 +1,136 @@
 
 <file path=ppt/presentation.xml><?xml version="1.0" encoding="utf-8"?>
-<p:presentation xmlns:a="http://schemas.openxmlformats.org/drawingml/2006/main" xmlns:p="http://schemas.openxmlformats.org/presentationml/2006/main" xmlns:r="http://schemas.openxmlformats.org/officeDocument/2006/relationships" xmlns:p14="http://schemas.microsoft.com/office/powerpoint/2010/main" xmlns:p15="http://schemas.microsoft.com/office/powerpoint/2012/main" xmlns:mc="http://schemas.openxmlformats.org/markup-compatibility/2006">
+<p:presentation xmlns:a="http://schemas.openxmlformats.org/drawingml/2006/main" xmlns:r="http://schemas.openxmlformats.org/officeDocument/2006/relationships" xmlns:p="http://schemas.openxmlformats.org/presentationml/2006/main">
   <p:sldMasterIdLst>
-    <p:sldMasterId id="2147483648" r:id="rId2"/>
+    <p:sldMasterId id="2147483648" r:id="rId1"/>
   </p:sldMasterIdLst>
   <p:sldIdLst>
-    <p:sldId id="256" r:id="rId3"/>
-    <p:sldId id="257" r:id="rId4"/>
-    <p:sldId id="258" r:id="rId5"/>
-    <p:sldId id="259" r:id="rId6"/>
-    <p:sldId id="260" r:id="rId7"/>
-    <p:sldId id="261" r:id="rId8"/>
-    <p:sldId id="262" r:id="rId9"/>
-    <p:sldId id="263" r:id="rId10"/>
-    <p:sldId id="264" r:id="rId11"/>
-    <p:sldId id="265" r:id="rId12"/>
-    <p:sldId id="266" r:id="rId13"/>
-    <p:sldId id="267" r:id="rId14"/>
-    <p:sldId id="268" r:id="rId15"/>
-    <p:sldId id="269" r:id="rId16"/>
-    <p:sldId id="270" r:id="rId17"/>
-    <p:sldId id="271" r:id="rId18"/>
+    <p:sldId id="256" r:id="rId2"/>
+    <p:sldId id="257" r:id="rId3"/>
+    <p:sldId id="258" r:id="rId4"/>
+    <p:sldId id="259" r:id="rId5"/>
+    <p:sldId id="260" r:id="rId6"/>
+    <p:sldId id="261" r:id="rId7"/>
+    <p:sldId id="262" r:id="rId8"/>
+    <p:sldId id="263" r:id="rId9"/>
+    <p:sldId id="264" r:id="rId10"/>
+    <p:sldId id="265" r:id="rId11"/>
+    <p:sldId id="266" r:id="rId12"/>
+    <p:sldId id="267" r:id="rId13"/>
+    <p:sldId id="268" r:id="rId14"/>
+    <p:sldId id="269" r:id="rId15"/>
+    <p:sldId id="270" r:id="rId16"/>
+    <p:sldId id="271" r:id="rId17"/>
   </p:sldIdLst>
   <p:sldSz cx="12192000" cy="6858000"/>
   <p:notesSz cx="7559675" cy="10691813"/>
+  <p:defaultTextStyle>
+    <a:defPPr>
+      <a:defRPr lang="de-DE"/>
+    </a:defPPr>
+    <a:lvl1pPr marL="0" algn="l" defTabSz="914400" rtl="0" eaLnBrk="1" latinLnBrk="0" hangingPunct="1">
+      <a:defRPr sz="1800" kern="1200">
+        <a:solidFill>
+          <a:schemeClr val="tx1"/>
+        </a:solidFill>
+        <a:latin typeface="+mn-lt"/>
+        <a:ea typeface="+mn-ea"/>
+        <a:cs typeface="+mn-cs"/>
+      </a:defRPr>
+    </a:lvl1pPr>
+    <a:lvl2pPr marL="457200" algn="l" defTabSz="914400" rtl="0" eaLnBrk="1" latinLnBrk="0" hangingPunct="1">
+      <a:defRPr sz="1800" kern="1200">
+        <a:solidFill>
+          <a:schemeClr val="tx1"/>
+        </a:solidFill>
+        <a:latin typeface="+mn-lt"/>
+        <a:ea typeface="+mn-ea"/>
+        <a:cs typeface="+mn-cs"/>
+      </a:defRPr>
+    </a:lvl2pPr>
+    <a:lvl3pPr marL="914400" algn="l" defTabSz="914400" rtl="0" eaLnBrk="1" latinLnBrk="0" hangingPunct="1">
+      <a:defRPr sz="1800" kern="1200">
+        <a:solidFill>
+          <a:schemeClr val="tx1"/>
+        </a:solidFill>
+        <a:latin typeface="+mn-lt"/>
+        <a:ea typeface="+mn-ea"/>
+        <a:cs typeface="+mn-cs"/>
+      </a:defRPr>
+    </a:lvl3pPr>
+    <a:lvl4pPr marL="1371600" algn="l" defTabSz="914400" rtl="0" eaLnBrk="1" latinLnBrk="0" hangingPunct="1">
+      <a:defRPr sz="1800" kern="1200">
+        <a:solidFill>
+          <a:schemeClr val="tx1"/>
+        </a:solidFill>
+        <a:latin typeface="+mn-lt"/>
+        <a:ea typeface="+mn-ea"/>
+        <a:cs typeface="+mn-cs"/>
+      </a:defRPr>
+    </a:lvl4pPr>
+    <a:lvl5pPr marL="1828800" algn="l" defTabSz="914400" rtl="0" eaLnBrk="1" latinLnBrk="0" hangingPunct="1">
+      <a:defRPr sz="1800" kern="1200">
+        <a:solidFill>
+          <a:schemeClr val="tx1"/>
+        </a:solidFill>
+        <a:latin typeface="+mn-lt"/>
+        <a:ea typeface="+mn-ea"/>
+        <a:cs typeface="+mn-cs"/>
+      </a:defRPr>
+    </a:lvl5pPr>
+    <a:lvl6pPr marL="2286000" algn="l" defTabSz="914400" rtl="0" eaLnBrk="1" latinLnBrk="0" hangingPunct="1">
+      <a:defRPr sz="1800" kern="1200">
+        <a:solidFill>
+          <a:schemeClr val="tx1"/>
+        </a:solidFill>
+        <a:latin typeface="+mn-lt"/>
+        <a:ea typeface="+mn-ea"/>
+        <a:cs typeface="+mn-cs"/>
+      </a:defRPr>
+    </a:lvl6pPr>
+    <a:lvl7pPr marL="2743200" algn="l" defTabSz="914400" rtl="0" eaLnBrk="1" latinLnBrk="0" hangingPunct="1">
+      <a:defRPr sz="1800" kern="1200">
+        <a:solidFill>
+          <a:schemeClr val="tx1"/>
+        </a:solidFill>
+        <a:latin typeface="+mn-lt"/>
+        <a:ea typeface="+mn-ea"/>
+        <a:cs typeface="+mn-cs"/>
+      </a:defRPr>
+    </a:lvl7pPr>
+    <a:lvl8pPr marL="3200400" algn="l" defTabSz="914400" rtl="0" eaLnBrk="1" latinLnBrk="0" hangingPunct="1">
+      <a:defRPr sz="1800" kern="1200">
+        <a:solidFill>
+          <a:schemeClr val="tx1"/>
+        </a:solidFill>
+        <a:latin typeface="+mn-lt"/>
+        <a:ea typeface="+mn-ea"/>
+        <a:cs typeface="+mn-cs"/>
+      </a:defRPr>
+    </a:lvl8pPr>
+    <a:lvl9pPr marL="3657600" algn="l" defTabSz="914400" rtl="0" eaLnBrk="1" latinLnBrk="0" hangingPunct="1">
+      <a:defRPr sz="1800" kern="1200">
+        <a:solidFill>
+          <a:schemeClr val="tx1"/>
+        </a:solidFill>
+        <a:latin typeface="+mn-lt"/>
+        <a:ea typeface="+mn-ea"/>
+        <a:cs typeface="+mn-cs"/>
+      </a:defRPr>
+    </a:lvl9pPr>
+  </p:defaultTextStyle>
 </p:presentation>
 </file>
 
 <file path=ppt/slideLayouts/slideLayout1.xml><?xml version="1.0" encoding="utf-8"?>
-<p:sldLayout xmlns:a="http://schemas.openxmlformats.org/drawingml/2006/main" xmlns:p="http://schemas.openxmlformats.org/presentationml/2006/main" xmlns:r="http://schemas.openxmlformats.org/officeDocument/2006/relationships" xmlns:p14="http://schemas.microsoft.com/office/powerpoint/2010/main" xmlns:p15="http://schemas.microsoft.com/office/powerpoint/2012/main" xmlns:mc="http://schemas.openxmlformats.org/markup-compatibility/2006" type="blank" preserve="1">
+<p:sldLayout xmlns:a="http://schemas.openxmlformats.org/drawingml/2006/main" xmlns:r="http://schemas.openxmlformats.org/officeDocument/2006/relationships" xmlns:p="http://schemas.openxmlformats.org/presentationml/2006/main" type="blank" preserve="1">
   <p:cSld name="Titelfolie">
     <p:bg>
       <p:bgPr>
         <a:solidFill>
           <a:srgbClr val="FFFFFF"/>
         </a:solidFill>
+        <a:effectLst/>
       </p:bgPr>
     </p:bg>
     <p:spTree>
@@ -90,6 +186,7 @@
           <a:bodyPr lIns="90000" tIns="45000" rIns="90000" bIns="45000" anchor="ctr">
             <a:noAutofit/>
           </a:bodyPr>
+          <a:lstStyle/>
           <a:p>
             <a:endParaRPr lang="en-US" sz="900" b="0" u="none" strike="noStrike">
               <a:solidFill>
@@ -266,7 +363,7 @@
         </p:nvPicPr>
         <p:blipFill>
           <a:blip r:embed="rId2"/>
-          <a:srcRect l="444" t="0" r="0" b="81603"/>
+          <a:srcRect l="444" b="81603"/>
           <a:stretch/>
         </p:blipFill>
         <p:spPr>
@@ -333,17 +430,21 @@
       </p:pic>
     </p:spTree>
   </p:cSld>
+  <p:clrMapOvr>
+    <a:masterClrMapping/>
+  </p:clrMapOvr>
 </p:sldLayout>
 </file>
 
 <file path=ppt/slideLayouts/slideLayout10.xml><?xml version="1.0" encoding="utf-8"?>
-<p:sldLayout xmlns:a="http://schemas.openxmlformats.org/drawingml/2006/main" xmlns:p="http://schemas.openxmlformats.org/presentationml/2006/main" xmlns:r="http://schemas.openxmlformats.org/officeDocument/2006/relationships" xmlns:p14="http://schemas.microsoft.com/office/powerpoint/2010/main" xmlns:p15="http://schemas.microsoft.com/office/powerpoint/2012/main" xmlns:mc="http://schemas.openxmlformats.org/markup-compatibility/2006" type="blank" preserve="1">
+<p:sldLayout xmlns:a="http://schemas.openxmlformats.org/drawingml/2006/main" xmlns:r="http://schemas.openxmlformats.org/officeDocument/2006/relationships" xmlns:p="http://schemas.openxmlformats.org/presentationml/2006/main" type="blank" preserve="1">
   <p:cSld name="Fullscreen Image">
     <p:bg>
       <p:bgPr>
         <a:solidFill>
           <a:srgbClr val="FFFFFF"/>
         </a:solidFill>
+        <a:effectLst/>
       </p:bgPr>
     </p:bg>
     <p:spTree>
@@ -510,15 +611,22 @@
           </a:ln>
         </p:spPr>
         <p:style>
-          <a:lnRef idx="0"/>
-          <a:fillRef idx="0"/>
-          <a:effectRef idx="0"/>
+          <a:lnRef idx="0">
+            <a:scrgbClr r="0" g="0" b="0"/>
+          </a:lnRef>
+          <a:fillRef idx="0">
+            <a:scrgbClr r="0" g="0" b="0"/>
+          </a:fillRef>
+          <a:effectRef idx="0">
+            <a:scrgbClr r="0" g="0" b="0"/>
+          </a:effectRef>
           <a:fontRef idx="minor"/>
         </p:style>
         <p:txBody>
           <a:bodyPr wrap="none" lIns="60840" tIns="30600" rIns="60840" bIns="30600" anchor="ctr">
             <a:noAutofit/>
           </a:bodyPr>
+          <a:lstStyle/>
           <a:p>
             <a:pPr algn="r" defTabSz="914400">
               <a:lnSpc>
@@ -534,7 +642,7 @@
                 <a:uFillTx/>
                 <a:latin typeface="Rubik SemiBold"/>
               </a:rPr>
-              <a:t>&lt;Foliennummer&gt;</a:t>
+              <a:t>‹Nr.›</a:t>
             </a:fld>
             <a:endParaRPr lang="de-DE" sz="800" b="0" u="none" strike="noStrike">
               <a:solidFill>
@@ -633,17 +741,21 @@
       </p:sp>
     </p:spTree>
   </p:cSld>
+  <p:clrMapOvr>
+    <a:masterClrMapping/>
+  </p:clrMapOvr>
 </p:sldLayout>
 </file>
 
 <file path=ppt/slideLayouts/slideLayout11.xml><?xml version="1.0" encoding="utf-8"?>
-<p:sldLayout xmlns:a="http://schemas.openxmlformats.org/drawingml/2006/main" xmlns:p="http://schemas.openxmlformats.org/presentationml/2006/main" xmlns:r="http://schemas.openxmlformats.org/officeDocument/2006/relationships" xmlns:p14="http://schemas.microsoft.com/office/powerpoint/2010/main" xmlns:p15="http://schemas.microsoft.com/office/powerpoint/2012/main" xmlns:mc="http://schemas.openxmlformats.org/markup-compatibility/2006" type="blank" preserve="1">
+<p:sldLayout xmlns:a="http://schemas.openxmlformats.org/drawingml/2006/main" xmlns:r="http://schemas.openxmlformats.org/officeDocument/2006/relationships" xmlns:p="http://schemas.openxmlformats.org/presentationml/2006/main" type="blank" preserve="1">
   <p:cSld name="Leer">
     <p:bg>
       <p:bgPr>
         <a:solidFill>
           <a:srgbClr val="FFFFFF"/>
         </a:solidFill>
+        <a:effectLst/>
       </p:bgPr>
     </p:bg>
     <p:spTree>
@@ -667,10 +779,10 @@
           <p:nvPr/>
         </p:nvPicPr>
         <p:blipFill>
-          <a:blip r:embed="rId2">
+          <a:blip>
             <a:extLst>
               <a:ext uri="{96DAC541-7B7A-43D3-8B79-37D633B846F1}">
-                <asvg:svgBlip xmlns:asvg="http://schemas.microsoft.com/office/drawing/2016/SVG/main" r:embed="rId3"/>
+                <asvg:svgBlip xmlns:asvg="http://schemas.microsoft.com/office/drawing/2016/SVG/main" r:embed="rId2"/>
               </a:ext>
             </a:extLst>
           </a:blip>
@@ -710,15 +822,22 @@
           </a:ln>
         </p:spPr>
         <p:style>
-          <a:lnRef idx="0"/>
-          <a:fillRef idx="0"/>
-          <a:effectRef idx="0"/>
+          <a:lnRef idx="0">
+            <a:scrgbClr r="0" g="0" b="0"/>
+          </a:lnRef>
+          <a:fillRef idx="0">
+            <a:scrgbClr r="0" g="0" b="0"/>
+          </a:fillRef>
+          <a:effectRef idx="0">
+            <a:scrgbClr r="0" g="0" b="0"/>
+          </a:effectRef>
           <a:fontRef idx="minor"/>
         </p:style>
         <p:txBody>
           <a:bodyPr wrap="none" lIns="60840" tIns="30600" rIns="60840" bIns="30600" anchor="ctr">
             <a:noAutofit/>
           </a:bodyPr>
+          <a:lstStyle/>
           <a:p>
             <a:pPr algn="r" defTabSz="914400">
               <a:lnSpc>
@@ -734,7 +853,7 @@
                 <a:uFillTx/>
                 <a:latin typeface="Rubik SemiBold"/>
               </a:rPr>
-              <a:t>&lt;Foliennummer&gt;</a:t>
+              <a:t>‹Nr.›</a:t>
             </a:fld>
             <a:endParaRPr lang="de-DE" sz="800" b="0" u="none" strike="noStrike">
               <a:solidFill>
@@ -886,30 +1005,26 @@
               </a:rPr>
               <a:t>Format des Titeltextes durch Klicken bearbeiten</a:t>
             </a:r>
-            <a:endParaRPr lang="en-US" sz="1800" b="0" u="none" strike="noStrike">
-              <a:solidFill>
-                <a:schemeClr val="dk1"/>
-              </a:solidFill>
-              <a:effectLst/>
-              <a:uFillTx/>
-              <a:latin typeface="Calibri"/>
-            </a:endParaRPr>
           </a:p>
         </p:txBody>
       </p:sp>
     </p:spTree>
   </p:cSld>
+  <p:clrMapOvr>
+    <a:masterClrMapping/>
+  </p:clrMapOvr>
 </p:sldLayout>
 </file>
 
 <file path=ppt/slideLayouts/slideLayout12.xml><?xml version="1.0" encoding="utf-8"?>
-<p:sldLayout xmlns:a="http://schemas.openxmlformats.org/drawingml/2006/main" xmlns:p="http://schemas.openxmlformats.org/presentationml/2006/main" xmlns:r="http://schemas.openxmlformats.org/officeDocument/2006/relationships" xmlns:p14="http://schemas.microsoft.com/office/powerpoint/2010/main" xmlns:p15="http://schemas.microsoft.com/office/powerpoint/2012/main" xmlns:mc="http://schemas.openxmlformats.org/markup-compatibility/2006" type="blank" preserve="1">
+<p:sldLayout xmlns:a="http://schemas.openxmlformats.org/drawingml/2006/main" xmlns:r="http://schemas.openxmlformats.org/officeDocument/2006/relationships" xmlns:p="http://schemas.openxmlformats.org/presentationml/2006/main" type="blank" preserve="1">
   <p:cSld name="Titelfolie + Person">
     <p:bg>
       <p:bgPr>
         <a:solidFill>
           <a:srgbClr val="FFFFFF"/>
         </a:solidFill>
+        <a:effectLst/>
       </p:bgPr>
     </p:bg>
     <p:spTree>
@@ -965,6 +1080,7 @@
           <a:bodyPr lIns="90000" tIns="45000" rIns="90000" bIns="45000" anchor="ctr">
             <a:noAutofit/>
           </a:bodyPr>
+          <a:lstStyle/>
           <a:p>
             <a:endParaRPr lang="en-US" sz="900" b="0" u="none" strike="noStrike">
               <a:solidFill>
@@ -985,7 +1101,7 @@
         </p:nvPicPr>
         <p:blipFill>
           <a:blip r:embed="rId2"/>
-          <a:srcRect l="444" t="0" r="0" b="90806"/>
+          <a:srcRect l="444" b="90806"/>
           <a:stretch/>
         </p:blipFill>
         <p:spPr>
@@ -1450,17 +1566,21 @@
       </p:sp>
     </p:spTree>
   </p:cSld>
+  <p:clrMapOvr>
+    <a:masterClrMapping/>
+  </p:clrMapOvr>
 </p:sldLayout>
 </file>
 
 <file path=ppt/slideLayouts/slideLayout13.xml><?xml version="1.0" encoding="utf-8"?>
-<p:sldLayout xmlns:a="http://schemas.openxmlformats.org/drawingml/2006/main" xmlns:p="http://schemas.openxmlformats.org/presentationml/2006/main" xmlns:r="http://schemas.openxmlformats.org/officeDocument/2006/relationships" xmlns:p14="http://schemas.microsoft.com/office/powerpoint/2010/main" xmlns:p15="http://schemas.microsoft.com/office/powerpoint/2012/main" xmlns:mc="http://schemas.openxmlformats.org/markup-compatibility/2006" type="blank" preserve="1">
+<p:sldLayout xmlns:a="http://schemas.openxmlformats.org/drawingml/2006/main" xmlns:r="http://schemas.openxmlformats.org/officeDocument/2006/relationships" xmlns:p="http://schemas.openxmlformats.org/presentationml/2006/main" type="blank" preserve="1">
   <p:cSld name="Leer (Electric Indigo HG)">
     <p:bg>
       <p:bgPr>
         <a:solidFill>
           <a:srgbClr val="5500EB"/>
         </a:solidFill>
+        <a:effectLst/>
       </p:bgPr>
     </p:bg>
     <p:spTree>
@@ -1521,15 +1641,22 @@
           </a:ln>
         </p:spPr>
         <p:style>
-          <a:lnRef idx="0"/>
-          <a:fillRef idx="0"/>
-          <a:effectRef idx="0"/>
+          <a:lnRef idx="0">
+            <a:scrgbClr r="0" g="0" b="0"/>
+          </a:lnRef>
+          <a:fillRef idx="0">
+            <a:scrgbClr r="0" g="0" b="0"/>
+          </a:fillRef>
+          <a:effectRef idx="0">
+            <a:scrgbClr r="0" g="0" b="0"/>
+          </a:effectRef>
           <a:fontRef idx="minor"/>
         </p:style>
         <p:txBody>
           <a:bodyPr wrap="none" lIns="60840" tIns="30600" rIns="60840" bIns="30600" anchor="ctr">
             <a:noAutofit/>
           </a:bodyPr>
+          <a:lstStyle/>
           <a:p>
             <a:pPr algn="r" defTabSz="914400">
               <a:lnSpc>
@@ -1545,7 +1672,7 @@
                 <a:uFillTx/>
                 <a:latin typeface="Rubik SemiBold"/>
               </a:rPr>
-              <a:t>&lt;Foliennummer&gt;</a:t>
+              <a:t>‹Nr.›</a:t>
             </a:fld>
             <a:endParaRPr lang="de-DE" sz="800" b="0" u="none" strike="noStrike">
               <a:solidFill>
@@ -1644,17 +1771,21 @@
       </p:sp>
     </p:spTree>
   </p:cSld>
+  <p:clrMapOvr>
+    <a:masterClrMapping/>
+  </p:clrMapOvr>
 </p:sldLayout>
 </file>
 
 <file path=ppt/slideLayouts/slideLayout14.xml><?xml version="1.0" encoding="utf-8"?>
-<p:sldLayout xmlns:a="http://schemas.openxmlformats.org/drawingml/2006/main" xmlns:p="http://schemas.openxmlformats.org/presentationml/2006/main" xmlns:r="http://schemas.openxmlformats.org/officeDocument/2006/relationships" xmlns:p14="http://schemas.microsoft.com/office/powerpoint/2010/main" xmlns:p15="http://schemas.microsoft.com/office/powerpoint/2012/main" xmlns:mc="http://schemas.openxmlformats.org/markup-compatibility/2006" type="blank" preserve="1">
+<p:sldLayout xmlns:a="http://schemas.openxmlformats.org/drawingml/2006/main" xmlns:r="http://schemas.openxmlformats.org/officeDocument/2006/relationships" xmlns:p="http://schemas.openxmlformats.org/presentationml/2006/main" type="blank" preserve="1">
   <p:cSld name="Leer (Dark HG)">
     <p:bg>
       <p:bgPr>
         <a:solidFill>
           <a:srgbClr val="140046"/>
         </a:solidFill>
+        <a:effectLst/>
       </p:bgPr>
     </p:bg>
     <p:spTree>
@@ -1715,15 +1846,22 @@
           </a:ln>
         </p:spPr>
         <p:style>
-          <a:lnRef idx="0"/>
-          <a:fillRef idx="0"/>
-          <a:effectRef idx="0"/>
+          <a:lnRef idx="0">
+            <a:scrgbClr r="0" g="0" b="0"/>
+          </a:lnRef>
+          <a:fillRef idx="0">
+            <a:scrgbClr r="0" g="0" b="0"/>
+          </a:fillRef>
+          <a:effectRef idx="0">
+            <a:scrgbClr r="0" g="0" b="0"/>
+          </a:effectRef>
           <a:fontRef idx="minor"/>
         </p:style>
         <p:txBody>
           <a:bodyPr wrap="none" lIns="60840" tIns="30600" rIns="60840" bIns="30600" anchor="ctr">
             <a:noAutofit/>
           </a:bodyPr>
+          <a:lstStyle/>
           <a:p>
             <a:pPr algn="r" defTabSz="914400">
               <a:lnSpc>
@@ -1739,7 +1877,7 @@
                 <a:uFillTx/>
                 <a:latin typeface="Rubik SemiBold"/>
               </a:rPr>
-              <a:t>&lt;Foliennummer&gt;</a:t>
+              <a:t>‹Nr.›</a:t>
             </a:fld>
             <a:endParaRPr lang="de-DE" sz="800" b="0" u="none" strike="noStrike">
               <a:solidFill>
@@ -1754,17 +1892,21 @@
       </p:sp>
     </p:spTree>
   </p:cSld>
+  <p:clrMapOvr>
+    <a:masterClrMapping/>
+  </p:clrMapOvr>
 </p:sldLayout>
 </file>
 
 <file path=ppt/slideLayouts/slideLayout15.xml><?xml version="1.0" encoding="utf-8"?>
-<p:sldLayout xmlns:a="http://schemas.openxmlformats.org/drawingml/2006/main" xmlns:p="http://schemas.openxmlformats.org/presentationml/2006/main" xmlns:r="http://schemas.openxmlformats.org/officeDocument/2006/relationships" xmlns:p14="http://schemas.microsoft.com/office/powerpoint/2010/main" xmlns:p15="http://schemas.microsoft.com/office/powerpoint/2012/main" xmlns:mc="http://schemas.openxmlformats.org/markup-compatibility/2006" type="blank" preserve="1">
+<p:sldLayout xmlns:a="http://schemas.openxmlformats.org/drawingml/2006/main" xmlns:r="http://schemas.openxmlformats.org/officeDocument/2006/relationships" xmlns:p="http://schemas.openxmlformats.org/presentationml/2006/main" type="blank" preserve="1">
   <p:cSld name="Abschlussfolie">
     <p:bg>
       <p:bgPr>
         <a:solidFill>
           <a:srgbClr val="FFFFFF"/>
         </a:solidFill>
+        <a:effectLst/>
       </p:bgPr>
     </p:bg>
     <p:spTree>
@@ -1820,6 +1962,7 @@
           <a:bodyPr lIns="90000" tIns="45000" rIns="90000" bIns="45000" anchor="ctr">
             <a:noAutofit/>
           </a:bodyPr>
+          <a:lstStyle/>
           <a:p>
             <a:endParaRPr lang="en-US" sz="900" b="0" u="none" strike="noStrike">
               <a:solidFill>
@@ -2020,7 +2163,7 @@
         </p:nvPicPr>
         <p:blipFill>
           <a:blip r:embed="rId3"/>
-          <a:srcRect l="444" t="0" r="0" b="81603"/>
+          <a:srcRect l="444" b="81603"/>
           <a:stretch/>
         </p:blipFill>
         <p:spPr>
@@ -2044,10 +2187,10 @@
           <p:nvPr/>
         </p:nvPicPr>
         <p:blipFill>
-          <a:blip r:embed="rId4">
+          <a:blip>
             <a:extLst>
               <a:ext uri="{96DAC541-7B7A-43D3-8B79-37D633B846F1}">
-                <asvg:svgBlip xmlns:asvg="http://schemas.microsoft.com/office/drawing/2016/SVG/main" r:embed="rId5"/>
+                <asvg:svgBlip xmlns:asvg="http://schemas.microsoft.com/office/drawing/2016/SVG/main" r:embed="rId4"/>
               </a:ext>
             </a:extLst>
           </a:blip>
@@ -2122,30 +2265,26 @@
               </a:rPr>
               <a:t>Format des Titeltextes durch Klicken bearbeiten</a:t>
             </a:r>
-            <a:endParaRPr lang="en-US" sz="1800" b="0" u="none" strike="noStrike">
-              <a:solidFill>
-                <a:schemeClr val="dk1"/>
-              </a:solidFill>
-              <a:effectLst/>
-              <a:uFillTx/>
-              <a:latin typeface="Calibri"/>
-            </a:endParaRPr>
           </a:p>
         </p:txBody>
       </p:sp>
     </p:spTree>
   </p:cSld>
+  <p:clrMapOvr>
+    <a:masterClrMapping/>
+  </p:clrMapOvr>
 </p:sldLayout>
 </file>
 
 <file path=ppt/slideLayouts/slideLayout16.xml><?xml version="1.0" encoding="utf-8"?>
-<p:sldLayout xmlns:a="http://schemas.openxmlformats.org/drawingml/2006/main" xmlns:p="http://schemas.openxmlformats.org/presentationml/2006/main" xmlns:r="http://schemas.openxmlformats.org/officeDocument/2006/relationships" xmlns:p14="http://schemas.microsoft.com/office/powerpoint/2010/main" xmlns:p15="http://schemas.microsoft.com/office/powerpoint/2012/main" xmlns:mc="http://schemas.openxmlformats.org/markup-compatibility/2006" type="title" preserve="1">
+<p:sldLayout xmlns:a="http://schemas.openxmlformats.org/drawingml/2006/main" xmlns:r="http://schemas.openxmlformats.org/officeDocument/2006/relationships" xmlns:p="http://schemas.openxmlformats.org/presentationml/2006/main" type="title" preserve="1">
   <p:cSld name="1_Titelfolie">
     <p:bg>
       <p:bgPr>
         <a:solidFill>
           <a:srgbClr val="FFFFFF"/>
         </a:solidFill>
+        <a:effectLst/>
       </p:bgPr>
     </p:bg>
     <p:spTree>
@@ -2361,14 +2500,6 @@
               </a:rPr>
               <a:t>&lt;Fußzeile&gt;</a:t>
             </a:r>
-            <a:endParaRPr lang="de-DE" sz="1400" b="0" u="none" strike="noStrike">
-              <a:solidFill>
-                <a:srgbClr val="000000"/>
-              </a:solidFill>
-              <a:effectLst/>
-              <a:uFillTx/>
-              <a:latin typeface="Times New Roman"/>
-            </a:endParaRPr>
           </a:p>
         </p:txBody>
       </p:sp>
@@ -2431,7 +2562,7 @@
                 <a:uFillTx/>
                 <a:latin typeface="Calibri"/>
               </a:rPr>
-              <a:t>&lt;Foliennummer&gt;</a:t>
+              <a:t>‹Nr.›</a:t>
             </a:fld>
             <a:endParaRPr lang="de-DE" sz="1800" b="0" u="none" strike="noStrike">
               <a:solidFill>
@@ -2446,17 +2577,21 @@
       </p:sp>
     </p:spTree>
   </p:cSld>
+  <p:clrMapOvr>
+    <a:masterClrMapping/>
+  </p:clrMapOvr>
 </p:sldLayout>
 </file>
 
 <file path=ppt/slideLayouts/slideLayout17.xml><?xml version="1.0" encoding="utf-8"?>
-<p:sldLayout xmlns:a="http://schemas.openxmlformats.org/drawingml/2006/main" xmlns:p="http://schemas.openxmlformats.org/presentationml/2006/main" xmlns:r="http://schemas.openxmlformats.org/officeDocument/2006/relationships" xmlns:p14="http://schemas.microsoft.com/office/powerpoint/2010/main" xmlns:p15="http://schemas.microsoft.com/office/powerpoint/2012/main" xmlns:mc="http://schemas.openxmlformats.org/markup-compatibility/2006" type="blank" preserve="1">
+<p:sldLayout xmlns:a="http://schemas.openxmlformats.org/drawingml/2006/main" xmlns:r="http://schemas.openxmlformats.org/officeDocument/2006/relationships" xmlns:p="http://schemas.openxmlformats.org/presentationml/2006/main" type="blank" preserve="1">
   <p:cSld name="Zwischentitel">
     <p:bg>
       <p:bgPr>
         <a:solidFill>
           <a:srgbClr val="FFFFFF"/>
         </a:solidFill>
+        <a:effectLst/>
       </p:bgPr>
     </p:bg>
     <p:spTree>
@@ -2514,6 +2649,7 @@
           <a:bodyPr lIns="90000" tIns="45000" rIns="90000" bIns="45000" anchor="ctr">
             <a:noAutofit/>
           </a:bodyPr>
+          <a:lstStyle/>
           <a:p>
             <a:endParaRPr lang="en-US" sz="900" b="0" u="none" strike="noStrike">
               <a:solidFill>
@@ -2761,30 +2897,26 @@
               </a:rPr>
               <a:t>Format des Titeltextes durch Klicken bearbeiten</a:t>
             </a:r>
-            <a:endParaRPr lang="en-US" sz="1800" b="0" u="none" strike="noStrike">
-              <a:solidFill>
-                <a:schemeClr val="dk1"/>
-              </a:solidFill>
-              <a:effectLst/>
-              <a:uFillTx/>
-              <a:latin typeface="Calibri"/>
-            </a:endParaRPr>
           </a:p>
         </p:txBody>
       </p:sp>
     </p:spTree>
   </p:cSld>
+  <p:clrMapOvr>
+    <a:masterClrMapping/>
+  </p:clrMapOvr>
 </p:sldLayout>
 </file>
 
 <file path=ppt/slideLayouts/slideLayout18.xml><?xml version="1.0" encoding="utf-8"?>
-<p:sldLayout xmlns:a="http://schemas.openxmlformats.org/drawingml/2006/main" xmlns:p="http://schemas.openxmlformats.org/presentationml/2006/main" xmlns:r="http://schemas.openxmlformats.org/officeDocument/2006/relationships" xmlns:p14="http://schemas.microsoft.com/office/powerpoint/2010/main" xmlns:p15="http://schemas.microsoft.com/office/powerpoint/2012/main" xmlns:mc="http://schemas.openxmlformats.org/markup-compatibility/2006" type="blank" preserve="1">
+<p:sldLayout xmlns:a="http://schemas.openxmlformats.org/drawingml/2006/main" xmlns:r="http://schemas.openxmlformats.org/officeDocument/2006/relationships" xmlns:p="http://schemas.openxmlformats.org/presentationml/2006/main" type="blank" preserve="1">
   <p:cSld name="Überschrift">
     <p:bg>
       <p:bgPr>
         <a:solidFill>
           <a:srgbClr val="FFFFFF"/>
         </a:solidFill>
+        <a:effectLst/>
       </p:bgPr>
     </p:bg>
     <p:spTree>
@@ -2886,10 +3018,10 @@
           <p:nvPr/>
         </p:nvPicPr>
         <p:blipFill>
-          <a:blip r:embed="rId2">
+          <a:blip>
             <a:extLst>
               <a:ext uri="{96DAC541-7B7A-43D3-8B79-37D633B846F1}">
-                <asvg:svgBlip xmlns:asvg="http://schemas.microsoft.com/office/drawing/2016/SVG/main" r:embed="rId3"/>
+                <asvg:svgBlip xmlns:asvg="http://schemas.microsoft.com/office/drawing/2016/SVG/main" r:embed="rId2"/>
               </a:ext>
             </a:extLst>
           </a:blip>
@@ -3013,15 +3145,22 @@
           </a:ln>
         </p:spPr>
         <p:style>
-          <a:lnRef idx="0"/>
-          <a:fillRef idx="0"/>
-          <a:effectRef idx="0"/>
+          <a:lnRef idx="0">
+            <a:scrgbClr r="0" g="0" b="0"/>
+          </a:lnRef>
+          <a:fillRef idx="0">
+            <a:scrgbClr r="0" g="0" b="0"/>
+          </a:fillRef>
+          <a:effectRef idx="0">
+            <a:scrgbClr r="0" g="0" b="0"/>
+          </a:effectRef>
           <a:fontRef idx="minor"/>
         </p:style>
         <p:txBody>
           <a:bodyPr wrap="none" lIns="60840" tIns="30600" rIns="60840" bIns="30600" anchor="ctr">
             <a:noAutofit/>
           </a:bodyPr>
+          <a:lstStyle/>
           <a:p>
             <a:pPr algn="r" defTabSz="914400">
               <a:lnSpc>
@@ -3037,7 +3176,7 @@
                 <a:uFillTx/>
                 <a:latin typeface="Rubik SemiBold"/>
               </a:rPr>
-              <a:t>&lt;Foliennummer&gt;</a:t>
+              <a:t>‹Nr.›</a:t>
             </a:fld>
             <a:endParaRPr lang="de-DE" sz="800" b="0" u="none" strike="noStrike">
               <a:solidFill>
@@ -3052,17 +3191,21 @@
       </p:sp>
     </p:spTree>
   </p:cSld>
+  <p:clrMapOvr>
+    <a:masterClrMapping/>
+  </p:clrMapOvr>
 </p:sldLayout>
 </file>
 
 <file path=ppt/slideLayouts/slideLayout19.xml><?xml version="1.0" encoding="utf-8"?>
-<p:sldLayout xmlns:a="http://schemas.openxmlformats.org/drawingml/2006/main" xmlns:p="http://schemas.openxmlformats.org/presentationml/2006/main" xmlns:r="http://schemas.openxmlformats.org/officeDocument/2006/relationships" xmlns:p14="http://schemas.microsoft.com/office/powerpoint/2010/main" xmlns:p15="http://schemas.microsoft.com/office/powerpoint/2012/main" xmlns:mc="http://schemas.openxmlformats.org/markup-compatibility/2006" type="blank" preserve="1">
+<p:sldLayout xmlns:a="http://schemas.openxmlformats.org/drawingml/2006/main" xmlns:r="http://schemas.openxmlformats.org/officeDocument/2006/relationships" xmlns:p="http://schemas.openxmlformats.org/presentationml/2006/main" type="blank" preserve="1">
   <p:cSld name="Überschrift (HG Electric Indigo)">
     <p:bg>
       <p:bgPr>
         <a:solidFill>
           <a:srgbClr val="5500EB"/>
         </a:solidFill>
+        <a:effectLst/>
       </p:bgPr>
     </p:bg>
     <p:spTree>
@@ -3285,15 +3428,22 @@
           </a:ln>
         </p:spPr>
         <p:style>
-          <a:lnRef idx="0"/>
-          <a:fillRef idx="0"/>
-          <a:effectRef idx="0"/>
+          <a:lnRef idx="0">
+            <a:scrgbClr r="0" g="0" b="0"/>
+          </a:lnRef>
+          <a:fillRef idx="0">
+            <a:scrgbClr r="0" g="0" b="0"/>
+          </a:fillRef>
+          <a:effectRef idx="0">
+            <a:scrgbClr r="0" g="0" b="0"/>
+          </a:effectRef>
           <a:fontRef idx="minor"/>
         </p:style>
         <p:txBody>
           <a:bodyPr wrap="none" lIns="60840" tIns="30600" rIns="60840" bIns="30600" anchor="ctr">
             <a:noAutofit/>
           </a:bodyPr>
+          <a:lstStyle/>
           <a:p>
             <a:pPr algn="r" defTabSz="914400">
               <a:lnSpc>
@@ -3309,7 +3459,7 @@
                 <a:uFillTx/>
                 <a:latin typeface="Rubik SemiBold"/>
               </a:rPr>
-              <a:t>&lt;Foliennummer&gt;</a:t>
+              <a:t>‹Nr.›</a:t>
             </a:fld>
             <a:endParaRPr lang="de-DE" sz="800" b="0" u="none" strike="noStrike">
               <a:solidFill>
@@ -3324,17 +3474,21 @@
       </p:sp>
     </p:spTree>
   </p:cSld>
+  <p:clrMapOvr>
+    <a:masterClrMapping/>
+  </p:clrMapOvr>
 </p:sldLayout>
 </file>
 
 <file path=ppt/slideLayouts/slideLayout2.xml><?xml version="1.0" encoding="utf-8"?>
-<p:sldLayout xmlns:a="http://schemas.openxmlformats.org/drawingml/2006/main" xmlns:p="http://schemas.openxmlformats.org/presentationml/2006/main" xmlns:r="http://schemas.openxmlformats.org/officeDocument/2006/relationships" xmlns:p14="http://schemas.microsoft.com/office/powerpoint/2010/main" xmlns:p15="http://schemas.microsoft.com/office/powerpoint/2012/main" xmlns:mc="http://schemas.openxmlformats.org/markup-compatibility/2006" type="blank" preserve="1">
+<p:sldLayout xmlns:a="http://schemas.openxmlformats.org/drawingml/2006/main" xmlns:r="http://schemas.openxmlformats.org/officeDocument/2006/relationships" xmlns:p="http://schemas.openxmlformats.org/presentationml/2006/main" type="blank" preserve="1">
   <p:cSld name="Überschrift (2-zeilig) + Inhalt (Dark HG)">
     <p:bg>
       <p:bgPr>
         <a:solidFill>
           <a:srgbClr val="140046"/>
         </a:solidFill>
+        <a:effectLst/>
       </p:bgPr>
     </p:bg>
     <p:spTree>
@@ -3479,15 +3633,22 @@
           </a:ln>
         </p:spPr>
         <p:style>
-          <a:lnRef idx="0"/>
-          <a:fillRef idx="0"/>
-          <a:effectRef idx="0"/>
+          <a:lnRef idx="0">
+            <a:scrgbClr r="0" g="0" b="0"/>
+          </a:lnRef>
+          <a:fillRef idx="0">
+            <a:scrgbClr r="0" g="0" b="0"/>
+          </a:fillRef>
+          <a:effectRef idx="0">
+            <a:scrgbClr r="0" g="0" b="0"/>
+          </a:effectRef>
           <a:fontRef idx="minor"/>
         </p:style>
         <p:txBody>
           <a:bodyPr wrap="none" lIns="60840" tIns="30600" rIns="60840" bIns="30600" anchor="ctr">
             <a:noAutofit/>
           </a:bodyPr>
+          <a:lstStyle/>
           <a:p>
             <a:pPr algn="r" defTabSz="914400">
               <a:lnSpc>
@@ -3503,7 +3664,7 @@
                 <a:uFillTx/>
                 <a:latin typeface="Rubik SemiBold"/>
               </a:rPr>
-              <a:t>&lt;Foliennummer&gt;</a:t>
+              <a:t>‹Nr.›</a:t>
             </a:fld>
             <a:endParaRPr lang="de-DE" sz="800" b="0" u="none" strike="noStrike">
               <a:solidFill>
@@ -3766,7 +3927,7 @@
               </a:spcBef>
               <a:buSzPct val="100000"/>
               <a:buBlip>
-                <a:blip r:embed="rId4"/>
+                <a:blip r:embed="rId3"/>
               </a:buBlip>
               <a:tabLst>
                 <a:tab pos="0" algn="l"/>
@@ -3944,17 +4105,21 @@
       </p:sp>
     </p:spTree>
   </p:cSld>
+  <p:clrMapOvr>
+    <a:masterClrMapping/>
+  </p:clrMapOvr>
 </p:sldLayout>
 </file>
 
 <file path=ppt/slideLayouts/slideLayout20.xml><?xml version="1.0" encoding="utf-8"?>
-<p:sldLayout xmlns:a="http://schemas.openxmlformats.org/drawingml/2006/main" xmlns:p="http://schemas.openxmlformats.org/presentationml/2006/main" xmlns:r="http://schemas.openxmlformats.org/officeDocument/2006/relationships" xmlns:p14="http://schemas.microsoft.com/office/powerpoint/2010/main" xmlns:p15="http://schemas.microsoft.com/office/powerpoint/2012/main" xmlns:mc="http://schemas.openxmlformats.org/markup-compatibility/2006" type="blank" preserve="1">
+<p:sldLayout xmlns:a="http://schemas.openxmlformats.org/drawingml/2006/main" xmlns:r="http://schemas.openxmlformats.org/officeDocument/2006/relationships" xmlns:p="http://schemas.openxmlformats.org/presentationml/2006/main" type="blank" preserve="1">
   <p:cSld name="Überschrift (Dark HG)">
     <p:bg>
       <p:bgPr>
         <a:solidFill>
           <a:srgbClr val="140046"/>
         </a:solidFill>
+        <a:effectLst/>
       </p:bgPr>
     </p:bg>
     <p:spTree>
@@ -4099,15 +4264,22 @@
           </a:ln>
         </p:spPr>
         <p:style>
-          <a:lnRef idx="0"/>
-          <a:fillRef idx="0"/>
-          <a:effectRef idx="0"/>
+          <a:lnRef idx="0">
+            <a:scrgbClr r="0" g="0" b="0"/>
+          </a:lnRef>
+          <a:fillRef idx="0">
+            <a:scrgbClr r="0" g="0" b="0"/>
+          </a:fillRef>
+          <a:effectRef idx="0">
+            <a:scrgbClr r="0" g="0" b="0"/>
+          </a:effectRef>
           <a:fontRef idx="minor"/>
         </p:style>
         <p:txBody>
           <a:bodyPr wrap="none" lIns="60840" tIns="30600" rIns="60840" bIns="30600" anchor="ctr">
             <a:noAutofit/>
           </a:bodyPr>
+          <a:lstStyle/>
           <a:p>
             <a:pPr algn="r" defTabSz="914400">
               <a:lnSpc>
@@ -4123,7 +4295,7 @@
                 <a:uFillTx/>
                 <a:latin typeface="Rubik SemiBold"/>
               </a:rPr>
-              <a:t>&lt;Foliennummer&gt;</a:t>
+              <a:t>‹Nr.›</a:t>
             </a:fld>
             <a:endParaRPr lang="de-DE" sz="800" b="0" u="none" strike="noStrike">
               <a:solidFill>
@@ -4269,30 +4441,26 @@
               </a:rPr>
               <a:t>Format des Titeltextes durch Klicken bearbeiten</a:t>
             </a:r>
-            <a:endParaRPr lang="en-US" sz="1800" b="0" u="none" strike="noStrike">
-              <a:solidFill>
-                <a:schemeClr val="lt1"/>
-              </a:solidFill>
-              <a:effectLst/>
-              <a:uFillTx/>
-              <a:latin typeface="Calibri"/>
-            </a:endParaRPr>
           </a:p>
         </p:txBody>
       </p:sp>
     </p:spTree>
   </p:cSld>
+  <p:clrMapOvr>
+    <a:masterClrMapping/>
+  </p:clrMapOvr>
 </p:sldLayout>
 </file>
 
 <file path=ppt/slideLayouts/slideLayout21.xml><?xml version="1.0" encoding="utf-8"?>
-<p:sldLayout xmlns:a="http://schemas.openxmlformats.org/drawingml/2006/main" xmlns:p="http://schemas.openxmlformats.org/presentationml/2006/main" xmlns:r="http://schemas.openxmlformats.org/officeDocument/2006/relationships" xmlns:p14="http://schemas.microsoft.com/office/powerpoint/2010/main" xmlns:p15="http://schemas.microsoft.com/office/powerpoint/2012/main" xmlns:mc="http://schemas.openxmlformats.org/markup-compatibility/2006" type="blank" preserve="1">
+<p:sldLayout xmlns:a="http://schemas.openxmlformats.org/drawingml/2006/main" xmlns:r="http://schemas.openxmlformats.org/officeDocument/2006/relationships" xmlns:p="http://schemas.openxmlformats.org/presentationml/2006/main" type="blank" preserve="1">
   <p:cSld name="Überschrift (1-zeilig) + Inhalt">
     <p:bg>
       <p:bgPr>
         <a:solidFill>
           <a:srgbClr val="FFFFFF"/>
         </a:solidFill>
+        <a:effectLst/>
       </p:bgPr>
     </p:bg>
     <p:spTree>
@@ -4316,10 +4484,10 @@
           <p:nvPr/>
         </p:nvPicPr>
         <p:blipFill>
-          <a:blip r:embed="rId2">
+          <a:blip>
             <a:extLst>
               <a:ext uri="{96DAC541-7B7A-43D3-8B79-37D633B846F1}">
-                <asvg:svgBlip xmlns:asvg="http://schemas.microsoft.com/office/drawing/2016/SVG/main" r:embed="rId3"/>
+                <asvg:svgBlip xmlns:asvg="http://schemas.microsoft.com/office/drawing/2016/SVG/main" r:embed="rId2"/>
               </a:ext>
             </a:extLst>
           </a:blip>
@@ -4538,7 +4706,7 @@
               </a:spcBef>
               <a:buSzPct val="100000"/>
               <a:buBlip>
-                <a:blip r:embed="rId4"/>
+                <a:blip r:embed="rId3"/>
               </a:buBlip>
               <a:tabLst>
                 <a:tab pos="0" algn="l"/>
@@ -4561,7 +4729,7 @@
               </a:spcBef>
               <a:buSzPct val="100000"/>
               <a:buBlip>
-                <a:blip r:embed="rId5"/>
+                <a:blip r:embed="rId3"/>
               </a:buBlip>
               <a:tabLst>
                 <a:tab pos="0" algn="l"/>
@@ -4584,7 +4752,7 @@
               </a:spcBef>
               <a:buSzPct val="100000"/>
               <a:buBlip>
-                <a:blip r:embed="rId6"/>
+                <a:blip r:embed="rId3"/>
               </a:buBlip>
               <a:tabLst>
                 <a:tab pos="0" algn="l"/>
@@ -4607,7 +4775,7 @@
               </a:spcBef>
               <a:buSzPct val="100000"/>
               <a:buBlip>
-                <a:blip r:embed="rId7"/>
+                <a:blip r:embed="rId4"/>
               </a:buBlip>
               <a:tabLst>
                 <a:tab pos="0" algn="l"/>
@@ -4630,7 +4798,7 @@
               </a:spcBef>
               <a:buSzPct val="100000"/>
               <a:buBlip>
-                <a:blip r:embed="rId8"/>
+                <a:blip r:embed="rId4"/>
               </a:buBlip>
               <a:tabLst>
                 <a:tab pos="0" algn="l"/>
@@ -4655,7 +4823,7 @@
               </a:spcBef>
               <a:buSzPct val="100000"/>
               <a:buBlip>
-                <a:blip r:embed="rId9"/>
+                <a:blip r:embed="rId3"/>
               </a:buBlip>
               <a:tabLst>
                 <a:tab pos="0" algn="l"/>
@@ -4672,14 +4840,6 @@
               </a:rPr>
               <a:t>Mastertextformat bearbeiten</a:t>
             </a:r>
-            <a:endParaRPr lang="de-DE" sz="2400" b="0" u="none" strike="noStrike">
-              <a:solidFill>
-                <a:schemeClr val="dk1"/>
-              </a:solidFill>
-              <a:effectLst/>
-              <a:uFillTx/>
-              <a:latin typeface="Rubik"/>
-            </a:endParaRPr>
           </a:p>
           <a:p>
             <a:pPr marL="272880" lvl="1" indent="-263520" algn="l" defTabSz="914040">
@@ -4691,7 +4851,7 @@
               </a:spcBef>
               <a:buSzPct val="100000"/>
               <a:buBlip>
-                <a:blip r:embed="rId10"/>
+                <a:blip r:embed="rId3"/>
               </a:buBlip>
               <a:tabLst>
                 <a:tab pos="0" algn="l"/>
@@ -4708,14 +4868,6 @@
               </a:rPr>
               <a:t>Zweite Ebene</a:t>
             </a:r>
-            <a:endParaRPr lang="de-DE" sz="2000" b="0" u="none" strike="noStrike">
-              <a:solidFill>
-                <a:schemeClr val="dk1"/>
-              </a:solidFill>
-              <a:effectLst/>
-              <a:uFillTx/>
-              <a:latin typeface="Rubik"/>
-            </a:endParaRPr>
           </a:p>
           <a:p>
             <a:pPr marL="272880" lvl="2" indent="-263520" algn="l" defTabSz="914040">
@@ -4727,7 +4879,7 @@
               </a:spcBef>
               <a:buSzPct val="100000"/>
               <a:buBlip>
-                <a:blip r:embed="rId11"/>
+                <a:blip r:embed="rId3"/>
               </a:buBlip>
               <a:tabLst>
                 <a:tab pos="0" algn="l"/>
@@ -4744,14 +4896,6 @@
               </a:rPr>
               <a:t>Dritte Ebene</a:t>
             </a:r>
-            <a:endParaRPr lang="de-DE" sz="1600" b="0" u="none" strike="noStrike">
-              <a:solidFill>
-                <a:schemeClr val="dk1"/>
-              </a:solidFill>
-              <a:effectLst/>
-              <a:uFillTx/>
-              <a:latin typeface="Rubik"/>
-            </a:endParaRPr>
           </a:p>
           <a:p>
             <a:pPr marL="272880" lvl="3" indent="-263520" algn="l" defTabSz="914040">
@@ -4763,7 +4907,7 @@
               </a:spcBef>
               <a:buSzPct val="100000"/>
               <a:buBlip>
-                <a:blip r:embed="rId12"/>
+                <a:blip r:embed="rId4"/>
               </a:buBlip>
               <a:tabLst>
                 <a:tab pos="0" algn="l"/>
@@ -4780,14 +4924,6 @@
               </a:rPr>
               <a:t>Vierte Ebene</a:t>
             </a:r>
-            <a:endParaRPr lang="de-DE" sz="1400" b="0" u="none" strike="noStrike">
-              <a:solidFill>
-                <a:schemeClr val="dk1"/>
-              </a:solidFill>
-              <a:effectLst/>
-              <a:uFillTx/>
-              <a:latin typeface="Rubik"/>
-            </a:endParaRPr>
           </a:p>
           <a:p>
             <a:pPr marL="272880" lvl="4" indent="-263520" algn="l" defTabSz="914040">
@@ -4799,7 +4935,7 @@
               </a:spcBef>
               <a:buSzPct val="100000"/>
               <a:buBlip>
-                <a:blip r:embed="rId13"/>
+                <a:blip r:embed="rId4"/>
               </a:buBlip>
               <a:tabLst>
                 <a:tab pos="0" algn="l"/>
@@ -4816,14 +4952,6 @@
               </a:rPr>
               <a:t>Fünfte Ebene</a:t>
             </a:r>
-            <a:endParaRPr lang="de-DE" sz="1400" b="0" u="none" strike="noStrike">
-              <a:solidFill>
-                <a:schemeClr val="dk1"/>
-              </a:solidFill>
-              <a:effectLst/>
-              <a:uFillTx/>
-              <a:latin typeface="Rubik"/>
-            </a:endParaRPr>
           </a:p>
         </p:txBody>
       </p:sp>
@@ -4847,15 +4975,22 @@
           </a:ln>
         </p:spPr>
         <p:style>
-          <a:lnRef idx="0"/>
-          <a:fillRef idx="0"/>
-          <a:effectRef idx="0"/>
+          <a:lnRef idx="0">
+            <a:scrgbClr r="0" g="0" b="0"/>
+          </a:lnRef>
+          <a:fillRef idx="0">
+            <a:scrgbClr r="0" g="0" b="0"/>
+          </a:fillRef>
+          <a:effectRef idx="0">
+            <a:scrgbClr r="0" g="0" b="0"/>
+          </a:effectRef>
           <a:fontRef idx="minor"/>
         </p:style>
         <p:txBody>
           <a:bodyPr wrap="none" lIns="60840" tIns="30600" rIns="60840" bIns="30600" anchor="ctr">
             <a:noAutofit/>
           </a:bodyPr>
+          <a:lstStyle/>
           <a:p>
             <a:pPr algn="r" defTabSz="914400">
               <a:lnSpc>
@@ -4871,7 +5006,7 @@
                 <a:uFillTx/>
                 <a:latin typeface="Rubik SemiBold"/>
               </a:rPr>
-              <a:t>&lt;Foliennummer&gt;</a:t>
+              <a:t>‹Nr.›</a:t>
             </a:fld>
             <a:endParaRPr lang="de-DE" sz="800" b="0" u="none" strike="noStrike">
               <a:solidFill>
@@ -4939,30 +5074,26 @@
               </a:rPr>
               <a:t>Format des Titeltextes durch Klicken bearbeiten</a:t>
             </a:r>
-            <a:endParaRPr lang="en-US" sz="1800" b="0" u="none" strike="noStrike">
-              <a:solidFill>
-                <a:schemeClr val="dk1"/>
-              </a:solidFill>
-              <a:effectLst/>
-              <a:uFillTx/>
-              <a:latin typeface="Calibri"/>
-            </a:endParaRPr>
           </a:p>
         </p:txBody>
       </p:sp>
     </p:spTree>
   </p:cSld>
+  <p:clrMapOvr>
+    <a:masterClrMapping/>
+  </p:clrMapOvr>
 </p:sldLayout>
 </file>
 
 <file path=ppt/slideLayouts/slideLayout22.xml><?xml version="1.0" encoding="utf-8"?>
-<p:sldLayout xmlns:a="http://schemas.openxmlformats.org/drawingml/2006/main" xmlns:p="http://schemas.openxmlformats.org/presentationml/2006/main" xmlns:r="http://schemas.openxmlformats.org/officeDocument/2006/relationships" xmlns:p14="http://schemas.microsoft.com/office/powerpoint/2010/main" xmlns:p15="http://schemas.microsoft.com/office/powerpoint/2012/main" xmlns:mc="http://schemas.openxmlformats.org/markup-compatibility/2006" type="blank" preserve="1">
+<p:sldLayout xmlns:a="http://schemas.openxmlformats.org/drawingml/2006/main" xmlns:r="http://schemas.openxmlformats.org/officeDocument/2006/relationships" xmlns:p="http://schemas.openxmlformats.org/presentationml/2006/main" type="blank" preserve="1">
   <p:cSld name="Überschrift (2-zeilig) + Inhalt">
     <p:bg>
       <p:bgPr>
         <a:solidFill>
           <a:srgbClr val="FFFFFF"/>
         </a:solidFill>
+        <a:effectLst/>
       </p:bgPr>
     </p:bg>
     <p:spTree>
@@ -4986,10 +5117,10 @@
           <p:nvPr/>
         </p:nvPicPr>
         <p:blipFill>
-          <a:blip r:embed="rId2">
+          <a:blip>
             <a:extLst>
               <a:ext uri="{96DAC541-7B7A-43D3-8B79-37D633B846F1}">
-                <asvg:svgBlip xmlns:asvg="http://schemas.microsoft.com/office/drawing/2016/SVG/main" r:embed="rId3"/>
+                <asvg:svgBlip xmlns:asvg="http://schemas.microsoft.com/office/drawing/2016/SVG/main" r:embed="rId2"/>
               </a:ext>
             </a:extLst>
           </a:blip>
@@ -5130,7 +5261,7 @@
               </a:spcBef>
               <a:buSzPct val="100000"/>
               <a:buBlip>
-                <a:blip r:embed="rId4"/>
+                <a:blip r:embed="rId3"/>
               </a:buBlip>
               <a:tabLst>
                 <a:tab pos="0" algn="l"/>
@@ -5153,7 +5284,7 @@
               </a:spcBef>
               <a:buSzPct val="100000"/>
               <a:buBlip>
-                <a:blip r:embed="rId5"/>
+                <a:blip r:embed="rId3"/>
               </a:buBlip>
               <a:tabLst>
                 <a:tab pos="0" algn="l"/>
@@ -5176,7 +5307,7 @@
               </a:spcBef>
               <a:buSzPct val="100000"/>
               <a:buBlip>
-                <a:blip r:embed="rId6"/>
+                <a:blip r:embed="rId3"/>
               </a:buBlip>
               <a:tabLst>
                 <a:tab pos="0" algn="l"/>
@@ -5199,7 +5330,7 @@
               </a:spcBef>
               <a:buSzPct val="100000"/>
               <a:buBlip>
-                <a:blip r:embed="rId7"/>
+                <a:blip r:embed="rId4"/>
               </a:buBlip>
               <a:tabLst>
                 <a:tab pos="0" algn="l"/>
@@ -5222,7 +5353,7 @@
               </a:spcBef>
               <a:buSzPct val="100000"/>
               <a:buBlip>
-                <a:blip r:embed="rId8"/>
+                <a:blip r:embed="rId4"/>
               </a:buBlip>
               <a:tabLst>
                 <a:tab pos="0" algn="l"/>
@@ -5247,7 +5378,7 @@
               </a:spcBef>
               <a:buSzPct val="100000"/>
               <a:buBlip>
-                <a:blip r:embed="rId9"/>
+                <a:blip r:embed="rId3"/>
               </a:buBlip>
               <a:tabLst>
                 <a:tab pos="0" algn="l"/>
@@ -5283,7 +5414,7 @@
               </a:spcBef>
               <a:buSzPct val="100000"/>
               <a:buBlip>
-                <a:blip r:embed="rId10"/>
+                <a:blip r:embed="rId3"/>
               </a:buBlip>
               <a:tabLst>
                 <a:tab pos="0" algn="l"/>
@@ -5300,14 +5431,6 @@
               </a:rPr>
               <a:t>Zweite Ebene</a:t>
             </a:r>
-            <a:endParaRPr lang="de-DE" sz="2000" b="0" u="none" strike="noStrike">
-              <a:solidFill>
-                <a:schemeClr val="dk1"/>
-              </a:solidFill>
-              <a:effectLst/>
-              <a:uFillTx/>
-              <a:latin typeface="Rubik"/>
-            </a:endParaRPr>
           </a:p>
           <a:p>
             <a:pPr marL="272880" lvl="2" indent="-263520" algn="l" defTabSz="914040">
@@ -5319,7 +5442,7 @@
               </a:spcBef>
               <a:buSzPct val="100000"/>
               <a:buBlip>
-                <a:blip r:embed="rId11"/>
+                <a:blip r:embed="rId3"/>
               </a:buBlip>
               <a:tabLst>
                 <a:tab pos="0" algn="l"/>
@@ -5336,14 +5459,6 @@
               </a:rPr>
               <a:t>Dritte Ebene</a:t>
             </a:r>
-            <a:endParaRPr lang="de-DE" sz="1600" b="0" u="none" strike="noStrike">
-              <a:solidFill>
-                <a:schemeClr val="dk1"/>
-              </a:solidFill>
-              <a:effectLst/>
-              <a:uFillTx/>
-              <a:latin typeface="Rubik"/>
-            </a:endParaRPr>
           </a:p>
           <a:p>
             <a:pPr marL="272880" lvl="3" indent="-263520" algn="l" defTabSz="914040">
@@ -5355,7 +5470,7 @@
               </a:spcBef>
               <a:buSzPct val="100000"/>
               <a:buBlip>
-                <a:blip r:embed="rId12"/>
+                <a:blip r:embed="rId4"/>
               </a:buBlip>
               <a:tabLst>
                 <a:tab pos="0" algn="l"/>
@@ -5372,14 +5487,6 @@
               </a:rPr>
               <a:t>Vierte Ebene</a:t>
             </a:r>
-            <a:endParaRPr lang="de-DE" sz="1400" b="0" u="none" strike="noStrike">
-              <a:solidFill>
-                <a:schemeClr val="dk1"/>
-              </a:solidFill>
-              <a:effectLst/>
-              <a:uFillTx/>
-              <a:latin typeface="Rubik"/>
-            </a:endParaRPr>
           </a:p>
           <a:p>
             <a:pPr marL="272880" lvl="4" indent="-263520" algn="l" defTabSz="914040">
@@ -5391,7 +5498,7 @@
               </a:spcBef>
               <a:buSzPct val="100000"/>
               <a:buBlip>
-                <a:blip r:embed="rId13"/>
+                <a:blip r:embed="rId4"/>
               </a:buBlip>
               <a:tabLst>
                 <a:tab pos="0" algn="l"/>
@@ -5408,14 +5515,6 @@
               </a:rPr>
               <a:t>Fünfte Ebene</a:t>
             </a:r>
-            <a:endParaRPr lang="de-DE" sz="1400" b="0" u="none" strike="noStrike">
-              <a:solidFill>
-                <a:schemeClr val="dk1"/>
-              </a:solidFill>
-              <a:effectLst/>
-              <a:uFillTx/>
-              <a:latin typeface="Rubik"/>
-            </a:endParaRPr>
           </a:p>
         </p:txBody>
       </p:sp>
@@ -5500,14 +5599,6 @@
               </a:rPr>
               <a:t>zweizeilige Headline</a:t>
             </a:r>
-            <a:endParaRPr lang="de-DE" sz="3600" b="0" u="none" strike="noStrike">
-              <a:solidFill>
-                <a:srgbClr val="101010"/>
-              </a:solidFill>
-              <a:effectLst/>
-              <a:uFillTx/>
-              <a:latin typeface="Rubik SemiBold"/>
-            </a:endParaRPr>
           </a:p>
         </p:txBody>
       </p:sp>
@@ -5531,15 +5622,22 @@
           </a:ln>
         </p:spPr>
         <p:style>
-          <a:lnRef idx="0"/>
-          <a:fillRef idx="0"/>
-          <a:effectRef idx="0"/>
+          <a:lnRef idx="0">
+            <a:scrgbClr r="0" g="0" b="0"/>
+          </a:lnRef>
+          <a:fillRef idx="0">
+            <a:scrgbClr r="0" g="0" b="0"/>
+          </a:fillRef>
+          <a:effectRef idx="0">
+            <a:scrgbClr r="0" g="0" b="0"/>
+          </a:effectRef>
           <a:fontRef idx="minor"/>
         </p:style>
         <p:txBody>
           <a:bodyPr wrap="none" lIns="60840" tIns="30600" rIns="60840" bIns="30600" anchor="ctr">
             <a:noAutofit/>
           </a:bodyPr>
+          <a:lstStyle/>
           <a:p>
             <a:pPr algn="r" defTabSz="914400">
               <a:lnSpc>
@@ -5555,7 +5653,7 @@
                 <a:uFillTx/>
                 <a:latin typeface="Rubik SemiBold"/>
               </a:rPr>
-              <a:t>&lt;Foliennummer&gt;</a:t>
+              <a:t>‹Nr.›</a:t>
             </a:fld>
             <a:endParaRPr lang="de-DE" sz="800" b="0" u="none" strike="noStrike">
               <a:solidFill>
@@ -5570,17 +5668,21 @@
       </p:sp>
     </p:spTree>
   </p:cSld>
+  <p:clrMapOvr>
+    <a:masterClrMapping/>
+  </p:clrMapOvr>
 </p:sldLayout>
 </file>
 
 <file path=ppt/slideLayouts/slideLayout23.xml><?xml version="1.0" encoding="utf-8"?>
-<p:sldLayout xmlns:a="http://schemas.openxmlformats.org/drawingml/2006/main" xmlns:p="http://schemas.openxmlformats.org/presentationml/2006/main" xmlns:r="http://schemas.openxmlformats.org/officeDocument/2006/relationships" xmlns:p14="http://schemas.microsoft.com/office/powerpoint/2010/main" xmlns:p15="http://schemas.microsoft.com/office/powerpoint/2012/main" xmlns:mc="http://schemas.openxmlformats.org/markup-compatibility/2006" type="blank" preserve="1">
+<p:sldLayout xmlns:a="http://schemas.openxmlformats.org/drawingml/2006/main" xmlns:r="http://schemas.openxmlformats.org/officeDocument/2006/relationships" xmlns:p="http://schemas.openxmlformats.org/presentationml/2006/main" type="blank" preserve="1">
   <p:cSld name="Überschrift (1-zeilig) + Inhalt (Dark HG)">
     <p:bg>
       <p:bgPr>
         <a:solidFill>
           <a:srgbClr val="140046"/>
         </a:solidFill>
+        <a:effectLst/>
       </p:bgPr>
     </p:bg>
     <p:spTree>
@@ -5725,15 +5827,22 @@
           </a:ln>
         </p:spPr>
         <p:style>
-          <a:lnRef idx="0"/>
-          <a:fillRef idx="0"/>
-          <a:effectRef idx="0"/>
+          <a:lnRef idx="0">
+            <a:scrgbClr r="0" g="0" b="0"/>
+          </a:lnRef>
+          <a:fillRef idx="0">
+            <a:scrgbClr r="0" g="0" b="0"/>
+          </a:fillRef>
+          <a:effectRef idx="0">
+            <a:scrgbClr r="0" g="0" b="0"/>
+          </a:effectRef>
           <a:fontRef idx="minor"/>
         </p:style>
         <p:txBody>
           <a:bodyPr wrap="none" lIns="60840" tIns="30600" rIns="60840" bIns="30600" anchor="ctr">
             <a:noAutofit/>
           </a:bodyPr>
+          <a:lstStyle/>
           <a:p>
             <a:pPr algn="r" defTabSz="914400">
               <a:lnSpc>
@@ -5749,7 +5858,7 @@
                 <a:uFillTx/>
                 <a:latin typeface="Rubik SemiBold"/>
               </a:rPr>
-              <a:t>&lt;Foliennummer&gt;</a:t>
+              <a:t>‹Nr.›</a:t>
             </a:fld>
             <a:endParaRPr lang="de-DE" sz="800" b="0" u="none" strike="noStrike">
               <a:solidFill>
@@ -5998,7 +6107,7 @@
               </a:spcBef>
               <a:buSzPct val="100000"/>
               <a:buBlip>
-                <a:blip r:embed="rId4"/>
+                <a:blip r:embed="rId3"/>
               </a:buBlip>
               <a:tabLst>
                 <a:tab pos="0" algn="l"/>
@@ -6176,17 +6285,21 @@
       </p:sp>
     </p:spTree>
   </p:cSld>
+  <p:clrMapOvr>
+    <a:masterClrMapping/>
+  </p:clrMapOvr>
 </p:sldLayout>
 </file>
 
 <file path=ppt/slideLayouts/slideLayout3.xml><?xml version="1.0" encoding="utf-8"?>
-<p:sldLayout xmlns:a="http://schemas.openxmlformats.org/drawingml/2006/main" xmlns:p="http://schemas.openxmlformats.org/presentationml/2006/main" xmlns:r="http://schemas.openxmlformats.org/officeDocument/2006/relationships" xmlns:p14="http://schemas.microsoft.com/office/powerpoint/2010/main" xmlns:p15="http://schemas.microsoft.com/office/powerpoint/2012/main" xmlns:mc="http://schemas.openxmlformats.org/markup-compatibility/2006" type="blank" preserve="1">
+<p:sldLayout xmlns:a="http://schemas.openxmlformats.org/drawingml/2006/main" xmlns:r="http://schemas.openxmlformats.org/officeDocument/2006/relationships" xmlns:p="http://schemas.openxmlformats.org/presentationml/2006/main" type="blank" preserve="1">
   <p:cSld name="Überschrift + 3x Inhalt">
     <p:bg>
       <p:bgPr>
         <a:solidFill>
           <a:srgbClr val="FFFFFF"/>
         </a:solidFill>
+        <a:effectLst/>
       </p:bgPr>
     </p:bg>
     <p:spTree>
@@ -6210,10 +6323,10 @@
           <p:nvPr/>
         </p:nvPicPr>
         <p:blipFill>
-          <a:blip r:embed="rId2">
+          <a:blip>
             <a:extLst>
               <a:ext uri="{96DAC541-7B7A-43D3-8B79-37D633B846F1}">
-                <asvg:svgBlip xmlns:asvg="http://schemas.microsoft.com/office/drawing/2016/SVG/main" r:embed="rId3"/>
+                <asvg:svgBlip xmlns:asvg="http://schemas.microsoft.com/office/drawing/2016/SVG/main" r:embed="rId2"/>
               </a:ext>
             </a:extLst>
           </a:blip>
@@ -6415,15 +6528,22 @@
           </a:ln>
         </p:spPr>
         <p:style>
-          <a:lnRef idx="0"/>
-          <a:fillRef idx="0"/>
-          <a:effectRef idx="0"/>
+          <a:lnRef idx="0">
+            <a:scrgbClr r="0" g="0" b="0"/>
+          </a:lnRef>
+          <a:fillRef idx="0">
+            <a:scrgbClr r="0" g="0" b="0"/>
+          </a:fillRef>
+          <a:effectRef idx="0">
+            <a:scrgbClr r="0" g="0" b="0"/>
+          </a:effectRef>
           <a:fontRef idx="minor"/>
         </p:style>
         <p:txBody>
           <a:bodyPr wrap="none" lIns="60840" tIns="30600" rIns="60840" bIns="30600" anchor="ctr">
             <a:noAutofit/>
           </a:bodyPr>
+          <a:lstStyle/>
           <a:p>
             <a:pPr algn="r" defTabSz="914400">
               <a:lnSpc>
@@ -6439,7 +6559,7 @@
                 <a:uFillTx/>
                 <a:latin typeface="Rubik SemiBold"/>
               </a:rPr>
-              <a:t>&lt;Foliennummer&gt;</a:t>
+              <a:t>‹Nr.›</a:t>
             </a:fld>
             <a:endParaRPr lang="de-DE" sz="800" b="0" u="none" strike="noStrike">
               <a:solidFill>
@@ -6489,7 +6609,7 @@
               </a:spcBef>
               <a:buSzPct val="100000"/>
               <a:buBlip>
-                <a:blip r:embed="rId4"/>
+                <a:blip r:embed="rId3"/>
               </a:buBlip>
               <a:tabLst>
                 <a:tab pos="0" algn="l"/>
@@ -6610,7 +6730,7 @@
               </a:spcBef>
               <a:buSzPct val="100000"/>
               <a:buBlip>
-                <a:blip r:embed="rId5"/>
+                <a:blip r:embed="rId3"/>
               </a:buBlip>
               <a:tabLst>
                 <a:tab pos="0" algn="l"/>
@@ -6627,14 +6747,6 @@
               </a:rPr>
               <a:t>Mastertextformat bearbeiten</a:t>
             </a:r>
-            <a:endParaRPr lang="de-DE" sz="2400" b="0" u="none" strike="noStrike">
-              <a:solidFill>
-                <a:schemeClr val="dk1"/>
-              </a:solidFill>
-              <a:effectLst/>
-              <a:uFillTx/>
-              <a:latin typeface="Rubik"/>
-            </a:endParaRPr>
           </a:p>
           <a:p>
             <a:pPr marL="685800" lvl="1" indent="-228600" algn="l" defTabSz="914040">
@@ -6664,14 +6776,6 @@
               </a:rPr>
               <a:t>Zweite Ebene</a:t>
             </a:r>
-            <a:endParaRPr lang="de-DE" sz="1800" b="0" u="none" strike="noStrike">
-              <a:solidFill>
-                <a:schemeClr val="dk1"/>
-              </a:solidFill>
-              <a:effectLst/>
-              <a:uFillTx/>
-              <a:latin typeface="Rubik"/>
-            </a:endParaRPr>
           </a:p>
           <a:p>
             <a:pPr marL="1142640" lvl="2" indent="-228600" algn="l" defTabSz="914040">
@@ -6701,14 +6805,6 @@
               </a:rPr>
               <a:t>Dritte Ebene</a:t>
             </a:r>
-            <a:endParaRPr lang="de-DE" sz="1400" b="0" u="none" strike="noStrike">
-              <a:solidFill>
-                <a:schemeClr val="dk1"/>
-              </a:solidFill>
-              <a:effectLst/>
-              <a:uFillTx/>
-              <a:latin typeface="Rubik"/>
-            </a:endParaRPr>
           </a:p>
           <a:p>
             <a:pPr marL="1599840" lvl="3" indent="-228600" algn="l" defTabSz="914040">
@@ -6738,14 +6834,6 @@
               </a:rPr>
               <a:t>Vierte Ebene</a:t>
             </a:r>
-            <a:endParaRPr lang="de-DE" sz="1200" b="0" u="none" strike="noStrike">
-              <a:solidFill>
-                <a:schemeClr val="dk1"/>
-              </a:solidFill>
-              <a:effectLst/>
-              <a:uFillTx/>
-              <a:latin typeface="Rubik"/>
-            </a:endParaRPr>
           </a:p>
           <a:p>
             <a:pPr marL="2057040" lvl="4" indent="-228600" algn="l" defTabSz="914040">
@@ -6775,14 +6863,6 @@
               </a:rPr>
               <a:t>Fünfte Ebene</a:t>
             </a:r>
-            <a:endParaRPr lang="de-DE" sz="1200" b="0" u="none" strike="noStrike">
-              <a:solidFill>
-                <a:schemeClr val="dk1"/>
-              </a:solidFill>
-              <a:effectLst/>
-              <a:uFillTx/>
-              <a:latin typeface="Rubik"/>
-            </a:endParaRPr>
           </a:p>
         </p:txBody>
       </p:sp>
@@ -6823,7 +6903,7 @@
               </a:spcBef>
               <a:buSzPct val="100000"/>
               <a:buBlip>
-                <a:blip r:embed="rId6"/>
+                <a:blip r:embed="rId3"/>
               </a:buBlip>
               <a:tabLst>
                 <a:tab pos="0" algn="l"/>
@@ -6846,7 +6926,7 @@
               </a:spcBef>
               <a:buSzPct val="100000"/>
               <a:buBlip>
-                <a:blip r:embed="rId7"/>
+                <a:blip r:embed="rId4"/>
               </a:buBlip>
               <a:tabLst>
                 <a:tab pos="0" algn="l"/>
@@ -6869,7 +6949,7 @@
               </a:spcBef>
               <a:buSzPct val="100000"/>
               <a:buBlip>
-                <a:blip r:embed="rId8"/>
+                <a:blip r:embed="rId4"/>
               </a:buBlip>
               <a:tabLst>
                 <a:tab pos="0" algn="l"/>
@@ -6892,7 +6972,7 @@
               </a:spcBef>
               <a:buSzPct val="100000"/>
               <a:buBlip>
-                <a:blip r:embed="rId9"/>
+                <a:blip r:embed="rId4"/>
               </a:buBlip>
               <a:tabLst>
                 <a:tab pos="0" algn="l"/>
@@ -6915,7 +6995,7 @@
               </a:spcBef>
               <a:buSzPct val="100000"/>
               <a:buBlip>
-                <a:blip r:embed="rId10"/>
+                <a:blip r:embed="rId4"/>
               </a:buBlip>
               <a:tabLst>
                 <a:tab pos="0" algn="l"/>
@@ -6940,7 +7020,7 @@
               </a:spcBef>
               <a:buSzPct val="100000"/>
               <a:buBlip>
-                <a:blip r:embed="rId11"/>
+                <a:blip r:embed="rId3"/>
               </a:buBlip>
               <a:tabLst>
                 <a:tab pos="0" algn="l"/>
@@ -6957,14 +7037,6 @@
               </a:rPr>
               <a:t>Mastertextformat bearbeiten</a:t>
             </a:r>
-            <a:endParaRPr lang="de-DE" sz="2400" b="0" u="none" strike="noStrike">
-              <a:solidFill>
-                <a:schemeClr val="dk1"/>
-              </a:solidFill>
-              <a:effectLst/>
-              <a:uFillTx/>
-              <a:latin typeface="Rubik"/>
-            </a:endParaRPr>
           </a:p>
           <a:p>
             <a:pPr marL="272880" lvl="1" indent="-263520" algn="l" defTabSz="914040">
@@ -6976,7 +7048,7 @@
               </a:spcBef>
               <a:buSzPct val="100000"/>
               <a:buBlip>
-                <a:blip r:embed="rId12"/>
+                <a:blip r:embed="rId4"/>
               </a:buBlip>
               <a:tabLst>
                 <a:tab pos="0" algn="l"/>
@@ -6993,14 +7065,6 @@
               </a:rPr>
               <a:t>Zweite Ebene</a:t>
             </a:r>
-            <a:endParaRPr lang="de-DE" sz="1800" b="0" u="none" strike="noStrike">
-              <a:solidFill>
-                <a:schemeClr val="dk1"/>
-              </a:solidFill>
-              <a:effectLst/>
-              <a:uFillTx/>
-              <a:latin typeface="Rubik"/>
-            </a:endParaRPr>
           </a:p>
           <a:p>
             <a:pPr marL="272880" lvl="2" indent="-263520" algn="l" defTabSz="914040">
@@ -7012,7 +7076,7 @@
               </a:spcBef>
               <a:buSzPct val="100000"/>
               <a:buBlip>
-                <a:blip r:embed="rId13"/>
+                <a:blip r:embed="rId4"/>
               </a:buBlip>
               <a:tabLst>
                 <a:tab pos="0" algn="l"/>
@@ -7029,14 +7093,6 @@
               </a:rPr>
               <a:t>Dritte Ebene</a:t>
             </a:r>
-            <a:endParaRPr lang="de-DE" sz="1400" b="0" u="none" strike="noStrike">
-              <a:solidFill>
-                <a:schemeClr val="dk1"/>
-              </a:solidFill>
-              <a:effectLst/>
-              <a:uFillTx/>
-              <a:latin typeface="Rubik"/>
-            </a:endParaRPr>
           </a:p>
           <a:p>
             <a:pPr marL="272880" lvl="3" indent="-263520" algn="l" defTabSz="914040">
@@ -7048,7 +7104,7 @@
               </a:spcBef>
               <a:buSzPct val="100000"/>
               <a:buBlip>
-                <a:blip r:embed="rId14"/>
+                <a:blip r:embed="rId4"/>
               </a:buBlip>
               <a:tabLst>
                 <a:tab pos="0" algn="l"/>
@@ -7065,14 +7121,6 @@
               </a:rPr>
               <a:t>Vierte Ebene</a:t>
             </a:r>
-            <a:endParaRPr lang="de-DE" sz="1200" b="0" u="none" strike="noStrike">
-              <a:solidFill>
-                <a:schemeClr val="dk1"/>
-              </a:solidFill>
-              <a:effectLst/>
-              <a:uFillTx/>
-              <a:latin typeface="Rubik"/>
-            </a:endParaRPr>
           </a:p>
           <a:p>
             <a:pPr marL="272880" lvl="4" indent="-263520" algn="l" defTabSz="914040">
@@ -7084,7 +7132,7 @@
               </a:spcBef>
               <a:buSzPct val="100000"/>
               <a:buBlip>
-                <a:blip r:embed="rId15"/>
+                <a:blip r:embed="rId4"/>
               </a:buBlip>
               <a:tabLst>
                 <a:tab pos="0" algn="l"/>
@@ -7101,30 +7149,26 @@
               </a:rPr>
               <a:t>Fünfte Ebene</a:t>
             </a:r>
-            <a:endParaRPr lang="de-DE" sz="1200" b="0" u="none" strike="noStrike">
-              <a:solidFill>
-                <a:schemeClr val="dk1"/>
-              </a:solidFill>
-              <a:effectLst/>
-              <a:uFillTx/>
-              <a:latin typeface="Rubik"/>
-            </a:endParaRPr>
           </a:p>
         </p:txBody>
       </p:sp>
     </p:spTree>
   </p:cSld>
+  <p:clrMapOvr>
+    <a:masterClrMapping/>
+  </p:clrMapOvr>
 </p:sldLayout>
 </file>
 
 <file path=ppt/slideLayouts/slideLayout4.xml><?xml version="1.0" encoding="utf-8"?>
-<p:sldLayout xmlns:a="http://schemas.openxmlformats.org/drawingml/2006/main" xmlns:p="http://schemas.openxmlformats.org/presentationml/2006/main" xmlns:r="http://schemas.openxmlformats.org/officeDocument/2006/relationships" xmlns:p14="http://schemas.microsoft.com/office/powerpoint/2010/main" xmlns:p15="http://schemas.microsoft.com/office/powerpoint/2012/main" xmlns:mc="http://schemas.openxmlformats.org/markup-compatibility/2006" type="blank" preserve="1">
+<p:sldLayout xmlns:a="http://schemas.openxmlformats.org/drawingml/2006/main" xmlns:r="http://schemas.openxmlformats.org/officeDocument/2006/relationships" xmlns:p="http://schemas.openxmlformats.org/presentationml/2006/main" type="blank" preserve="1">
   <p:cSld name="Überschrift (2-zeilig) + 2x Inhalt">
     <p:bg>
       <p:bgPr>
         <a:solidFill>
           <a:srgbClr val="FFFFFF"/>
         </a:solidFill>
+        <a:effectLst/>
       </p:bgPr>
     </p:bg>
     <p:spTree>
@@ -7148,10 +7192,10 @@
           <p:nvPr/>
         </p:nvPicPr>
         <p:blipFill>
-          <a:blip r:embed="rId2">
+          <a:blip>
             <a:extLst>
               <a:ext uri="{96DAC541-7B7A-43D3-8B79-37D633B846F1}">
-                <asvg:svgBlip xmlns:asvg="http://schemas.microsoft.com/office/drawing/2016/SVG/main" r:embed="rId3"/>
+                <asvg:svgBlip xmlns:asvg="http://schemas.microsoft.com/office/drawing/2016/SVG/main" r:embed="rId2"/>
               </a:ext>
             </a:extLst>
           </a:blip>
@@ -7292,7 +7336,7 @@
               </a:spcBef>
               <a:buSzPct val="100000"/>
               <a:buBlip>
-                <a:blip r:embed="rId4"/>
+                <a:blip r:embed="rId3"/>
               </a:buBlip>
               <a:tabLst>
                 <a:tab pos="0" algn="l"/>
@@ -7413,7 +7457,7 @@
               </a:spcBef>
               <a:buSzPct val="100000"/>
               <a:buBlip>
-                <a:blip r:embed="rId5"/>
+                <a:blip r:embed="rId3"/>
               </a:buBlip>
               <a:tabLst>
                 <a:tab pos="0" algn="l"/>
@@ -7467,14 +7511,6 @@
               </a:rPr>
               <a:t>Zweite Ebene</a:t>
             </a:r>
-            <a:endParaRPr lang="de-DE" sz="1800" b="0" u="none" strike="noStrike">
-              <a:solidFill>
-                <a:schemeClr val="dk1"/>
-              </a:solidFill>
-              <a:effectLst/>
-              <a:uFillTx/>
-              <a:latin typeface="Rubik"/>
-            </a:endParaRPr>
           </a:p>
           <a:p>
             <a:pPr marL="1142640" lvl="2" indent="-228600" algn="l" defTabSz="914040">
@@ -7504,14 +7540,6 @@
               </a:rPr>
               <a:t>Dritte Ebene</a:t>
             </a:r>
-            <a:endParaRPr lang="de-DE" sz="1400" b="0" u="none" strike="noStrike">
-              <a:solidFill>
-                <a:schemeClr val="dk1"/>
-              </a:solidFill>
-              <a:effectLst/>
-              <a:uFillTx/>
-              <a:latin typeface="Rubik"/>
-            </a:endParaRPr>
           </a:p>
           <a:p>
             <a:pPr marL="1599840" lvl="3" indent="-228600" algn="l" defTabSz="914040">
@@ -7541,14 +7569,6 @@
               </a:rPr>
               <a:t>Vierte Ebene</a:t>
             </a:r>
-            <a:endParaRPr lang="de-DE" sz="1200" b="0" u="none" strike="noStrike">
-              <a:solidFill>
-                <a:schemeClr val="dk1"/>
-              </a:solidFill>
-              <a:effectLst/>
-              <a:uFillTx/>
-              <a:latin typeface="Rubik"/>
-            </a:endParaRPr>
           </a:p>
           <a:p>
             <a:pPr marL="2057040" lvl="4" indent="-228600" algn="l" defTabSz="914040">
@@ -7578,14 +7598,6 @@
               </a:rPr>
               <a:t>Fünfte Ebene</a:t>
             </a:r>
-            <a:endParaRPr lang="de-DE" sz="1200" b="0" u="none" strike="noStrike">
-              <a:solidFill>
-                <a:schemeClr val="dk1"/>
-              </a:solidFill>
-              <a:effectLst/>
-              <a:uFillTx/>
-              <a:latin typeface="Rubik"/>
-            </a:endParaRPr>
           </a:p>
         </p:txBody>
       </p:sp>
@@ -7626,7 +7638,7 @@
               </a:spcBef>
               <a:buSzPct val="100000"/>
               <a:buBlip>
-                <a:blip r:embed="rId6"/>
+                <a:blip r:embed="rId3"/>
               </a:buBlip>
               <a:tabLst>
                 <a:tab pos="0" algn="l"/>
@@ -7649,7 +7661,7 @@
               </a:spcBef>
               <a:buSzPct val="100000"/>
               <a:buBlip>
-                <a:blip r:embed="rId7"/>
+                <a:blip r:embed="rId4"/>
               </a:buBlip>
               <a:tabLst>
                 <a:tab pos="0" algn="l"/>
@@ -7672,7 +7684,7 @@
               </a:spcBef>
               <a:buSzPct val="100000"/>
               <a:buBlip>
-                <a:blip r:embed="rId8"/>
+                <a:blip r:embed="rId4"/>
               </a:buBlip>
               <a:tabLst>
                 <a:tab pos="0" algn="l"/>
@@ -7695,7 +7707,7 @@
               </a:spcBef>
               <a:buSzPct val="100000"/>
               <a:buBlip>
-                <a:blip r:embed="rId9"/>
+                <a:blip r:embed="rId4"/>
               </a:buBlip>
               <a:tabLst>
                 <a:tab pos="0" algn="l"/>
@@ -7718,7 +7730,7 @@
               </a:spcBef>
               <a:buSzPct val="100000"/>
               <a:buBlip>
-                <a:blip r:embed="rId10"/>
+                <a:blip r:embed="rId4"/>
               </a:buBlip>
               <a:tabLst>
                 <a:tab pos="0" algn="l"/>
@@ -7743,7 +7755,7 @@
               </a:spcBef>
               <a:buSzPct val="100000"/>
               <a:buBlip>
-                <a:blip r:embed="rId11"/>
+                <a:blip r:embed="rId3"/>
               </a:buBlip>
               <a:tabLst>
                 <a:tab pos="0" algn="l"/>
@@ -7779,7 +7791,7 @@
               </a:spcBef>
               <a:buSzPct val="100000"/>
               <a:buBlip>
-                <a:blip r:embed="rId12"/>
+                <a:blip r:embed="rId4"/>
               </a:buBlip>
               <a:tabLst>
                 <a:tab pos="0" algn="l"/>
@@ -7796,14 +7808,6 @@
               </a:rPr>
               <a:t>Zweite Ebene</a:t>
             </a:r>
-            <a:endParaRPr lang="de-DE" sz="1800" b="0" u="none" strike="noStrike">
-              <a:solidFill>
-                <a:schemeClr val="dk1"/>
-              </a:solidFill>
-              <a:effectLst/>
-              <a:uFillTx/>
-              <a:latin typeface="Rubik"/>
-            </a:endParaRPr>
           </a:p>
           <a:p>
             <a:pPr marL="272880" lvl="2" indent="-263520" algn="l" defTabSz="914040">
@@ -7815,7 +7819,7 @@
               </a:spcBef>
               <a:buSzPct val="100000"/>
               <a:buBlip>
-                <a:blip r:embed="rId13"/>
+                <a:blip r:embed="rId4"/>
               </a:buBlip>
               <a:tabLst>
                 <a:tab pos="0" algn="l"/>
@@ -7832,14 +7836,6 @@
               </a:rPr>
               <a:t>Dritte Ebene</a:t>
             </a:r>
-            <a:endParaRPr lang="de-DE" sz="1400" b="0" u="none" strike="noStrike">
-              <a:solidFill>
-                <a:schemeClr val="dk1"/>
-              </a:solidFill>
-              <a:effectLst/>
-              <a:uFillTx/>
-              <a:latin typeface="Rubik"/>
-            </a:endParaRPr>
           </a:p>
           <a:p>
             <a:pPr marL="272880" lvl="3" indent="-263520" algn="l" defTabSz="914040">
@@ -7851,7 +7847,7 @@
               </a:spcBef>
               <a:buSzPct val="100000"/>
               <a:buBlip>
-                <a:blip r:embed="rId14"/>
+                <a:blip r:embed="rId4"/>
               </a:buBlip>
               <a:tabLst>
                 <a:tab pos="0" algn="l"/>
@@ -7868,14 +7864,6 @@
               </a:rPr>
               <a:t>Vierte Ebene</a:t>
             </a:r>
-            <a:endParaRPr lang="de-DE" sz="1200" b="0" u="none" strike="noStrike">
-              <a:solidFill>
-                <a:schemeClr val="dk1"/>
-              </a:solidFill>
-              <a:effectLst/>
-              <a:uFillTx/>
-              <a:latin typeface="Rubik"/>
-            </a:endParaRPr>
           </a:p>
           <a:p>
             <a:pPr marL="272880" lvl="4" indent="-263520" algn="l" defTabSz="914040">
@@ -7887,7 +7875,7 @@
               </a:spcBef>
               <a:buSzPct val="100000"/>
               <a:buBlip>
-                <a:blip r:embed="rId15"/>
+                <a:blip r:embed="rId4"/>
               </a:buBlip>
               <a:tabLst>
                 <a:tab pos="0" algn="l"/>
@@ -7904,14 +7892,6 @@
               </a:rPr>
               <a:t>Fünfte Ebene</a:t>
             </a:r>
-            <a:endParaRPr lang="de-DE" sz="1200" b="0" u="none" strike="noStrike">
-              <a:solidFill>
-                <a:schemeClr val="dk1"/>
-              </a:solidFill>
-              <a:effectLst/>
-              <a:uFillTx/>
-              <a:latin typeface="Rubik"/>
-            </a:endParaRPr>
           </a:p>
         </p:txBody>
       </p:sp>
@@ -7935,15 +7915,22 @@
           </a:ln>
         </p:spPr>
         <p:style>
-          <a:lnRef idx="0"/>
-          <a:fillRef idx="0"/>
-          <a:effectRef idx="0"/>
+          <a:lnRef idx="0">
+            <a:scrgbClr r="0" g="0" b="0"/>
+          </a:lnRef>
+          <a:fillRef idx="0">
+            <a:scrgbClr r="0" g="0" b="0"/>
+          </a:fillRef>
+          <a:effectRef idx="0">
+            <a:scrgbClr r="0" g="0" b="0"/>
+          </a:effectRef>
           <a:fontRef idx="minor"/>
         </p:style>
         <p:txBody>
           <a:bodyPr wrap="none" lIns="60840" tIns="30600" rIns="60840" bIns="30600" anchor="ctr">
             <a:noAutofit/>
           </a:bodyPr>
+          <a:lstStyle/>
           <a:p>
             <a:pPr algn="r" defTabSz="914400">
               <a:lnSpc>
@@ -7959,7 +7946,7 @@
                 <a:uFillTx/>
                 <a:latin typeface="Rubik SemiBold"/>
               </a:rPr>
-              <a:t>&lt;Foliennummer&gt;</a:t>
+              <a:t>‹Nr.›</a:t>
             </a:fld>
             <a:endParaRPr lang="de-DE" sz="800" b="0" u="none" strike="noStrike">
               <a:solidFill>
@@ -8053,30 +8040,26 @@
               </a:rPr>
               <a:t>zweizeilige Headline</a:t>
             </a:r>
-            <a:endParaRPr lang="de-DE" sz="3600" b="0" u="none" strike="noStrike">
-              <a:solidFill>
-                <a:srgbClr val="101010"/>
-              </a:solidFill>
-              <a:effectLst/>
-              <a:uFillTx/>
-              <a:latin typeface="Rubik SemiBold"/>
-            </a:endParaRPr>
           </a:p>
         </p:txBody>
       </p:sp>
     </p:spTree>
   </p:cSld>
+  <p:clrMapOvr>
+    <a:masterClrMapping/>
+  </p:clrMapOvr>
 </p:sldLayout>
 </file>
 
 <file path=ppt/slideLayouts/slideLayout5.xml><?xml version="1.0" encoding="utf-8"?>
-<p:sldLayout xmlns:a="http://schemas.openxmlformats.org/drawingml/2006/main" xmlns:p="http://schemas.openxmlformats.org/presentationml/2006/main" xmlns:r="http://schemas.openxmlformats.org/officeDocument/2006/relationships" xmlns:p14="http://schemas.microsoft.com/office/powerpoint/2010/main" xmlns:p15="http://schemas.microsoft.com/office/powerpoint/2012/main" xmlns:mc="http://schemas.openxmlformats.org/markup-compatibility/2006" type="blank" preserve="1">
+<p:sldLayout xmlns:a="http://schemas.openxmlformats.org/drawingml/2006/main" xmlns:r="http://schemas.openxmlformats.org/officeDocument/2006/relationships" xmlns:p="http://schemas.openxmlformats.org/presentationml/2006/main" type="blank" preserve="1">
   <p:cSld name="Überschrift (1-zeilig) + 3x Inhalt">
     <p:bg>
       <p:bgPr>
         <a:solidFill>
           <a:srgbClr val="FFFFFF"/>
         </a:solidFill>
+        <a:effectLst/>
       </p:bgPr>
     </p:bg>
     <p:spTree>
@@ -8236,7 +8219,7 @@
               </a:spcBef>
               <a:buSzPct val="100051"/>
               <a:buBlip>
-                <a:blip r:embed="rId3"/>
+                <a:blip r:embed="rId2"/>
               </a:buBlip>
             </a:pPr>
             <a:r>
@@ -8404,10 +8387,10 @@
           <p:nvPr/>
         </p:nvPicPr>
         <p:blipFill>
-          <a:blip r:embed="rId4">
+          <a:blip>
             <a:extLst>
               <a:ext uri="{96DAC541-7B7A-43D3-8B79-37D633B846F1}">
-                <asvg:svgBlip xmlns:asvg="http://schemas.microsoft.com/office/drawing/2016/SVG/main" r:embed="rId5"/>
+                <asvg:svgBlip xmlns:asvg="http://schemas.microsoft.com/office/drawing/2016/SVG/main" r:embed="rId3"/>
               </a:ext>
             </a:extLst>
           </a:blip>
@@ -8609,15 +8592,22 @@
           </a:ln>
         </p:spPr>
         <p:style>
-          <a:lnRef idx="0"/>
-          <a:fillRef idx="0"/>
-          <a:effectRef idx="0"/>
+          <a:lnRef idx="0">
+            <a:scrgbClr r="0" g="0" b="0"/>
+          </a:lnRef>
+          <a:fillRef idx="0">
+            <a:scrgbClr r="0" g="0" b="0"/>
+          </a:fillRef>
+          <a:effectRef idx="0">
+            <a:scrgbClr r="0" g="0" b="0"/>
+          </a:effectRef>
           <a:fontRef idx="minor"/>
         </p:style>
         <p:txBody>
           <a:bodyPr wrap="none" lIns="60840" tIns="30600" rIns="60840" bIns="30600" anchor="ctr">
             <a:noAutofit/>
           </a:bodyPr>
+          <a:lstStyle/>
           <a:p>
             <a:pPr algn="r" defTabSz="914400">
               <a:lnSpc>
@@ -8633,7 +8623,7 @@
                 <a:uFillTx/>
                 <a:latin typeface="Rubik SemiBold"/>
               </a:rPr>
-              <a:t>&lt;Foliennummer&gt;</a:t>
+              <a:t>‹Nr.›</a:t>
             </a:fld>
             <a:endParaRPr lang="de-DE" sz="800" b="0" u="none" strike="noStrike">
               <a:solidFill>
@@ -8683,7 +8673,7 @@
               </a:spcBef>
               <a:buSzPct val="100051"/>
               <a:buBlip>
-                <a:blip r:embed="rId6"/>
+                <a:blip r:embed="rId2"/>
               </a:buBlip>
               <a:tabLst>
                 <a:tab pos="0" algn="l"/>
@@ -8804,7 +8794,7 @@
               </a:spcBef>
               <a:buSzPct val="100051"/>
               <a:buBlip>
-                <a:blip r:embed="rId7"/>
+                <a:blip r:embed="rId2"/>
               </a:buBlip>
               <a:tabLst>
                 <a:tab pos="0" algn="l"/>
@@ -9017,7 +9007,7 @@
               </a:spcBef>
               <a:buSzPct val="100051"/>
               <a:buBlip>
-                <a:blip r:embed="rId8"/>
+                <a:blip r:embed="rId2"/>
               </a:buBlip>
               <a:tabLst>
                 <a:tab pos="0" algn="l"/>
@@ -9138,7 +9128,7 @@
               </a:spcBef>
               <a:buSzPct val="100051"/>
               <a:buBlip>
-                <a:blip r:embed="rId9"/>
+                <a:blip r:embed="rId2"/>
               </a:buBlip>
               <a:tabLst>
                 <a:tab pos="0" algn="l"/>
@@ -9316,17 +9306,21 @@
       </p:sp>
     </p:spTree>
   </p:cSld>
+  <p:clrMapOvr>
+    <a:masterClrMapping/>
+  </p:clrMapOvr>
 </p:sldLayout>
 </file>
 
 <file path=ppt/slideLayouts/slideLayout6.xml><?xml version="1.0" encoding="utf-8"?>
-<p:sldLayout xmlns:a="http://schemas.openxmlformats.org/drawingml/2006/main" xmlns:p="http://schemas.openxmlformats.org/presentationml/2006/main" xmlns:r="http://schemas.openxmlformats.org/officeDocument/2006/relationships" xmlns:p14="http://schemas.microsoft.com/office/powerpoint/2010/main" xmlns:p15="http://schemas.microsoft.com/office/powerpoint/2012/main" xmlns:mc="http://schemas.openxmlformats.org/markup-compatibility/2006" type="blank" preserve="1">
+<p:sldLayout xmlns:a="http://schemas.openxmlformats.org/drawingml/2006/main" xmlns:r="http://schemas.openxmlformats.org/officeDocument/2006/relationships" xmlns:p="http://schemas.openxmlformats.org/presentationml/2006/main" type="blank" preserve="1">
   <p:cSld name="Überschrift (2-zeilig) + 3x Inhalt">
     <p:bg>
       <p:bgPr>
         <a:solidFill>
           <a:srgbClr val="FFFFFF"/>
         </a:solidFill>
+        <a:effectLst/>
       </p:bgPr>
     </p:bg>
     <p:spTree>
@@ -9486,7 +9480,7 @@
               </a:spcBef>
               <a:buSzPct val="100051"/>
               <a:buBlip>
-                <a:blip r:embed="rId3"/>
+                <a:blip r:embed="rId2"/>
               </a:buBlip>
             </a:pPr>
             <a:r>
@@ -9654,10 +9648,10 @@
           <p:nvPr/>
         </p:nvPicPr>
         <p:blipFill>
-          <a:blip r:embed="rId4">
+          <a:blip>
             <a:extLst>
               <a:ext uri="{96DAC541-7B7A-43D3-8B79-37D633B846F1}">
-                <asvg:svgBlip xmlns:asvg="http://schemas.microsoft.com/office/drawing/2016/SVG/main" r:embed="rId5"/>
+                <asvg:svgBlip xmlns:asvg="http://schemas.microsoft.com/office/drawing/2016/SVG/main" r:embed="rId3"/>
               </a:ext>
             </a:extLst>
           </a:blip>
@@ -9781,15 +9775,22 @@
           </a:ln>
         </p:spPr>
         <p:style>
-          <a:lnRef idx="0"/>
-          <a:fillRef idx="0"/>
-          <a:effectRef idx="0"/>
+          <a:lnRef idx="0">
+            <a:scrgbClr r="0" g="0" b="0"/>
+          </a:lnRef>
+          <a:fillRef idx="0">
+            <a:scrgbClr r="0" g="0" b="0"/>
+          </a:fillRef>
+          <a:effectRef idx="0">
+            <a:scrgbClr r="0" g="0" b="0"/>
+          </a:effectRef>
           <a:fontRef idx="minor"/>
         </p:style>
         <p:txBody>
           <a:bodyPr wrap="none" lIns="60840" tIns="30600" rIns="60840" bIns="30600" anchor="ctr">
             <a:noAutofit/>
           </a:bodyPr>
+          <a:lstStyle/>
           <a:p>
             <a:pPr algn="r" defTabSz="914400">
               <a:lnSpc>
@@ -9805,7 +9806,7 @@
                 <a:uFillTx/>
                 <a:latin typeface="Rubik SemiBold"/>
               </a:rPr>
-              <a:t>&lt;Foliennummer&gt;</a:t>
+              <a:t>‹Nr.›</a:t>
             </a:fld>
             <a:endParaRPr lang="de-DE" sz="800" b="0" u="none" strike="noStrike">
               <a:solidFill>
@@ -9855,7 +9856,7 @@
               </a:spcBef>
               <a:buSzPct val="100051"/>
               <a:buBlip>
-                <a:blip r:embed="rId6"/>
+                <a:blip r:embed="rId2"/>
               </a:buBlip>
               <a:tabLst>
                 <a:tab pos="0" algn="l"/>
@@ -9976,7 +9977,7 @@
               </a:spcBef>
               <a:buSzPct val="100051"/>
               <a:buBlip>
-                <a:blip r:embed="rId7"/>
+                <a:blip r:embed="rId2"/>
               </a:buBlip>
               <a:tabLst>
                 <a:tab pos="0" algn="l"/>
@@ -10189,7 +10190,7 @@
               </a:spcBef>
               <a:buSzPct val="100051"/>
               <a:buBlip>
-                <a:blip r:embed="rId8"/>
+                <a:blip r:embed="rId2"/>
               </a:buBlip>
               <a:tabLst>
                 <a:tab pos="0" algn="l"/>
@@ -10310,7 +10311,7 @@
               </a:spcBef>
               <a:buSzPct val="100051"/>
               <a:buBlip>
-                <a:blip r:embed="rId9"/>
+                <a:blip r:embed="rId2"/>
               </a:buBlip>
               <a:tabLst>
                 <a:tab pos="0" algn="l"/>
@@ -10580,17 +10581,21 @@
       </p:sp>
     </p:spTree>
   </p:cSld>
+  <p:clrMapOvr>
+    <a:masterClrMapping/>
+  </p:clrMapOvr>
 </p:sldLayout>
 </file>
 
 <file path=ppt/slideLayouts/slideLayout7.xml><?xml version="1.0" encoding="utf-8"?>
-<p:sldLayout xmlns:a="http://schemas.openxmlformats.org/drawingml/2006/main" xmlns:p="http://schemas.openxmlformats.org/presentationml/2006/main" xmlns:r="http://schemas.openxmlformats.org/officeDocument/2006/relationships" xmlns:p14="http://schemas.microsoft.com/office/powerpoint/2010/main" xmlns:p15="http://schemas.microsoft.com/office/powerpoint/2012/main" xmlns:mc="http://schemas.openxmlformats.org/markup-compatibility/2006" type="blank" preserve="1">
+<p:sldLayout xmlns:a="http://schemas.openxmlformats.org/drawingml/2006/main" xmlns:r="http://schemas.openxmlformats.org/officeDocument/2006/relationships" xmlns:p="http://schemas.openxmlformats.org/presentationml/2006/main" type="blank" preserve="1">
   <p:cSld name="50/50 Bild + Inhalt">
     <p:bg>
       <p:bgPr>
         <a:solidFill>
           <a:srgbClr val="FFFFFF"/>
         </a:solidFill>
+        <a:effectLst/>
       </p:bgPr>
     </p:bg>
     <p:spTree>
@@ -10614,10 +10619,10 @@
           <p:nvPr/>
         </p:nvPicPr>
         <p:blipFill>
-          <a:blip r:embed="rId2">
+          <a:blip>
             <a:extLst>
               <a:ext uri="{96DAC541-7B7A-43D3-8B79-37D633B846F1}">
-                <asvg:svgBlip xmlns:asvg="http://schemas.microsoft.com/office/drawing/2016/SVG/main" r:embed="rId3"/>
+                <asvg:svgBlip xmlns:asvg="http://schemas.microsoft.com/office/drawing/2016/SVG/main" r:embed="rId2"/>
               </a:ext>
             </a:extLst>
           </a:blip>
@@ -10836,7 +10841,7 @@
               </a:spcBef>
               <a:buSzPct val="100000"/>
               <a:buBlip>
-                <a:blip r:embed="rId4"/>
+                <a:blip r:embed="rId3"/>
               </a:buBlip>
               <a:tabLst>
                 <a:tab pos="0" algn="l"/>
@@ -10957,7 +10962,7 @@
               </a:spcBef>
               <a:buSzPct val="100000"/>
               <a:buBlip>
-                <a:blip r:embed="rId5"/>
+                <a:blip r:embed="rId3"/>
               </a:buBlip>
               <a:tabLst>
                 <a:tab pos="0" algn="l"/>
@@ -11233,15 +11238,22 @@
           </a:ln>
         </p:spPr>
         <p:style>
-          <a:lnRef idx="0"/>
-          <a:fillRef idx="0"/>
-          <a:effectRef idx="0"/>
+          <a:lnRef idx="0">
+            <a:scrgbClr r="0" g="0" b="0"/>
+          </a:lnRef>
+          <a:fillRef idx="0">
+            <a:scrgbClr r="0" g="0" b="0"/>
+          </a:fillRef>
+          <a:effectRef idx="0">
+            <a:scrgbClr r="0" g="0" b="0"/>
+          </a:effectRef>
           <a:fontRef idx="minor"/>
         </p:style>
         <p:txBody>
           <a:bodyPr wrap="none" lIns="60840" tIns="30600" rIns="60840" bIns="30600" anchor="ctr">
             <a:noAutofit/>
           </a:bodyPr>
+          <a:lstStyle/>
           <a:p>
             <a:pPr algn="r" defTabSz="914400">
               <a:lnSpc>
@@ -11257,7 +11269,7 @@
                 <a:uFillTx/>
                 <a:latin typeface="Rubik SemiBold"/>
               </a:rPr>
-              <a:t>&lt;Foliennummer&gt;</a:t>
+              <a:t>‹Nr.›</a:t>
             </a:fld>
             <a:endParaRPr lang="de-DE" sz="800" b="0" u="none" strike="noStrike">
               <a:solidFill>
@@ -11325,30 +11337,26 @@
               </a:rPr>
               <a:t>Format des Titeltextes durch Klicken bearbeiten</a:t>
             </a:r>
-            <a:endParaRPr lang="en-US" sz="1800" b="0" u="none" strike="noStrike">
-              <a:solidFill>
-                <a:schemeClr val="dk1"/>
-              </a:solidFill>
-              <a:effectLst/>
-              <a:uFillTx/>
-              <a:latin typeface="Calibri"/>
-            </a:endParaRPr>
           </a:p>
         </p:txBody>
       </p:sp>
     </p:spTree>
   </p:cSld>
+  <p:clrMapOvr>
+    <a:masterClrMapping/>
+  </p:clrMapOvr>
 </p:sldLayout>
 </file>
 
 <file path=ppt/slideLayouts/slideLayout8.xml><?xml version="1.0" encoding="utf-8"?>
-<p:sldLayout xmlns:a="http://schemas.openxmlformats.org/drawingml/2006/main" xmlns:p="http://schemas.openxmlformats.org/presentationml/2006/main" xmlns:r="http://schemas.openxmlformats.org/officeDocument/2006/relationships" xmlns:p14="http://schemas.microsoft.com/office/powerpoint/2010/main" xmlns:p15="http://schemas.microsoft.com/office/powerpoint/2012/main" xmlns:mc="http://schemas.openxmlformats.org/markup-compatibility/2006" type="blank" preserve="1">
+<p:sldLayout xmlns:a="http://schemas.openxmlformats.org/drawingml/2006/main" xmlns:r="http://schemas.openxmlformats.org/officeDocument/2006/relationships" xmlns:p="http://schemas.openxmlformats.org/presentationml/2006/main" type="blank" preserve="1">
   <p:cSld name="2x Bild + Text">
     <p:bg>
       <p:bgPr>
         <a:solidFill>
           <a:srgbClr val="FFFFFF"/>
         </a:solidFill>
+        <a:effectLst/>
       </p:bgPr>
     </p:bg>
     <p:spTree>
@@ -11372,10 +11380,10 @@
           <p:nvPr/>
         </p:nvPicPr>
         <p:blipFill>
-          <a:blip r:embed="rId2">
+          <a:blip>
             <a:extLst>
               <a:ext uri="{96DAC541-7B7A-43D3-8B79-37D633B846F1}">
-                <asvg:svgBlip xmlns:asvg="http://schemas.microsoft.com/office/drawing/2016/SVG/main" r:embed="rId3"/>
+                <asvg:svgBlip xmlns:asvg="http://schemas.microsoft.com/office/drawing/2016/SVG/main" r:embed="rId2"/>
               </a:ext>
             </a:extLst>
           </a:blip>
@@ -11499,15 +11507,22 @@
           </a:ln>
         </p:spPr>
         <p:style>
-          <a:lnRef idx="0"/>
-          <a:fillRef idx="0"/>
-          <a:effectRef idx="0"/>
+          <a:lnRef idx="0">
+            <a:scrgbClr r="0" g="0" b="0"/>
+          </a:lnRef>
+          <a:fillRef idx="0">
+            <a:scrgbClr r="0" g="0" b="0"/>
+          </a:fillRef>
+          <a:effectRef idx="0">
+            <a:scrgbClr r="0" g="0" b="0"/>
+          </a:effectRef>
           <a:fontRef idx="minor"/>
         </p:style>
         <p:txBody>
           <a:bodyPr wrap="none" lIns="60840" tIns="30600" rIns="60840" bIns="30600" anchor="ctr">
             <a:noAutofit/>
           </a:bodyPr>
+          <a:lstStyle/>
           <a:p>
             <a:pPr algn="r" defTabSz="914400">
               <a:lnSpc>
@@ -11523,7 +11538,7 @@
                 <a:uFillTx/>
                 <a:latin typeface="Rubik SemiBold"/>
               </a:rPr>
-              <a:t>&lt;Foliennummer&gt;</a:t>
+              <a:t>‹Nr.›</a:t>
             </a:fld>
             <a:endParaRPr lang="de-DE" sz="800" b="0" u="none" strike="noStrike">
               <a:solidFill>
@@ -11651,7 +11666,7 @@
               </a:spcBef>
               <a:buSzPct val="100051"/>
               <a:buBlip>
-                <a:blip r:embed="rId4"/>
+                <a:blip r:embed="rId3"/>
               </a:buBlip>
               <a:tabLst>
                 <a:tab pos="0" algn="l"/>
@@ -11772,7 +11787,7 @@
               </a:spcBef>
               <a:buSzPct val="100051"/>
               <a:buBlip>
-                <a:blip r:embed="rId5"/>
+                <a:blip r:embed="rId3"/>
               </a:buBlip>
               <a:tabLst>
                 <a:tab pos="0" algn="l"/>
@@ -11985,7 +12000,7 @@
               </a:spcBef>
               <a:buSzPct val="100051"/>
               <a:buBlip>
-                <a:blip r:embed="rId6"/>
+                <a:blip r:embed="rId3"/>
               </a:buBlip>
               <a:tabLst>
                 <a:tab pos="0" algn="l"/>
@@ -12106,7 +12121,7 @@
               </a:spcBef>
               <a:buSzPct val="100051"/>
               <a:buBlip>
-                <a:blip r:embed="rId7"/>
+                <a:blip r:embed="rId3"/>
               </a:buBlip>
               <a:tabLst>
                 <a:tab pos="0" algn="l"/>
@@ -12460,17 +12475,21 @@
       </p:sp>
     </p:spTree>
   </p:cSld>
+  <p:clrMapOvr>
+    <a:masterClrMapping/>
+  </p:clrMapOvr>
 </p:sldLayout>
 </file>
 
 <file path=ppt/slideLayouts/slideLayout9.xml><?xml version="1.0" encoding="utf-8"?>
-<p:sldLayout xmlns:a="http://schemas.openxmlformats.org/drawingml/2006/main" xmlns:p="http://schemas.openxmlformats.org/presentationml/2006/main" xmlns:r="http://schemas.openxmlformats.org/officeDocument/2006/relationships" xmlns:p14="http://schemas.microsoft.com/office/powerpoint/2010/main" xmlns:p15="http://schemas.microsoft.com/office/powerpoint/2012/main" xmlns:mc="http://schemas.openxmlformats.org/markup-compatibility/2006" type="blank" preserve="1">
+<p:sldLayout xmlns:a="http://schemas.openxmlformats.org/drawingml/2006/main" xmlns:r="http://schemas.openxmlformats.org/officeDocument/2006/relationships" xmlns:p="http://schemas.openxmlformats.org/presentationml/2006/main" type="blank" preserve="1">
   <p:cSld name="3x Bild + Text">
     <p:bg>
       <p:bgPr>
         <a:solidFill>
           <a:srgbClr val="FFFFFF"/>
         </a:solidFill>
+        <a:effectLst/>
       </p:bgPr>
     </p:bg>
     <p:spTree>
@@ -12494,10 +12513,10 @@
           <p:nvPr/>
         </p:nvPicPr>
         <p:blipFill>
-          <a:blip r:embed="rId2">
+          <a:blip>
             <a:extLst>
               <a:ext uri="{96DAC541-7B7A-43D3-8B79-37D633B846F1}">
-                <asvg:svgBlip xmlns:asvg="http://schemas.microsoft.com/office/drawing/2016/SVG/main" r:embed="rId3"/>
+                <asvg:svgBlip xmlns:asvg="http://schemas.microsoft.com/office/drawing/2016/SVG/main" r:embed="rId2"/>
               </a:ext>
             </a:extLst>
           </a:blip>
@@ -12621,15 +12640,22 @@
           </a:ln>
         </p:spPr>
         <p:style>
-          <a:lnRef idx="0"/>
-          <a:fillRef idx="0"/>
-          <a:effectRef idx="0"/>
+          <a:lnRef idx="0">
+            <a:scrgbClr r="0" g="0" b="0"/>
+          </a:lnRef>
+          <a:fillRef idx="0">
+            <a:scrgbClr r="0" g="0" b="0"/>
+          </a:fillRef>
+          <a:effectRef idx="0">
+            <a:scrgbClr r="0" g="0" b="0"/>
+          </a:effectRef>
           <a:fontRef idx="minor"/>
         </p:style>
         <p:txBody>
           <a:bodyPr wrap="none" lIns="60840" tIns="30600" rIns="60840" bIns="30600" anchor="ctr">
             <a:noAutofit/>
           </a:bodyPr>
+          <a:lstStyle/>
           <a:p>
             <a:pPr algn="r" defTabSz="914400">
               <a:lnSpc>
@@ -12645,7 +12671,7 @@
                 <a:uFillTx/>
                 <a:latin typeface="Rubik SemiBold"/>
               </a:rPr>
-              <a:t>&lt;Foliennummer&gt;</a:t>
+              <a:t>‹Nr.›</a:t>
             </a:fld>
             <a:endParaRPr lang="de-DE" sz="800" b="0" u="none" strike="noStrike">
               <a:solidFill>
@@ -12773,7 +12799,7 @@
               </a:spcBef>
               <a:buSzPct val="100051"/>
               <a:buBlip>
-                <a:blip r:embed="rId4"/>
+                <a:blip r:embed="rId3"/>
               </a:buBlip>
               <a:tabLst>
                 <a:tab pos="0" algn="l"/>
@@ -12894,7 +12920,7 @@
               </a:spcBef>
               <a:buSzPct val="100051"/>
               <a:buBlip>
-                <a:blip r:embed="rId5"/>
+                <a:blip r:embed="rId3"/>
               </a:buBlip>
               <a:tabLst>
                 <a:tab pos="0" algn="l"/>
@@ -13107,7 +13133,7 @@
               </a:spcBef>
               <a:buSzPct val="100051"/>
               <a:buBlip>
-                <a:blip r:embed="rId6"/>
+                <a:blip r:embed="rId3"/>
               </a:buBlip>
               <a:tabLst>
                 <a:tab pos="0" algn="l"/>
@@ -13228,7 +13254,7 @@
               </a:spcBef>
               <a:buSzPct val="100051"/>
               <a:buBlip>
-                <a:blip r:embed="rId7"/>
+                <a:blip r:embed="rId3"/>
               </a:buBlip>
               <a:tabLst>
                 <a:tab pos="0" algn="l"/>
@@ -13441,7 +13467,7 @@
               </a:spcBef>
               <a:buSzPct val="100051"/>
               <a:buBlip>
-                <a:blip r:embed="rId8"/>
+                <a:blip r:embed="rId3"/>
               </a:buBlip>
               <a:tabLst>
                 <a:tab pos="0" algn="l"/>
@@ -13562,7 +13588,7 @@
               </a:spcBef>
               <a:buSzPct val="100051"/>
               <a:buBlip>
-                <a:blip r:embed="rId9"/>
+                <a:blip r:embed="rId3"/>
               </a:buBlip>
               <a:tabLst>
                 <a:tab pos="0" algn="l"/>
@@ -14004,12 +14030,20 @@
       </p:sp>
     </p:spTree>
   </p:cSld>
+  <p:clrMapOvr>
+    <a:masterClrMapping/>
+  </p:clrMapOvr>
 </p:sldLayout>
 </file>
 
 <file path=ppt/slideMasters/slideMaster1.xml><?xml version="1.0" encoding="utf-8"?>
-<p:sldMaster xmlns:a="http://schemas.openxmlformats.org/drawingml/2006/main" xmlns:p="http://schemas.openxmlformats.org/presentationml/2006/main" xmlns:r="http://schemas.openxmlformats.org/officeDocument/2006/relationships" xmlns:p14="http://schemas.microsoft.com/office/powerpoint/2010/main" xmlns:p15="http://schemas.microsoft.com/office/powerpoint/2012/main" xmlns:mc="http://schemas.openxmlformats.org/markup-compatibility/2006">
+<p:sldMaster xmlns:a="http://schemas.openxmlformats.org/drawingml/2006/main" xmlns:r="http://schemas.openxmlformats.org/officeDocument/2006/relationships" xmlns:p="http://schemas.openxmlformats.org/presentationml/2006/main">
   <p:cSld>
+    <p:bg>
+      <p:bgRef idx="1001">
+        <a:schemeClr val="bg1"/>
+      </p:bgRef>
+    </p:bg>
     <p:spTree>
       <p:nvGrpSpPr>
         <p:cNvPr id="1" name=""/>
@@ -14028,35 +14062,315 @@
   </p:cSld>
   <p:clrMap bg1="dk1" tx1="lt1" bg2="dk2" tx2="lt2" accent1="accent1" accent2="accent2" accent3="accent3" accent4="accent4" accent5="accent5" accent6="accent6" hlink="hlink" folHlink="folHlink"/>
   <p:sldLayoutIdLst>
-    <p:sldLayoutId id="2147483649" r:id="rId2"/>
-    <p:sldLayoutId id="2147483650" r:id="rId3"/>
-    <p:sldLayoutId id="2147483651" r:id="rId4"/>
-    <p:sldLayoutId id="2147483652" r:id="rId5"/>
-    <p:sldLayoutId id="2147483653" r:id="rId6"/>
-    <p:sldLayoutId id="2147483654" r:id="rId7"/>
-    <p:sldLayoutId id="2147483655" r:id="rId8"/>
-    <p:sldLayoutId id="2147483656" r:id="rId9"/>
-    <p:sldLayoutId id="2147483657" r:id="rId10"/>
-    <p:sldLayoutId id="2147483658" r:id="rId11"/>
-    <p:sldLayoutId id="2147483659" r:id="rId12"/>
-    <p:sldLayoutId id="2147483660" r:id="rId13"/>
-    <p:sldLayoutId id="2147483661" r:id="rId14"/>
-    <p:sldLayoutId id="2147483662" r:id="rId15"/>
-    <p:sldLayoutId id="2147483663" r:id="rId16"/>
-    <p:sldLayoutId id="2147483664" r:id="rId17"/>
-    <p:sldLayoutId id="2147483665" r:id="rId18"/>
-    <p:sldLayoutId id="2147483666" r:id="rId19"/>
-    <p:sldLayoutId id="2147483667" r:id="rId20"/>
-    <p:sldLayoutId id="2147483668" r:id="rId21"/>
-    <p:sldLayoutId id="2147483669" r:id="rId22"/>
-    <p:sldLayoutId id="2147483670" r:id="rId23"/>
-    <p:sldLayoutId id="2147483671" r:id="rId24"/>
+    <p:sldLayoutId id="2147483649" r:id="rId1"/>
+    <p:sldLayoutId id="2147483650" r:id="rId2"/>
+    <p:sldLayoutId id="2147483651" r:id="rId3"/>
+    <p:sldLayoutId id="2147483652" r:id="rId4"/>
+    <p:sldLayoutId id="2147483653" r:id="rId5"/>
+    <p:sldLayoutId id="2147483654" r:id="rId6"/>
+    <p:sldLayoutId id="2147483655" r:id="rId7"/>
+    <p:sldLayoutId id="2147483656" r:id="rId8"/>
+    <p:sldLayoutId id="2147483657" r:id="rId9"/>
+    <p:sldLayoutId id="2147483658" r:id="rId10"/>
+    <p:sldLayoutId id="2147483659" r:id="rId11"/>
+    <p:sldLayoutId id="2147483660" r:id="rId12"/>
+    <p:sldLayoutId id="2147483661" r:id="rId13"/>
+    <p:sldLayoutId id="2147483662" r:id="rId14"/>
+    <p:sldLayoutId id="2147483663" r:id="rId15"/>
+    <p:sldLayoutId id="2147483664" r:id="rId16"/>
+    <p:sldLayoutId id="2147483665" r:id="rId17"/>
+    <p:sldLayoutId id="2147483666" r:id="rId18"/>
+    <p:sldLayoutId id="2147483667" r:id="rId19"/>
+    <p:sldLayoutId id="2147483668" r:id="rId20"/>
+    <p:sldLayoutId id="2147483669" r:id="rId21"/>
+    <p:sldLayoutId id="2147483670" r:id="rId22"/>
+    <p:sldLayoutId id="2147483671" r:id="rId23"/>
   </p:sldLayoutIdLst>
+  <p:txStyles>
+    <p:titleStyle>
+      <a:lvl1pPr algn="l" defTabSz="914400" rtl="0" eaLnBrk="1" latinLnBrk="0" hangingPunct="1">
+        <a:lnSpc>
+          <a:spcPct val="90000"/>
+        </a:lnSpc>
+        <a:spcBef>
+          <a:spcPct val="0"/>
+        </a:spcBef>
+        <a:buNone/>
+        <a:defRPr sz="4400" kern="1200">
+          <a:solidFill>
+            <a:schemeClr val="tx1"/>
+          </a:solidFill>
+          <a:latin typeface="+mj-lt"/>
+          <a:ea typeface="+mj-ea"/>
+          <a:cs typeface="+mj-cs"/>
+        </a:defRPr>
+      </a:lvl1pPr>
+    </p:titleStyle>
+    <p:bodyStyle>
+      <a:lvl1pPr marL="228600" indent="-228600" algn="l" defTabSz="914400" rtl="0" eaLnBrk="1" latinLnBrk="0" hangingPunct="1">
+        <a:lnSpc>
+          <a:spcPct val="90000"/>
+        </a:lnSpc>
+        <a:spcBef>
+          <a:spcPts val="1000"/>
+        </a:spcBef>
+        <a:buFont typeface="Arial" panose="020B0604020202020204" pitchFamily="34" charset="0"/>
+        <a:buChar char="•"/>
+        <a:defRPr sz="2800" kern="1200">
+          <a:solidFill>
+            <a:schemeClr val="tx1"/>
+          </a:solidFill>
+          <a:latin typeface="+mn-lt"/>
+          <a:ea typeface="+mn-ea"/>
+          <a:cs typeface="+mn-cs"/>
+        </a:defRPr>
+      </a:lvl1pPr>
+      <a:lvl2pPr marL="685800" indent="-228600" algn="l" defTabSz="914400" rtl="0" eaLnBrk="1" latinLnBrk="0" hangingPunct="1">
+        <a:lnSpc>
+          <a:spcPct val="90000"/>
+        </a:lnSpc>
+        <a:spcBef>
+          <a:spcPts val="500"/>
+        </a:spcBef>
+        <a:buFont typeface="Arial" panose="020B0604020202020204" pitchFamily="34" charset="0"/>
+        <a:buChar char="•"/>
+        <a:defRPr sz="2400" kern="1200">
+          <a:solidFill>
+            <a:schemeClr val="tx1"/>
+          </a:solidFill>
+          <a:latin typeface="+mn-lt"/>
+          <a:ea typeface="+mn-ea"/>
+          <a:cs typeface="+mn-cs"/>
+        </a:defRPr>
+      </a:lvl2pPr>
+      <a:lvl3pPr marL="1143000" indent="-228600" algn="l" defTabSz="914400" rtl="0" eaLnBrk="1" latinLnBrk="0" hangingPunct="1">
+        <a:lnSpc>
+          <a:spcPct val="90000"/>
+        </a:lnSpc>
+        <a:spcBef>
+          <a:spcPts val="500"/>
+        </a:spcBef>
+        <a:buFont typeface="Arial" panose="020B0604020202020204" pitchFamily="34" charset="0"/>
+        <a:buChar char="•"/>
+        <a:defRPr sz="2000" kern="1200">
+          <a:solidFill>
+            <a:schemeClr val="tx1"/>
+          </a:solidFill>
+          <a:latin typeface="+mn-lt"/>
+          <a:ea typeface="+mn-ea"/>
+          <a:cs typeface="+mn-cs"/>
+        </a:defRPr>
+      </a:lvl3pPr>
+      <a:lvl4pPr marL="1600200" indent="-228600" algn="l" defTabSz="914400" rtl="0" eaLnBrk="1" latinLnBrk="0" hangingPunct="1">
+        <a:lnSpc>
+          <a:spcPct val="90000"/>
+        </a:lnSpc>
+        <a:spcBef>
+          <a:spcPts val="500"/>
+        </a:spcBef>
+        <a:buFont typeface="Arial" panose="020B0604020202020204" pitchFamily="34" charset="0"/>
+        <a:buChar char="•"/>
+        <a:defRPr sz="1800" kern="1200">
+          <a:solidFill>
+            <a:schemeClr val="tx1"/>
+          </a:solidFill>
+          <a:latin typeface="+mn-lt"/>
+          <a:ea typeface="+mn-ea"/>
+          <a:cs typeface="+mn-cs"/>
+        </a:defRPr>
+      </a:lvl4pPr>
+      <a:lvl5pPr marL="2057400" indent="-228600" algn="l" defTabSz="914400" rtl="0" eaLnBrk="1" latinLnBrk="0" hangingPunct="1">
+        <a:lnSpc>
+          <a:spcPct val="90000"/>
+        </a:lnSpc>
+        <a:spcBef>
+          <a:spcPts val="500"/>
+        </a:spcBef>
+        <a:buFont typeface="Arial" panose="020B0604020202020204" pitchFamily="34" charset="0"/>
+        <a:buChar char="•"/>
+        <a:defRPr sz="1800" kern="1200">
+          <a:solidFill>
+            <a:schemeClr val="tx1"/>
+          </a:solidFill>
+          <a:latin typeface="+mn-lt"/>
+          <a:ea typeface="+mn-ea"/>
+          <a:cs typeface="+mn-cs"/>
+        </a:defRPr>
+      </a:lvl5pPr>
+      <a:lvl6pPr marL="2514600" indent="-228600" algn="l" defTabSz="914400" rtl="0" eaLnBrk="1" latinLnBrk="0" hangingPunct="1">
+        <a:lnSpc>
+          <a:spcPct val="90000"/>
+        </a:lnSpc>
+        <a:spcBef>
+          <a:spcPts val="500"/>
+        </a:spcBef>
+        <a:buFont typeface="Arial" panose="020B0604020202020204" pitchFamily="34" charset="0"/>
+        <a:buChar char="•"/>
+        <a:defRPr sz="1800" kern="1200">
+          <a:solidFill>
+            <a:schemeClr val="tx1"/>
+          </a:solidFill>
+          <a:latin typeface="+mn-lt"/>
+          <a:ea typeface="+mn-ea"/>
+          <a:cs typeface="+mn-cs"/>
+        </a:defRPr>
+      </a:lvl6pPr>
+      <a:lvl7pPr marL="2971800" indent="-228600" algn="l" defTabSz="914400" rtl="0" eaLnBrk="1" latinLnBrk="0" hangingPunct="1">
+        <a:lnSpc>
+          <a:spcPct val="90000"/>
+        </a:lnSpc>
+        <a:spcBef>
+          <a:spcPts val="500"/>
+        </a:spcBef>
+        <a:buFont typeface="Arial" panose="020B0604020202020204" pitchFamily="34" charset="0"/>
+        <a:buChar char="•"/>
+        <a:defRPr sz="1800" kern="1200">
+          <a:solidFill>
+            <a:schemeClr val="tx1"/>
+          </a:solidFill>
+          <a:latin typeface="+mn-lt"/>
+          <a:ea typeface="+mn-ea"/>
+          <a:cs typeface="+mn-cs"/>
+        </a:defRPr>
+      </a:lvl7pPr>
+      <a:lvl8pPr marL="3429000" indent="-228600" algn="l" defTabSz="914400" rtl="0" eaLnBrk="1" latinLnBrk="0" hangingPunct="1">
+        <a:lnSpc>
+          <a:spcPct val="90000"/>
+        </a:lnSpc>
+        <a:spcBef>
+          <a:spcPts val="500"/>
+        </a:spcBef>
+        <a:buFont typeface="Arial" panose="020B0604020202020204" pitchFamily="34" charset="0"/>
+        <a:buChar char="•"/>
+        <a:defRPr sz="1800" kern="1200">
+          <a:solidFill>
+            <a:schemeClr val="tx1"/>
+          </a:solidFill>
+          <a:latin typeface="+mn-lt"/>
+          <a:ea typeface="+mn-ea"/>
+          <a:cs typeface="+mn-cs"/>
+        </a:defRPr>
+      </a:lvl8pPr>
+      <a:lvl9pPr marL="3886200" indent="-228600" algn="l" defTabSz="914400" rtl="0" eaLnBrk="1" latinLnBrk="0" hangingPunct="1">
+        <a:lnSpc>
+          <a:spcPct val="90000"/>
+        </a:lnSpc>
+        <a:spcBef>
+          <a:spcPts val="500"/>
+        </a:spcBef>
+        <a:buFont typeface="Arial" panose="020B0604020202020204" pitchFamily="34" charset="0"/>
+        <a:buChar char="•"/>
+        <a:defRPr sz="1800" kern="1200">
+          <a:solidFill>
+            <a:schemeClr val="tx1"/>
+          </a:solidFill>
+          <a:latin typeface="+mn-lt"/>
+          <a:ea typeface="+mn-ea"/>
+          <a:cs typeface="+mn-cs"/>
+        </a:defRPr>
+      </a:lvl9pPr>
+    </p:bodyStyle>
+    <p:otherStyle>
+      <a:defPPr>
+        <a:defRPr lang="de-DE"/>
+      </a:defPPr>
+      <a:lvl1pPr marL="0" algn="l" defTabSz="914400" rtl="0" eaLnBrk="1" latinLnBrk="0" hangingPunct="1">
+        <a:defRPr sz="1800" kern="1200">
+          <a:solidFill>
+            <a:schemeClr val="tx1"/>
+          </a:solidFill>
+          <a:latin typeface="+mn-lt"/>
+          <a:ea typeface="+mn-ea"/>
+          <a:cs typeface="+mn-cs"/>
+        </a:defRPr>
+      </a:lvl1pPr>
+      <a:lvl2pPr marL="457200" algn="l" defTabSz="914400" rtl="0" eaLnBrk="1" latinLnBrk="0" hangingPunct="1">
+        <a:defRPr sz="1800" kern="1200">
+          <a:solidFill>
+            <a:schemeClr val="tx1"/>
+          </a:solidFill>
+          <a:latin typeface="+mn-lt"/>
+          <a:ea typeface="+mn-ea"/>
+          <a:cs typeface="+mn-cs"/>
+        </a:defRPr>
+      </a:lvl2pPr>
+      <a:lvl3pPr marL="914400" algn="l" defTabSz="914400" rtl="0" eaLnBrk="1" latinLnBrk="0" hangingPunct="1">
+        <a:defRPr sz="1800" kern="1200">
+          <a:solidFill>
+            <a:schemeClr val="tx1"/>
+          </a:solidFill>
+          <a:latin typeface="+mn-lt"/>
+          <a:ea typeface="+mn-ea"/>
+          <a:cs typeface="+mn-cs"/>
+        </a:defRPr>
+      </a:lvl3pPr>
+      <a:lvl4pPr marL="1371600" algn="l" defTabSz="914400" rtl="0" eaLnBrk="1" latinLnBrk="0" hangingPunct="1">
+        <a:defRPr sz="1800" kern="1200">
+          <a:solidFill>
+            <a:schemeClr val="tx1"/>
+          </a:solidFill>
+          <a:latin typeface="+mn-lt"/>
+          <a:ea typeface="+mn-ea"/>
+          <a:cs typeface="+mn-cs"/>
+        </a:defRPr>
+      </a:lvl4pPr>
+      <a:lvl5pPr marL="1828800" algn="l" defTabSz="914400" rtl="0" eaLnBrk="1" latinLnBrk="0" hangingPunct="1">
+        <a:defRPr sz="1800" kern="1200">
+          <a:solidFill>
+            <a:schemeClr val="tx1"/>
+          </a:solidFill>
+          <a:latin typeface="+mn-lt"/>
+          <a:ea typeface="+mn-ea"/>
+          <a:cs typeface="+mn-cs"/>
+        </a:defRPr>
+      </a:lvl5pPr>
+      <a:lvl6pPr marL="2286000" algn="l" defTabSz="914400" rtl="0" eaLnBrk="1" latinLnBrk="0" hangingPunct="1">
+        <a:defRPr sz="1800" kern="1200">
+          <a:solidFill>
+            <a:schemeClr val="tx1"/>
+          </a:solidFill>
+          <a:latin typeface="+mn-lt"/>
+          <a:ea typeface="+mn-ea"/>
+          <a:cs typeface="+mn-cs"/>
+        </a:defRPr>
+      </a:lvl6pPr>
+      <a:lvl7pPr marL="2743200" algn="l" defTabSz="914400" rtl="0" eaLnBrk="1" latinLnBrk="0" hangingPunct="1">
+        <a:defRPr sz="1800" kern="1200">
+          <a:solidFill>
+            <a:schemeClr val="tx1"/>
+          </a:solidFill>
+          <a:latin typeface="+mn-lt"/>
+          <a:ea typeface="+mn-ea"/>
+          <a:cs typeface="+mn-cs"/>
+        </a:defRPr>
+      </a:lvl7pPr>
+      <a:lvl8pPr marL="3200400" algn="l" defTabSz="914400" rtl="0" eaLnBrk="1" latinLnBrk="0" hangingPunct="1">
+        <a:defRPr sz="1800" kern="1200">
+          <a:solidFill>
+            <a:schemeClr val="tx1"/>
+          </a:solidFill>
+          <a:latin typeface="+mn-lt"/>
+          <a:ea typeface="+mn-ea"/>
+          <a:cs typeface="+mn-cs"/>
+        </a:defRPr>
+      </a:lvl8pPr>
+      <a:lvl9pPr marL="3657600" algn="l" defTabSz="914400" rtl="0" eaLnBrk="1" latinLnBrk="0" hangingPunct="1">
+        <a:defRPr sz="1800" kern="1200">
+          <a:solidFill>
+            <a:schemeClr val="tx1"/>
+          </a:solidFill>
+          <a:latin typeface="+mn-lt"/>
+          <a:ea typeface="+mn-ea"/>
+          <a:cs typeface="+mn-cs"/>
+        </a:defRPr>
+      </a:lvl9pPr>
+    </p:otherStyle>
+  </p:txStyles>
 </p:sldMaster>
 </file>
 
 <file path=ppt/slides/slide1.xml><?xml version="1.0" encoding="utf-8"?>
-<p:sld xmlns:a="http://schemas.openxmlformats.org/drawingml/2006/main" xmlns:p="http://schemas.openxmlformats.org/presentationml/2006/main" xmlns:r="http://schemas.openxmlformats.org/officeDocument/2006/relationships" xmlns:p14="http://schemas.microsoft.com/office/powerpoint/2010/main" xmlns:p15="http://schemas.microsoft.com/office/powerpoint/2012/main" xmlns:mc="http://schemas.openxmlformats.org/markup-compatibility/2006">
+<p:sld xmlns:a="http://schemas.openxmlformats.org/drawingml/2006/main" xmlns:r="http://schemas.openxmlformats.org/officeDocument/2006/relationships" xmlns:p="http://schemas.openxmlformats.org/presentationml/2006/main">
   <p:cSld>
     <p:spTree>
       <p:nvGrpSpPr>
@@ -14099,6 +14413,7 @@
           <a:bodyPr lIns="0" tIns="45000" rIns="90000" bIns="45000" anchor="t">
             <a:normAutofit/>
           </a:bodyPr>
+          <a:lstStyle/>
           <a:p>
             <a:pPr indent="0" algn="l" defTabSz="914040">
               <a:lnSpc>
@@ -14161,6 +14476,7 @@
           <a:bodyPr lIns="0" tIns="45000" rIns="90000" bIns="45000" anchor="b">
             <a:normAutofit/>
           </a:bodyPr>
+          <a:lstStyle/>
           <a:p>
             <a:pPr indent="0" algn="l" defTabSz="914040">
               <a:lnSpc>
@@ -14185,32 +14501,19 @@
               </a:rPr>
               <a:t>Refactoring und Code-Qualität</a:t>
             </a:r>
-            <a:endParaRPr lang="en-US" sz="4800" b="1" u="none" strike="noStrike">
-              <a:solidFill>
-                <a:schemeClr val="lt1"/>
-              </a:solidFill>
-              <a:effectLst/>
-              <a:uFillTx/>
-              <a:latin typeface="Rubik SemiBold"/>
-            </a:endParaRPr>
           </a:p>
         </p:txBody>
       </p:sp>
     </p:spTree>
   </p:cSld>
-  <mc:AlternateContent>
-    <mc:Choice Requires="p14">
-      <p:transition spd="slow" p14:dur="2000"/>
-    </mc:Choice>
-    <mc:Fallback>
-      <p:transition spd="slow"/>
-    </mc:Fallback>
-  </mc:AlternateContent>
+  <p:clrMapOvr>
+    <a:masterClrMapping/>
+  </p:clrMapOvr>
 </p:sld>
 </file>
 
 <file path=ppt/slides/slide10.xml><?xml version="1.0" encoding="utf-8"?>
-<p:sld xmlns:a="http://schemas.openxmlformats.org/drawingml/2006/main" xmlns:p="http://schemas.openxmlformats.org/presentationml/2006/main" xmlns:r="http://schemas.openxmlformats.org/officeDocument/2006/relationships" xmlns:p14="http://schemas.microsoft.com/office/powerpoint/2010/main" xmlns:p15="http://schemas.microsoft.com/office/powerpoint/2012/main" xmlns:mc="http://schemas.openxmlformats.org/markup-compatibility/2006">
+<p:sld xmlns:a="http://schemas.openxmlformats.org/drawingml/2006/main" xmlns:r="http://schemas.openxmlformats.org/officeDocument/2006/relationships" xmlns:p="http://schemas.openxmlformats.org/presentationml/2006/main">
   <p:cSld>
     <p:spTree>
       <p:nvGrpSpPr>
@@ -14253,6 +14556,7 @@
           <a:bodyPr lIns="90000" tIns="45000" rIns="90000" bIns="45000" anchor="t">
             <a:noAutofit/>
           </a:bodyPr>
+          <a:lstStyle/>
           <a:p>
             <a:pPr indent="0" algn="l" defTabSz="914040">
               <a:lnSpc>
@@ -14337,6 +14641,7 @@
           <a:bodyPr lIns="90000" tIns="45000" rIns="90000" bIns="45000" anchor="t">
             <a:noAutofit/>
           </a:bodyPr>
+          <a:lstStyle/>
           <a:p>
             <a:pPr indent="0" algn="ctr" defTabSz="914040">
               <a:lnSpc>
@@ -14392,21 +14697,28 @@
             <a:noFill/>
           </a:ln>
           <a:effectLst>
-            <a:outerShdw algn="tl" dir="2700000" dist="88586" rotWithShape="0">
+            <a:outerShdw dist="88586" dir="2700000" algn="tl" rotWithShape="0">
               <a:srgbClr val="140046"/>
             </a:outerShdw>
           </a:effectLst>
         </p:spPr>
         <p:style>
-          <a:lnRef idx="0"/>
-          <a:fillRef idx="0"/>
-          <a:effectRef idx="0"/>
+          <a:lnRef idx="0">
+            <a:scrgbClr r="0" g="0" b="0"/>
+          </a:lnRef>
+          <a:fillRef idx="0">
+            <a:scrgbClr r="0" g="0" b="0"/>
+          </a:fillRef>
+          <a:effectRef idx="0">
+            <a:scrgbClr r="0" g="0" b="0"/>
+          </a:effectRef>
           <a:fontRef idx="minor"/>
         </p:style>
         <p:txBody>
           <a:bodyPr lIns="288000" tIns="108000" rIns="288000" bIns="180000" anchor="ctr">
             <a:noAutofit/>
           </a:bodyPr>
+          <a:lstStyle/>
           <a:p>
             <a:pPr algn="ctr" defTabSz="914400">
               <a:lnSpc>
@@ -14461,21 +14773,28 @@
             <a:noFill/>
           </a:ln>
           <a:effectLst>
-            <a:outerShdw algn="tl" dir="2700000" dist="88586" rotWithShape="0">
+            <a:outerShdw dist="88586" dir="2700000" algn="tl" rotWithShape="0">
               <a:srgbClr val="140046"/>
             </a:outerShdw>
           </a:effectLst>
         </p:spPr>
         <p:style>
-          <a:lnRef idx="0"/>
-          <a:fillRef idx="0"/>
-          <a:effectRef idx="0"/>
+          <a:lnRef idx="0">
+            <a:scrgbClr r="0" g="0" b="0"/>
+          </a:lnRef>
+          <a:fillRef idx="0">
+            <a:scrgbClr r="0" g="0" b="0"/>
+          </a:fillRef>
+          <a:effectRef idx="0">
+            <a:scrgbClr r="0" g="0" b="0"/>
+          </a:effectRef>
           <a:fontRef idx="minor"/>
         </p:style>
         <p:txBody>
           <a:bodyPr lIns="288000" tIns="108000" rIns="288000" bIns="180000" anchor="ctr">
             <a:noAutofit/>
           </a:bodyPr>
+          <a:lstStyle/>
           <a:p>
             <a:pPr algn="ctr" defTabSz="914400">
               <a:lnSpc>
@@ -14514,7 +14833,7 @@
           <p:nvPr/>
         </p:nvPicPr>
         <p:blipFill>
-          <a:blip r:embed="rId1"/>
+          <a:blip r:embed="rId2"/>
           <a:stretch/>
         </p:blipFill>
         <p:spPr>
@@ -14538,7 +14857,7 @@
           <p:nvPr/>
         </p:nvPicPr>
         <p:blipFill>
-          <a:blip r:embed="rId2"/>
+          <a:blip r:embed="rId3"/>
           <a:stretch/>
         </p:blipFill>
         <p:spPr>
@@ -14557,19 +14876,14 @@
       </p:pic>
     </p:spTree>
   </p:cSld>
-  <mc:AlternateContent>
-    <mc:Choice Requires="p14">
-      <p:transition spd="slow" p14:dur="2000"/>
-    </mc:Choice>
-    <mc:Fallback>
-      <p:transition spd="slow"/>
-    </mc:Fallback>
-  </mc:AlternateContent>
+  <p:clrMapOvr>
+    <a:masterClrMapping/>
+  </p:clrMapOvr>
 </p:sld>
 </file>
 
 <file path=ppt/slides/slide11.xml><?xml version="1.0" encoding="utf-8"?>
-<p:sld xmlns:a="http://schemas.openxmlformats.org/drawingml/2006/main" xmlns:p="http://schemas.openxmlformats.org/presentationml/2006/main" xmlns:r="http://schemas.openxmlformats.org/officeDocument/2006/relationships" xmlns:p14="http://schemas.microsoft.com/office/powerpoint/2010/main" xmlns:p15="http://schemas.microsoft.com/office/powerpoint/2012/main" xmlns:mc="http://schemas.openxmlformats.org/markup-compatibility/2006">
+<p:sld xmlns:a="http://schemas.openxmlformats.org/drawingml/2006/main" xmlns:r="http://schemas.openxmlformats.org/officeDocument/2006/relationships" xmlns:p="http://schemas.openxmlformats.org/presentationml/2006/main">
   <p:cSld>
     <p:spTree>
       <p:nvGrpSpPr>
@@ -14612,6 +14926,7 @@
           <a:bodyPr lIns="90000" tIns="45000" rIns="90000" bIns="45000" anchor="t">
             <a:noAutofit/>
           </a:bodyPr>
+          <a:lstStyle/>
           <a:p>
             <a:pPr indent="0" algn="l" defTabSz="914040">
               <a:lnSpc>
@@ -14696,6 +15011,7 @@
           <a:bodyPr lIns="90000" tIns="45000" rIns="90000" bIns="45000" anchor="t">
             <a:noAutofit/>
           </a:bodyPr>
+          <a:lstStyle/>
           <a:p>
             <a:pPr indent="0" algn="ctr" defTabSz="914040">
               <a:lnSpc>
@@ -14751,21 +15067,28 @@
             <a:noFill/>
           </a:ln>
           <a:effectLst>
-            <a:outerShdw algn="tl" dir="2700000" dist="88586" rotWithShape="0">
+            <a:outerShdw dist="88586" dir="2700000" algn="tl" rotWithShape="0">
               <a:srgbClr val="140046"/>
             </a:outerShdw>
           </a:effectLst>
         </p:spPr>
         <p:style>
-          <a:lnRef idx="0"/>
-          <a:fillRef idx="0"/>
-          <a:effectRef idx="0"/>
+          <a:lnRef idx="0">
+            <a:scrgbClr r="0" g="0" b="0"/>
+          </a:lnRef>
+          <a:fillRef idx="0">
+            <a:scrgbClr r="0" g="0" b="0"/>
+          </a:fillRef>
+          <a:effectRef idx="0">
+            <a:scrgbClr r="0" g="0" b="0"/>
+          </a:effectRef>
           <a:fontRef idx="minor"/>
         </p:style>
         <p:txBody>
           <a:bodyPr lIns="288000" tIns="108000" rIns="288000" bIns="180000" anchor="ctr">
             <a:noAutofit/>
           </a:bodyPr>
+          <a:lstStyle/>
           <a:p>
             <a:pPr algn="ctr" defTabSz="914400">
               <a:lnSpc>
@@ -14820,21 +15143,28 @@
             <a:noFill/>
           </a:ln>
           <a:effectLst>
-            <a:outerShdw algn="tl" dir="2700000" dist="88586" rotWithShape="0">
+            <a:outerShdw dist="88586" dir="2700000" algn="tl" rotWithShape="0">
               <a:srgbClr val="140046"/>
             </a:outerShdw>
           </a:effectLst>
         </p:spPr>
         <p:style>
-          <a:lnRef idx="0"/>
-          <a:fillRef idx="0"/>
-          <a:effectRef idx="0"/>
+          <a:lnRef idx="0">
+            <a:scrgbClr r="0" g="0" b="0"/>
+          </a:lnRef>
+          <a:fillRef idx="0">
+            <a:scrgbClr r="0" g="0" b="0"/>
+          </a:fillRef>
+          <a:effectRef idx="0">
+            <a:scrgbClr r="0" g="0" b="0"/>
+          </a:effectRef>
           <a:fontRef idx="minor"/>
         </p:style>
         <p:txBody>
           <a:bodyPr lIns="288000" tIns="108000" rIns="288000" bIns="180000" anchor="ctr">
             <a:noAutofit/>
           </a:bodyPr>
+          <a:lstStyle/>
           <a:p>
             <a:pPr algn="ctr" defTabSz="914400">
               <a:lnSpc>
@@ -14873,7 +15203,7 @@
           <p:nvPr/>
         </p:nvPicPr>
         <p:blipFill>
-          <a:blip r:embed="rId1"/>
+          <a:blip r:embed="rId2"/>
           <a:stretch/>
         </p:blipFill>
         <p:spPr>
@@ -14897,7 +15227,7 @@
           <p:nvPr/>
         </p:nvPicPr>
         <p:blipFill>
-          <a:blip r:embed="rId2"/>
+          <a:blip r:embed="rId3"/>
           <a:stretch/>
         </p:blipFill>
         <p:spPr>
@@ -14916,19 +15246,14 @@
       </p:pic>
     </p:spTree>
   </p:cSld>
-  <mc:AlternateContent>
-    <mc:Choice Requires="p14">
-      <p:transition spd="slow" p14:dur="2000"/>
-    </mc:Choice>
-    <mc:Fallback>
-      <p:transition spd="slow"/>
-    </mc:Fallback>
-  </mc:AlternateContent>
+  <p:clrMapOvr>
+    <a:masterClrMapping/>
+  </p:clrMapOvr>
 </p:sld>
 </file>
 
 <file path=ppt/slides/slide12.xml><?xml version="1.0" encoding="utf-8"?>
-<p:sld xmlns:a="http://schemas.openxmlformats.org/drawingml/2006/main" xmlns:p="http://schemas.openxmlformats.org/presentationml/2006/main" xmlns:r="http://schemas.openxmlformats.org/officeDocument/2006/relationships" xmlns:p14="http://schemas.microsoft.com/office/powerpoint/2010/main" xmlns:p15="http://schemas.microsoft.com/office/powerpoint/2012/main" xmlns:mc="http://schemas.openxmlformats.org/markup-compatibility/2006">
+<p:sld xmlns:a="http://schemas.openxmlformats.org/drawingml/2006/main" xmlns:r="http://schemas.openxmlformats.org/officeDocument/2006/relationships" xmlns:p="http://schemas.openxmlformats.org/presentationml/2006/main">
   <p:cSld>
     <p:spTree>
       <p:nvGrpSpPr>
@@ -14971,6 +15296,7 @@
           <a:bodyPr lIns="90000" tIns="45000" rIns="90000" bIns="45000" anchor="t">
             <a:noAutofit/>
           </a:bodyPr>
+          <a:lstStyle/>
           <a:p>
             <a:pPr indent="0" algn="l" defTabSz="914040">
               <a:lnSpc>
@@ -15033,6 +15359,7 @@
           <a:bodyPr lIns="90000" tIns="45000" rIns="90000" bIns="45000" anchor="t">
             <a:noAutofit/>
           </a:bodyPr>
+          <a:lstStyle/>
           <a:p>
             <a:pPr marL="228600" indent="-228600" algn="l" defTabSz="914040">
               <a:lnSpc>
@@ -15043,7 +15370,7 @@
               </a:spcBef>
               <a:buSzPct val="100000"/>
               <a:buBlip>
-                <a:blip r:embed="rId1"/>
+                <a:blip r:embed="rId2"/>
               </a:buBlip>
               <a:tabLst>
                 <a:tab pos="0" algn="l"/>
@@ -15336,6 +15663,7 @@
           <a:bodyPr lIns="90000" tIns="45000" rIns="90000" bIns="45000" anchor="t">
             <a:noAutofit/>
           </a:bodyPr>
+          <a:lstStyle/>
           <a:p>
             <a:pPr indent="0" algn="l" defTabSz="914040">
               <a:lnSpc>
@@ -15394,19 +15722,14 @@
       </p:pic>
     </p:spTree>
   </p:cSld>
-  <mc:AlternateContent>
-    <mc:Choice Requires="p14">
-      <p:transition spd="slow" p14:dur="2000"/>
-    </mc:Choice>
-    <mc:Fallback>
-      <p:transition spd="slow"/>
-    </mc:Fallback>
-  </mc:AlternateContent>
+  <p:clrMapOvr>
+    <a:masterClrMapping/>
+  </p:clrMapOvr>
 </p:sld>
 </file>
 
 <file path=ppt/slides/slide13.xml><?xml version="1.0" encoding="utf-8"?>
-<p:sld xmlns:a="http://schemas.openxmlformats.org/drawingml/2006/main" xmlns:p="http://schemas.openxmlformats.org/presentationml/2006/main" xmlns:r="http://schemas.openxmlformats.org/officeDocument/2006/relationships" xmlns:p14="http://schemas.microsoft.com/office/powerpoint/2010/main" xmlns:p15="http://schemas.microsoft.com/office/powerpoint/2012/main" xmlns:mc="http://schemas.openxmlformats.org/markup-compatibility/2006">
+<p:sld xmlns:a="http://schemas.openxmlformats.org/drawingml/2006/main" xmlns:r="http://schemas.openxmlformats.org/officeDocument/2006/relationships" xmlns:p="http://schemas.openxmlformats.org/presentationml/2006/main">
   <p:cSld>
     <p:spTree>
       <p:nvGrpSpPr>
@@ -15449,6 +15772,7 @@
           <a:bodyPr lIns="90000" tIns="45000" rIns="90000" bIns="45000" anchor="t">
             <a:noAutofit/>
           </a:bodyPr>
+          <a:lstStyle/>
           <a:p>
             <a:pPr indent="0" algn="l" defTabSz="914040">
               <a:lnSpc>
@@ -15533,6 +15857,7 @@
           <a:bodyPr lIns="90000" tIns="45000" rIns="90000" bIns="45000" anchor="t">
             <a:noAutofit/>
           </a:bodyPr>
+          <a:lstStyle/>
           <a:p>
             <a:pPr indent="0" algn="ctr" defTabSz="914040">
               <a:lnSpc>
@@ -15592,53 +15917,7 @@
           <a:bodyPr lIns="90000" tIns="45000" rIns="90000" bIns="45000" anchor="t">
             <a:noAutofit/>
           </a:bodyPr>
-          <a:p>
-            <a:pPr marL="352440" indent="-342720" algn="l" defTabSz="914040">
-              <a:lnSpc>
-                <a:spcPct val="100000"/>
-              </a:lnSpc>
-              <a:spcBef>
-                <a:spcPts val="1001"/>
-              </a:spcBef>
-              <a:buSzPct val="100000"/>
-              <a:buBlip>
-                <a:blip r:embed="rId1"/>
-              </a:buBlip>
-              <a:tabLst>
-                <a:tab pos="0" algn="l"/>
-              </a:tabLst>
-            </a:pPr>
-            <a:r>
-              <a:rPr lang="de-DE" sz="2400" b="0" u="none" strike="noStrike">
-                <a:solidFill>
-                  <a:schemeClr val="dk1"/>
-                </a:solidFill>
-                <a:effectLst/>
-                <a:uFillTx/>
-                <a:latin typeface="Rubik"/>
-              </a:rPr>
-              <a:t>PEP = </a:t>
-            </a:r>
-            <a:r>
-              <a:rPr lang="de-DE" sz="2400" b="0" i="1" u="none" strike="noStrike">
-                <a:solidFill>
-                  <a:schemeClr val="dk1"/>
-                </a:solidFill>
-                <a:effectLst/>
-                <a:uFillTx/>
-                <a:latin typeface="Rubik"/>
-              </a:rPr>
-              <a:t>Python Enhancement Proposals</a:t>
-            </a:r>
-            <a:endParaRPr lang="de-DE" sz="2400" b="0" u="none" strike="noStrike">
-              <a:solidFill>
-                <a:schemeClr val="dk1"/>
-              </a:solidFill>
-              <a:effectLst/>
-              <a:uFillTx/>
-              <a:latin typeface="Rubik"/>
-            </a:endParaRPr>
-          </a:p>
+          <a:lstStyle/>
           <a:p>
             <a:pPr marL="352440" indent="-342720" algn="l" defTabSz="914040">
               <a:lnSpc>
@@ -15664,6 +15943,53 @@
                 <a:uFillTx/>
                 <a:latin typeface="Rubik"/>
               </a:rPr>
+              <a:t>PEP = </a:t>
+            </a:r>
+            <a:r>
+              <a:rPr lang="de-DE" sz="2400" b="0" i="1" u="none" strike="noStrike">
+                <a:solidFill>
+                  <a:schemeClr val="dk1"/>
+                </a:solidFill>
+                <a:effectLst/>
+                <a:uFillTx/>
+                <a:latin typeface="Rubik"/>
+              </a:rPr>
+              <a:t>Python Enhancement Proposals</a:t>
+            </a:r>
+            <a:endParaRPr lang="de-DE" sz="2400" b="0" u="none" strike="noStrike">
+              <a:solidFill>
+                <a:schemeClr val="dk1"/>
+              </a:solidFill>
+              <a:effectLst/>
+              <a:uFillTx/>
+              <a:latin typeface="Rubik"/>
+            </a:endParaRPr>
+          </a:p>
+          <a:p>
+            <a:pPr marL="352440" indent="-342720" algn="l" defTabSz="914040">
+              <a:lnSpc>
+                <a:spcPct val="100000"/>
+              </a:lnSpc>
+              <a:spcBef>
+                <a:spcPts val="1001"/>
+              </a:spcBef>
+              <a:buSzPct val="100000"/>
+              <a:buBlip>
+                <a:blip r:embed="rId2"/>
+              </a:buBlip>
+              <a:tabLst>
+                <a:tab pos="0" algn="l"/>
+              </a:tabLst>
+            </a:pPr>
+            <a:r>
+              <a:rPr lang="de-DE" sz="2400" b="0" u="none" strike="noStrike">
+                <a:solidFill>
+                  <a:schemeClr val="dk1"/>
+                </a:solidFill>
+                <a:effectLst/>
+                <a:uFillTx/>
+                <a:latin typeface="Rubik"/>
+              </a:rPr>
               <a:t>PEP 8 ist der </a:t>
             </a:r>
             <a:r>
@@ -15688,14 +16014,6 @@
               </a:rPr>
               <a:t> für Python</a:t>
             </a:r>
-            <a:endParaRPr lang="de-DE" sz="2400" b="0" u="none" strike="noStrike">
-              <a:solidFill>
-                <a:schemeClr val="dk1"/>
-              </a:solidFill>
-              <a:effectLst/>
-              <a:uFillTx/>
-              <a:latin typeface="Rubik"/>
-            </a:endParaRPr>
           </a:p>
           <a:p>
             <a:pPr marL="685800" lvl="1" indent="-228600" algn="l" defTabSz="914040">
@@ -15725,14 +16043,6 @@
               </a:rPr>
               <a:t>Vorgaben zur Formatierung und Namensgebung</a:t>
             </a:r>
-            <a:endParaRPr lang="de-DE" sz="2000" b="0" u="none" strike="noStrike">
-              <a:solidFill>
-                <a:schemeClr val="dk1"/>
-              </a:solidFill>
-              <a:effectLst/>
-              <a:uFillTx/>
-              <a:latin typeface="Rubik"/>
-            </a:endParaRPr>
           </a:p>
           <a:p>
             <a:pPr marL="685800" lvl="1" indent="-228600" algn="l" defTabSz="914040">
@@ -15762,14 +16072,6 @@
               </a:rPr>
               <a:t>Macht Code vertraut und leicht zu lesen – unabhängig vom Projekt</a:t>
             </a:r>
-            <a:endParaRPr lang="de-DE" sz="2000" b="0" u="none" strike="noStrike">
-              <a:solidFill>
-                <a:schemeClr val="dk1"/>
-              </a:solidFill>
-              <a:effectLst/>
-              <a:uFillTx/>
-              <a:latin typeface="Rubik"/>
-            </a:endParaRPr>
           </a:p>
           <a:p>
             <a:pPr marL="352440" indent="-342720" algn="l" defTabSz="914040">
@@ -15781,7 +16083,7 @@
               </a:spcBef>
               <a:buSzPct val="100000"/>
               <a:buBlip>
-                <a:blip r:embed="rId3"/>
+                <a:blip r:embed="rId2"/>
               </a:buBlip>
               <a:tabLst>
                 <a:tab pos="0" algn="l"/>
@@ -15798,14 +16100,6 @@
               </a:rPr>
               <a:t>Wozu das Ganze?</a:t>
             </a:r>
-            <a:endParaRPr lang="de-DE" sz="2400" b="0" u="none" strike="noStrike">
-              <a:solidFill>
-                <a:schemeClr val="dk1"/>
-              </a:solidFill>
-              <a:effectLst/>
-              <a:uFillTx/>
-              <a:latin typeface="Rubik"/>
-            </a:endParaRPr>
           </a:p>
           <a:p>
             <a:pPr marL="685800" lvl="1" indent="-228600" algn="l" defTabSz="914040">
@@ -15835,14 +16129,6 @@
               </a:rPr>
               <a:t>Teamarbeit: Konsistenz verringert Stolperfallen</a:t>
             </a:r>
-            <a:endParaRPr lang="de-DE" sz="2000" b="0" u="none" strike="noStrike">
-              <a:solidFill>
-                <a:schemeClr val="dk1"/>
-              </a:solidFill>
-              <a:effectLst/>
-              <a:uFillTx/>
-              <a:latin typeface="Rubik"/>
-            </a:endParaRPr>
           </a:p>
           <a:p>
             <a:pPr marL="685800" lvl="1" indent="-228600" algn="l" defTabSz="914040">
@@ -15872,14 +16158,6 @@
               </a:rPr>
               <a:t>Bessere Code-Review, leichterer Einstieg für Außenstehende</a:t>
             </a:r>
-            <a:endParaRPr lang="de-DE" sz="2000" b="0" u="none" strike="noStrike">
-              <a:solidFill>
-                <a:schemeClr val="dk1"/>
-              </a:solidFill>
-              <a:effectLst/>
-              <a:uFillTx/>
-              <a:latin typeface="Rubik"/>
-            </a:endParaRPr>
           </a:p>
           <a:p>
             <a:pPr marL="9360" indent="0" algn="l" defTabSz="914040">
@@ -15970,6 +16248,7 @@
           <a:bodyPr lIns="288000" tIns="288000" rIns="288000" bIns="45000" anchor="t">
             <a:noAutofit/>
           </a:bodyPr>
+          <a:lstStyle/>
           <a:p>
             <a:endParaRPr lang="de-DE" sz="2800" b="0" u="none" strike="noStrike">
               <a:solidFill>
@@ -15989,10 +16268,10 @@
           <p:nvPr/>
         </p:nvPicPr>
         <p:blipFill>
-          <a:blip r:embed="rId4">
+          <a:blip>
             <a:extLst>
               <a:ext uri="{96DAC541-7B7A-43D3-8B79-37D633B846F1}">
-                <asvg:svgBlip xmlns:asvg="http://schemas.microsoft.com/office/drawing/2016/SVG/main" r:embed="rId5"/>
+                <asvg:svgBlip xmlns:asvg="http://schemas.microsoft.com/office/drawing/2016/SVG/main" r:embed="rId3"/>
               </a:ext>
             </a:extLst>
           </a:blip>
@@ -16019,10 +16298,10 @@
           <p:nvPr/>
         </p:nvPicPr>
         <p:blipFill>
-          <a:blip r:embed="rId6">
+          <a:blip>
             <a:extLst>
               <a:ext uri="{96DAC541-7B7A-43D3-8B79-37D633B846F1}">
-                <asvg:svgBlip xmlns:asvg="http://schemas.microsoft.com/office/drawing/2016/SVG/main" r:embed="rId7"/>
+                <asvg:svgBlip xmlns:asvg="http://schemas.microsoft.com/office/drawing/2016/SVG/main" r:embed="rId3"/>
               </a:ext>
             </a:extLst>
           </a:blip>
@@ -16062,15 +16341,22 @@
           </a:ln>
         </p:spPr>
         <p:style>
-          <a:lnRef idx="0"/>
-          <a:fillRef idx="0"/>
-          <a:effectRef idx="0"/>
+          <a:lnRef idx="0">
+            <a:scrgbClr r="0" g="0" b="0"/>
+          </a:lnRef>
+          <a:fillRef idx="0">
+            <a:scrgbClr r="0" g="0" b="0"/>
+          </a:fillRef>
+          <a:effectRef idx="0">
+            <a:scrgbClr r="0" g="0" b="0"/>
+          </a:effectRef>
           <a:fontRef idx="minor"/>
         </p:style>
         <p:txBody>
           <a:bodyPr lIns="90000" tIns="45000" rIns="90000" bIns="45000" anchor="t">
             <a:noAutofit/>
           </a:bodyPr>
+          <a:lstStyle/>
           <a:p>
             <a:pPr marL="9360" defTabSz="914040">
               <a:lnSpc>
@@ -16102,7 +16388,7 @@
                 <a:effectLst/>
                 <a:uFillTx/>
                 <a:latin typeface="Rubik"/>
-                <a:hlinkClick r:id="rId8"/>
+                <a:hlinkClick r:id="rId4"/>
               </a:rPr>
               <a:t>The Zen </a:t>
             </a:r>
@@ -16114,7 +16400,7 @@
                 <a:effectLst/>
                 <a:uFillTx/>
                 <a:latin typeface="Rubik"/>
-                <a:hlinkClick r:id="rId9"/>
+                <a:hlinkClick r:id="rId4"/>
               </a:rPr>
               <a:t>of</a:t>
             </a:r>
@@ -16126,7 +16412,7 @@
                 <a:effectLst/>
                 <a:uFillTx/>
                 <a:latin typeface="Rubik"/>
-                <a:hlinkClick r:id="rId10"/>
+                <a:hlinkClick r:id="rId4"/>
               </a:rPr>
               <a:t> Python</a:t>
             </a:r>
@@ -16164,19 +16450,14 @@
       </p:sp>
     </p:spTree>
   </p:cSld>
-  <mc:AlternateContent>
-    <mc:Choice Requires="p14">
-      <p:transition spd="slow" p14:dur="2000"/>
-    </mc:Choice>
-    <mc:Fallback>
-      <p:transition spd="slow"/>
-    </mc:Fallback>
-  </mc:AlternateContent>
+  <p:clrMapOvr>
+    <a:masterClrMapping/>
+  </p:clrMapOvr>
 </p:sld>
 </file>
 
 <file path=ppt/slides/slide14.xml><?xml version="1.0" encoding="utf-8"?>
-<p:sld xmlns:a="http://schemas.openxmlformats.org/drawingml/2006/main" xmlns:p="http://schemas.openxmlformats.org/presentationml/2006/main" xmlns:r="http://schemas.openxmlformats.org/officeDocument/2006/relationships" xmlns:p14="http://schemas.microsoft.com/office/powerpoint/2010/main" xmlns:p15="http://schemas.microsoft.com/office/powerpoint/2012/main" xmlns:mc="http://schemas.openxmlformats.org/markup-compatibility/2006">
+<p:sld xmlns:a="http://schemas.openxmlformats.org/drawingml/2006/main" xmlns:r="http://schemas.openxmlformats.org/officeDocument/2006/relationships" xmlns:p="http://schemas.openxmlformats.org/presentationml/2006/main">
   <p:cSld>
     <p:spTree>
       <p:nvGrpSpPr>
@@ -16219,6 +16500,7 @@
           <a:bodyPr lIns="90000" tIns="45000" rIns="90000" bIns="45000" anchor="t">
             <a:noAutofit/>
           </a:bodyPr>
+          <a:lstStyle/>
           <a:p>
             <a:pPr indent="0" algn="l" defTabSz="914040">
               <a:lnSpc>
@@ -16303,6 +16585,7 @@
           <a:bodyPr lIns="90000" tIns="45000" rIns="90000" bIns="45000" anchor="t">
             <a:noAutofit/>
           </a:bodyPr>
+          <a:lstStyle/>
           <a:p>
             <a:pPr indent="0" algn="ctr" defTabSz="914040">
               <a:lnSpc>
@@ -16362,53 +16645,7 @@
           <a:bodyPr lIns="90000" tIns="45000" rIns="90000" bIns="45000" anchor="t">
             <a:noAutofit/>
           </a:bodyPr>
-          <a:p>
-            <a:pPr marL="352440" indent="-342720" algn="l" defTabSz="914040">
-              <a:lnSpc>
-                <a:spcPct val="100000"/>
-              </a:lnSpc>
-              <a:spcBef>
-                <a:spcPts val="1001"/>
-              </a:spcBef>
-              <a:buSzPct val="100000"/>
-              <a:buBlip>
-                <a:blip r:embed="rId1"/>
-              </a:buBlip>
-              <a:tabLst>
-                <a:tab pos="0" algn="l"/>
-              </a:tabLst>
-            </a:pPr>
-            <a:r>
-              <a:rPr lang="de-DE" sz="1600" b="1" u="none" strike="noStrike">
-                <a:solidFill>
-                  <a:schemeClr val="dk1"/>
-                </a:solidFill>
-                <a:effectLst/>
-                <a:uFillTx/>
-                <a:latin typeface="Rubik"/>
-              </a:rPr>
-              <a:t>Einrückung:</a:t>
-            </a:r>
-            <a:r>
-              <a:rPr lang="de-DE" sz="1600" b="0" u="none" strike="noStrike">
-                <a:solidFill>
-                  <a:schemeClr val="dk1"/>
-                </a:solidFill>
-                <a:effectLst/>
-                <a:uFillTx/>
-                <a:latin typeface="Rubik"/>
-              </a:rPr>
-              <a:t> 4 Leerzeichen pro Ebene, keine Tabs verwenden</a:t>
-            </a:r>
-            <a:endParaRPr lang="de-DE" sz="1600" b="0" u="none" strike="noStrike">
-              <a:solidFill>
-                <a:schemeClr val="dk1"/>
-              </a:solidFill>
-              <a:effectLst/>
-              <a:uFillTx/>
-              <a:latin typeface="Rubik"/>
-            </a:endParaRPr>
-          </a:p>
+          <a:lstStyle/>
           <a:p>
             <a:pPr marL="352440" indent="-342720" algn="l" defTabSz="914040">
               <a:lnSpc>
@@ -16434,6 +16671,45 @@
                 <a:uFillTx/>
                 <a:latin typeface="Rubik"/>
               </a:rPr>
+              <a:t>Einrückung:</a:t>
+            </a:r>
+            <a:r>
+              <a:rPr lang="de-DE" sz="1600" b="0" u="none" strike="noStrike">
+                <a:solidFill>
+                  <a:schemeClr val="dk1"/>
+                </a:solidFill>
+                <a:effectLst/>
+                <a:uFillTx/>
+                <a:latin typeface="Rubik"/>
+              </a:rPr>
+              <a:t> 4 Leerzeichen pro Ebene, keine Tabs verwenden</a:t>
+            </a:r>
+          </a:p>
+          <a:p>
+            <a:pPr marL="352440" indent="-342720" algn="l" defTabSz="914040">
+              <a:lnSpc>
+                <a:spcPct val="100000"/>
+              </a:lnSpc>
+              <a:spcBef>
+                <a:spcPts val="1001"/>
+              </a:spcBef>
+              <a:buSzPct val="100000"/>
+              <a:buBlip>
+                <a:blip r:embed="rId2"/>
+              </a:buBlip>
+              <a:tabLst>
+                <a:tab pos="0" algn="l"/>
+              </a:tabLst>
+            </a:pPr>
+            <a:r>
+              <a:rPr lang="de-DE" sz="1600" b="1" u="none" strike="noStrike">
+                <a:solidFill>
+                  <a:schemeClr val="dk1"/>
+                </a:solidFill>
+                <a:effectLst/>
+                <a:uFillTx/>
+                <a:latin typeface="Rubik"/>
+              </a:rPr>
               <a:t>Zeilenlänge:</a:t>
             </a:r>
             <a:r>
@@ -16447,14 +16723,6 @@
               </a:rPr>
               <a:t> Maximal 79 Zeichen</a:t>
             </a:r>
-            <a:endParaRPr lang="de-DE" sz="1600" b="0" u="none" strike="noStrike">
-              <a:solidFill>
-                <a:schemeClr val="dk1"/>
-              </a:solidFill>
-              <a:effectLst/>
-              <a:uFillTx/>
-              <a:latin typeface="Rubik"/>
-            </a:endParaRPr>
           </a:p>
           <a:p>
             <a:pPr marL="685800" lvl="1" indent="-228600" algn="l" defTabSz="914040">
@@ -16484,14 +16752,6 @@
               </a:rPr>
               <a:t>(nutzt Zeilenumbrüche, insbesondere für Auflistungen und Funktionsparameter!)</a:t>
             </a:r>
-            <a:endParaRPr lang="de-DE" sz="1600" b="0" u="none" strike="noStrike">
-              <a:solidFill>
-                <a:schemeClr val="dk1"/>
-              </a:solidFill>
-              <a:effectLst/>
-              <a:uFillTx/>
-              <a:latin typeface="Rubik"/>
-            </a:endParaRPr>
           </a:p>
           <a:p>
             <a:pPr marL="685800" lvl="1" indent="-228600" algn="l" defTabSz="914040">
@@ -16521,14 +16781,6 @@
               </a:rPr>
               <a:t>für Kommentare oder Tests auch länger möglich</a:t>
             </a:r>
-            <a:endParaRPr lang="de-DE" sz="1600" b="0" u="none" strike="noStrike">
-              <a:solidFill>
-                <a:schemeClr val="dk1"/>
-              </a:solidFill>
-              <a:effectLst/>
-              <a:uFillTx/>
-              <a:latin typeface="Rubik"/>
-            </a:endParaRPr>
           </a:p>
           <a:p>
             <a:pPr marL="352440" indent="-342720" algn="l" defTabSz="914040">
@@ -16540,7 +16792,7 @@
               </a:spcBef>
               <a:buSzPct val="100000"/>
               <a:buBlip>
-                <a:blip r:embed="rId3"/>
+                <a:blip r:embed="rId2"/>
               </a:buBlip>
               <a:tabLst>
                 <a:tab pos="0" algn="l"/>
@@ -16568,14 +16820,6 @@
               </a:rPr>
               <a:t> Trenne Klassen und Funktionen zur besseren Übersicht</a:t>
             </a:r>
-            <a:endParaRPr lang="de-DE" sz="1600" b="0" u="none" strike="noStrike">
-              <a:solidFill>
-                <a:schemeClr val="dk1"/>
-              </a:solidFill>
-              <a:effectLst/>
-              <a:uFillTx/>
-              <a:latin typeface="Rubik"/>
-            </a:endParaRPr>
           </a:p>
           <a:p>
             <a:pPr marL="352440" indent="-342720" algn="l" defTabSz="914040">
@@ -16587,7 +16831,7 @@
               </a:spcBef>
               <a:buSzPct val="100000"/>
               <a:buBlip>
-                <a:blip r:embed="rId4"/>
+                <a:blip r:embed="rId2"/>
               </a:buBlip>
               <a:tabLst>
                 <a:tab pos="0" algn="l"/>
@@ -16615,14 +16859,6 @@
               </a:rPr>
               <a:t>Gesammelt zu Beginn des Notebooks/Skripts</a:t>
             </a:r>
-            <a:endParaRPr lang="de-DE" sz="1600" b="0" u="none" strike="noStrike">
-              <a:solidFill>
-                <a:schemeClr val="dk1"/>
-              </a:solidFill>
-              <a:effectLst/>
-              <a:uFillTx/>
-              <a:latin typeface="Rubik"/>
-            </a:endParaRPr>
           </a:p>
           <a:p>
             <a:pPr marL="685800" lvl="1" indent="-228600" algn="l" defTabSz="914040">
@@ -16652,14 +16888,6 @@
               </a:rPr>
               <a:t>Erst Standardbibliothek, dann externe Pakete, dann lokale Importe</a:t>
             </a:r>
-            <a:endParaRPr lang="de-DE" sz="1600" b="0" u="none" strike="noStrike">
-              <a:solidFill>
-                <a:schemeClr val="dk1"/>
-              </a:solidFill>
-              <a:effectLst/>
-              <a:uFillTx/>
-              <a:latin typeface="Rubik"/>
-            </a:endParaRPr>
           </a:p>
           <a:p>
             <a:pPr marL="352440" indent="-342720" algn="l" defTabSz="914040">
@@ -16671,7 +16899,7 @@
               </a:spcBef>
               <a:buSzPct val="100000"/>
               <a:buBlip>
-                <a:blip r:embed="rId5"/>
+                <a:blip r:embed="rId3"/>
               </a:buBlip>
               <a:tabLst>
                 <a:tab pos="0" algn="l"/>
@@ -16699,14 +16927,6 @@
               </a:rPr>
               <a:t> </a:t>
             </a:r>
-            <a:endParaRPr lang="de-DE" sz="1600" b="0" u="none" strike="noStrike">
-              <a:solidFill>
-                <a:schemeClr val="dk1"/>
-              </a:solidFill>
-              <a:effectLst/>
-              <a:uFillTx/>
-              <a:latin typeface="Rubik"/>
-            </a:endParaRPr>
           </a:p>
           <a:p>
             <a:pPr marL="685800" lvl="1" indent="-228600" algn="l" defTabSz="914040">
@@ -16868,7 +17088,7 @@
               </a:spcBef>
               <a:buSzPct val="100000"/>
               <a:buBlip>
-                <a:blip r:embed="rId6"/>
+                <a:blip r:embed="rId3"/>
               </a:buBlip>
               <a:tabLst>
                 <a:tab pos="0" algn="l"/>
@@ -17058,6 +17278,7 @@
           <a:bodyPr lIns="288000" tIns="36000" rIns="288000" bIns="36000" anchor="t">
             <a:noAutofit/>
           </a:bodyPr>
+          <a:lstStyle/>
           <a:p>
             <a:pPr algn="ctr" defTabSz="457200">
               <a:lnSpc>
@@ -17076,7 +17297,7 @@
                 <a:uFillTx/>
                 <a:latin typeface="Rubik"/>
                 <a:ea typeface="Source Sans Pro Light"/>
-                <a:hlinkClick r:id="rId7"/>
+                <a:hlinkClick r:id="rId4"/>
               </a:rPr>
               <a:t>Link zum vollständigen Style-Guide</a:t>
             </a:r>
@@ -17093,19 +17314,14 @@
       </p:sp>
     </p:spTree>
   </p:cSld>
-  <mc:AlternateContent>
-    <mc:Choice Requires="p14">
-      <p:transition spd="slow" p14:dur="2000"/>
-    </mc:Choice>
-    <mc:Fallback>
-      <p:transition spd="slow"/>
-    </mc:Fallback>
-  </mc:AlternateContent>
+  <p:clrMapOvr>
+    <a:masterClrMapping/>
+  </p:clrMapOvr>
 </p:sld>
 </file>
 
 <file path=ppt/slides/slide15.xml><?xml version="1.0" encoding="utf-8"?>
-<p:sld xmlns:a="http://schemas.openxmlformats.org/drawingml/2006/main" xmlns:p="http://schemas.openxmlformats.org/presentationml/2006/main" xmlns:r="http://schemas.openxmlformats.org/officeDocument/2006/relationships" xmlns:p14="http://schemas.microsoft.com/office/powerpoint/2010/main" xmlns:p15="http://schemas.microsoft.com/office/powerpoint/2012/main" xmlns:mc="http://schemas.openxmlformats.org/markup-compatibility/2006">
+<p:sld xmlns:a="http://schemas.openxmlformats.org/drawingml/2006/main" xmlns:r="http://schemas.openxmlformats.org/officeDocument/2006/relationships" xmlns:p="http://schemas.openxmlformats.org/presentationml/2006/main">
   <p:cSld>
     <p:spTree>
       <p:nvGrpSpPr>
@@ -17148,6 +17364,7 @@
           <a:bodyPr lIns="90000" tIns="45000" rIns="90000" bIns="45000" anchor="t">
             <a:noAutofit/>
           </a:bodyPr>
+          <a:lstStyle/>
           <a:p>
             <a:pPr indent="0" algn="l" defTabSz="914040">
               <a:lnSpc>
@@ -17232,6 +17449,7 @@
           <a:bodyPr lIns="90000" tIns="45000" rIns="90000" bIns="45000" anchor="t">
             <a:noAutofit/>
           </a:bodyPr>
+          <a:lstStyle/>
           <a:p>
             <a:pPr indent="0" algn="ctr" defTabSz="914040">
               <a:lnSpc>
@@ -17287,21 +17505,28 @@
             <a:noFill/>
           </a:ln>
           <a:effectLst>
-            <a:outerShdw algn="tl" dir="2700000" dist="88586" rotWithShape="0">
+            <a:outerShdw dist="88586" dir="2700000" algn="tl" rotWithShape="0">
               <a:srgbClr val="140046"/>
             </a:outerShdw>
           </a:effectLst>
         </p:spPr>
         <p:style>
-          <a:lnRef idx="0"/>
-          <a:fillRef idx="0"/>
-          <a:effectRef idx="0"/>
+          <a:lnRef idx="0">
+            <a:scrgbClr r="0" g="0" b="0"/>
+          </a:lnRef>
+          <a:fillRef idx="0">
+            <a:scrgbClr r="0" g="0" b="0"/>
+          </a:fillRef>
+          <a:effectRef idx="0">
+            <a:scrgbClr r="0" g="0" b="0"/>
+          </a:effectRef>
           <a:fontRef idx="minor"/>
         </p:style>
         <p:txBody>
           <a:bodyPr lIns="288000" tIns="108000" rIns="288000" bIns="180000" anchor="ctr">
             <a:noAutofit/>
           </a:bodyPr>
+          <a:lstStyle/>
           <a:p>
             <a:pPr algn="ctr" defTabSz="914400">
               <a:lnSpc>
@@ -17356,21 +17581,28 @@
             <a:noFill/>
           </a:ln>
           <a:effectLst>
-            <a:outerShdw algn="tl" dir="2700000" dist="88586" rotWithShape="0">
+            <a:outerShdw dist="88586" dir="2700000" algn="tl" rotWithShape="0">
               <a:srgbClr val="140046"/>
             </a:outerShdw>
           </a:effectLst>
         </p:spPr>
         <p:style>
-          <a:lnRef idx="0"/>
-          <a:fillRef idx="0"/>
-          <a:effectRef idx="0"/>
+          <a:lnRef idx="0">
+            <a:scrgbClr r="0" g="0" b="0"/>
+          </a:lnRef>
+          <a:fillRef idx="0">
+            <a:scrgbClr r="0" g="0" b="0"/>
+          </a:fillRef>
+          <a:effectRef idx="0">
+            <a:scrgbClr r="0" g="0" b="0"/>
+          </a:effectRef>
           <a:fontRef idx="minor"/>
         </p:style>
         <p:txBody>
           <a:bodyPr lIns="288000" tIns="108000" rIns="288000" bIns="180000" anchor="ctr">
             <a:noAutofit/>
           </a:bodyPr>
+          <a:lstStyle/>
           <a:p>
             <a:pPr algn="ctr" defTabSz="914400">
               <a:lnSpc>
@@ -17409,8 +17641,8 @@
           <p:nvPr/>
         </p:nvPicPr>
         <p:blipFill>
-          <a:blip r:embed="rId1"/>
-          <a:srcRect l="374" t="0" r="0" b="0"/>
+          <a:blip r:embed="rId2"/>
+          <a:srcRect l="374"/>
           <a:stretch/>
         </p:blipFill>
         <p:spPr>
@@ -17434,7 +17666,7 @@
           <p:nvPr/>
         </p:nvPicPr>
         <p:blipFill>
-          <a:blip r:embed="rId2"/>
+          <a:blip r:embed="rId3"/>
           <a:stretch/>
         </p:blipFill>
         <p:spPr>
@@ -17453,19 +17685,14 @@
       </p:pic>
     </p:spTree>
   </p:cSld>
-  <mc:AlternateContent>
-    <mc:Choice Requires="p14">
-      <p:transition spd="slow" p14:dur="2000"/>
-    </mc:Choice>
-    <mc:Fallback>
-      <p:transition spd="slow"/>
-    </mc:Fallback>
-  </mc:AlternateContent>
+  <p:clrMapOvr>
+    <a:masterClrMapping/>
+  </p:clrMapOvr>
 </p:sld>
 </file>
 
 <file path=ppt/slides/slide16.xml><?xml version="1.0" encoding="utf-8"?>
-<p:sld xmlns:a="http://schemas.openxmlformats.org/drawingml/2006/main" xmlns:p="http://schemas.openxmlformats.org/presentationml/2006/main" xmlns:r="http://schemas.openxmlformats.org/officeDocument/2006/relationships" xmlns:p14="http://schemas.microsoft.com/office/powerpoint/2010/main" xmlns:p15="http://schemas.microsoft.com/office/powerpoint/2012/main" xmlns:mc="http://schemas.openxmlformats.org/markup-compatibility/2006">
+<p:sld xmlns:a="http://schemas.openxmlformats.org/drawingml/2006/main" xmlns:r="http://schemas.openxmlformats.org/officeDocument/2006/relationships" xmlns:p="http://schemas.openxmlformats.org/presentationml/2006/main">
   <p:cSld>
     <p:spTree>
       <p:nvGrpSpPr>
@@ -17508,6 +17735,7 @@
           <a:bodyPr lIns="90000" tIns="45000" rIns="90000" bIns="45000" anchor="t">
             <a:noAutofit/>
           </a:bodyPr>
+          <a:lstStyle/>
           <a:p>
             <a:pPr indent="0" algn="l" defTabSz="914040">
               <a:lnSpc>
@@ -17592,6 +17820,7 @@
           <a:bodyPr lIns="90000" tIns="45000" rIns="90000" bIns="45000" anchor="t">
             <a:noAutofit/>
           </a:bodyPr>
+          <a:lstStyle/>
           <a:p>
             <a:pPr indent="0" algn="ctr" defTabSz="914040">
               <a:lnSpc>
@@ -17651,6 +17880,7 @@
           <a:bodyPr lIns="90000" tIns="45000" rIns="90000" bIns="45000" anchor="t">
             <a:noAutofit/>
           </a:bodyPr>
+          <a:lstStyle/>
           <a:p>
             <a:pPr marL="352440" indent="-342720" algn="l" defTabSz="914040">
               <a:lnSpc>
@@ -17661,7 +17891,7 @@
               </a:spcBef>
               <a:buSzPct val="100000"/>
               <a:buBlip>
-                <a:blip r:embed="rId1"/>
+                <a:blip r:embed="rId2"/>
               </a:buBlip>
               <a:tabLst>
                 <a:tab pos="0" algn="l"/>
@@ -17676,16 +17906,8 @@
                 <a:uFillTx/>
                 <a:latin typeface="Rubik"/>
               </a:rPr>
-              <a:t>Im nächsten Teil der Live-Session arbeiten wir praktisch:</a:t>
-            </a:r>
-            <a:endParaRPr lang="de-DE" sz="2800" b="0" u="none" strike="noStrike">
-              <a:solidFill>
-                <a:schemeClr val="dk1"/>
-              </a:solidFill>
-              <a:effectLst/>
-              <a:uFillTx/>
-              <a:latin typeface="Rubik"/>
-            </a:endParaRPr>
+              <a:t>Nun arbeiten wir praktisch:</a:t>
+            </a:r>
           </a:p>
           <a:p>
             <a:pPr marL="685800" lvl="1" indent="-228600" algn="l" defTabSz="914040">
@@ -17737,14 +17959,6 @@
               </a:rPr>
               <a:t>“ und Stilbrüchen in einem gewachsenen Auswertungsskript für Verkaufsdaten</a:t>
             </a:r>
-            <a:endParaRPr lang="de-DE" sz="2400" b="0" u="none" strike="noStrike">
-              <a:solidFill>
-                <a:schemeClr val="dk1"/>
-              </a:solidFill>
-              <a:effectLst/>
-              <a:uFillTx/>
-              <a:latin typeface="Rubik"/>
-            </a:endParaRPr>
           </a:p>
           <a:p>
             <a:pPr marL="685800" lvl="1" indent="-228600" algn="l" defTabSz="914040">
@@ -17796,14 +18010,6 @@
               </a:rPr>
               <a:t> für bessere Lesbarkeit und klare Verantwortlichkeiten</a:t>
             </a:r>
-            <a:endParaRPr lang="de-DE" sz="2400" b="0" u="none" strike="noStrike">
-              <a:solidFill>
-                <a:schemeClr val="dk1"/>
-              </a:solidFill>
-              <a:effectLst/>
-              <a:uFillTx/>
-              <a:latin typeface="Rubik"/>
-            </a:endParaRPr>
           </a:p>
           <a:p>
             <a:pPr marL="685800" lvl="1" indent="-228600" algn="l" defTabSz="914040">
@@ -17855,14 +18061,6 @@
               </a:rPr>
               <a:t> für professionelle, einheitliche Struktur</a:t>
             </a:r>
-            <a:endParaRPr lang="de-DE" sz="2400" b="0" u="none" strike="noStrike">
-              <a:solidFill>
-                <a:schemeClr val="dk1"/>
-              </a:solidFill>
-              <a:effectLst/>
-              <a:uFillTx/>
-              <a:latin typeface="Rubik"/>
-            </a:endParaRPr>
           </a:p>
           <a:p>
             <a:pPr marL="685800" lvl="1" indent="-228600" algn="l" defTabSz="914040">
@@ -17903,14 +18101,6 @@
               </a:rPr>
               <a:t> Aus „Hauptsache es läuft“-Code machen wir „Darauf bin ich stolz“-Code!</a:t>
             </a:r>
-            <a:endParaRPr lang="de-DE" sz="2400" b="0" u="none" strike="noStrike">
-              <a:solidFill>
-                <a:schemeClr val="dk1"/>
-              </a:solidFill>
-              <a:effectLst/>
-              <a:uFillTx/>
-              <a:latin typeface="Rubik"/>
-            </a:endParaRPr>
           </a:p>
           <a:p>
             <a:pPr indent="0" algn="l" defTabSz="914040">
@@ -17938,19 +18128,14 @@
       </p:sp>
     </p:spTree>
   </p:cSld>
-  <mc:AlternateContent>
-    <mc:Choice Requires="p14">
-      <p:transition spd="slow" p14:dur="2000"/>
-    </mc:Choice>
-    <mc:Fallback>
-      <p:transition spd="slow"/>
-    </mc:Fallback>
-  </mc:AlternateContent>
+  <p:clrMapOvr>
+    <a:masterClrMapping/>
+  </p:clrMapOvr>
 </p:sld>
 </file>
 
 <file path=ppt/slides/slide2.xml><?xml version="1.0" encoding="utf-8"?>
-<p:sld xmlns:a="http://schemas.openxmlformats.org/drawingml/2006/main" xmlns:p="http://schemas.openxmlformats.org/presentationml/2006/main" xmlns:r="http://schemas.openxmlformats.org/officeDocument/2006/relationships" xmlns:p14="http://schemas.microsoft.com/office/powerpoint/2010/main" xmlns:p15="http://schemas.microsoft.com/office/powerpoint/2012/main" xmlns:mc="http://schemas.openxmlformats.org/markup-compatibility/2006">
+<p:sld xmlns:a="http://schemas.openxmlformats.org/drawingml/2006/main" xmlns:r="http://schemas.openxmlformats.org/officeDocument/2006/relationships" xmlns:p="http://schemas.openxmlformats.org/presentationml/2006/main">
   <p:cSld>
     <p:spTree>
       <p:nvGrpSpPr>
@@ -17993,6 +18178,7 @@
           <a:bodyPr lIns="90000" tIns="45000" rIns="90000" bIns="45000" anchor="t">
             <a:noAutofit/>
           </a:bodyPr>
+          <a:lstStyle/>
           <a:p>
             <a:pPr indent="0" algn="l" defTabSz="914040">
               <a:lnSpc>
@@ -18048,15 +18234,22 @@
           </a:ln>
         </p:spPr>
         <p:style>
-          <a:lnRef idx="0"/>
-          <a:fillRef idx="0"/>
-          <a:effectRef idx="0"/>
+          <a:lnRef idx="0">
+            <a:scrgbClr r="0" g="0" b="0"/>
+          </a:lnRef>
+          <a:fillRef idx="0">
+            <a:scrgbClr r="0" g="0" b="0"/>
+          </a:fillRef>
+          <a:effectRef idx="0">
+            <a:scrgbClr r="0" g="0" b="0"/>
+          </a:effectRef>
           <a:fontRef idx="minor"/>
         </p:style>
         <p:txBody>
           <a:bodyPr lIns="90000" tIns="45000" rIns="90000" bIns="45000" anchor="t">
             <a:spAutoFit/>
           </a:bodyPr>
+          <a:lstStyle/>
           <a:p>
             <a:pPr defTabSz="457200">
               <a:lnSpc>
@@ -18159,7 +18352,7 @@
                 <a:effectLst/>
                 <a:uFillTx/>
                 <a:latin typeface="Rubik"/>
-                <a:hlinkClick r:id="rId1"/>
+                <a:hlinkClick r:id="rId2"/>
               </a:rPr>
               <a:t>Software-Entwicklung</a:t>
             </a:r>
@@ -18182,7 +18375,7 @@
                 <a:effectLst/>
                 <a:uFillTx/>
                 <a:latin typeface="Rubik"/>
-                <a:hlinkClick r:id="rId2"/>
+                <a:hlinkClick r:id="rId3"/>
               </a:rPr>
               <a:t>Quelltexten</a:t>
             </a:r>
@@ -18246,7 +18439,7 @@
                 <a:effectLst/>
                 <a:uFillTx/>
                 <a:latin typeface="Rubik"/>
-                <a:hlinkClick r:id="rId3"/>
+                <a:hlinkClick r:id="rId4"/>
               </a:rPr>
               <a:t>Lesbarkeit</a:t>
             </a:r>
@@ -18269,7 +18462,7 @@
                 <a:effectLst/>
                 <a:uFillTx/>
                 <a:latin typeface="Rubik"/>
-                <a:hlinkClick r:id="rId4"/>
+                <a:hlinkClick r:id="rId5"/>
               </a:rPr>
               <a:t>Wartbarkeit</a:t>
             </a:r>
@@ -18292,7 +18485,7 @@
                 <a:effectLst/>
                 <a:uFillTx/>
                 <a:latin typeface="Rubik"/>
-                <a:hlinkClick r:id="rId5"/>
+                <a:hlinkClick r:id="rId6"/>
               </a:rPr>
               <a:t>Fehleranalyse</a:t>
             </a:r>
@@ -18356,7 +18549,7 @@
                 <a:effectLst/>
                 <a:uFillTx/>
                 <a:latin typeface="Rubik"/>
-                <a:hlinkClick r:id="rId6"/>
+                <a:hlinkClick r:id="rId7"/>
               </a:rPr>
               <a:t>https://de.wikipedia.org/wiki/Refactoring</a:t>
             </a:r>
@@ -18384,19 +18577,14 @@
       </p:sp>
     </p:spTree>
   </p:cSld>
-  <mc:AlternateContent>
-    <mc:Choice Requires="p14">
-      <p:transition spd="slow" p14:dur="2000"/>
-    </mc:Choice>
-    <mc:Fallback>
-      <p:transition spd="slow"/>
-    </mc:Fallback>
-  </mc:AlternateContent>
+  <p:clrMapOvr>
+    <a:masterClrMapping/>
+  </p:clrMapOvr>
 </p:sld>
 </file>
 
 <file path=ppt/slides/slide3.xml><?xml version="1.0" encoding="utf-8"?>
-<p:sld xmlns:a="http://schemas.openxmlformats.org/drawingml/2006/main" xmlns:p="http://schemas.openxmlformats.org/presentationml/2006/main" xmlns:r="http://schemas.openxmlformats.org/officeDocument/2006/relationships" xmlns:p14="http://schemas.microsoft.com/office/powerpoint/2010/main" xmlns:p15="http://schemas.microsoft.com/office/powerpoint/2012/main" xmlns:mc="http://schemas.openxmlformats.org/markup-compatibility/2006">
+<p:sld xmlns:a="http://schemas.openxmlformats.org/drawingml/2006/main" xmlns:r="http://schemas.openxmlformats.org/officeDocument/2006/relationships" xmlns:p="http://schemas.openxmlformats.org/presentationml/2006/main">
   <p:cSld>
     <p:spTree>
       <p:nvGrpSpPr>
@@ -18439,6 +18627,7 @@
           <a:bodyPr lIns="0" tIns="45000" rIns="90000" bIns="45000" anchor="t">
             <a:noAutofit/>
           </a:bodyPr>
+          <a:lstStyle/>
           <a:p>
             <a:pPr indent="0" algn="l" defTabSz="914040">
               <a:lnSpc>
@@ -18498,6 +18687,7 @@
           <a:bodyPr lIns="0" tIns="45000" rIns="90000" bIns="45000" anchor="b">
             <a:noAutofit/>
           </a:bodyPr>
+          <a:lstStyle/>
           <a:p>
             <a:pPr indent="0" algn="l" defTabSz="914040">
               <a:lnSpc>
@@ -18532,19 +18722,14 @@
       </p:sp>
     </p:spTree>
   </p:cSld>
-  <mc:AlternateContent>
-    <mc:Choice Requires="p14">
-      <p:transition spd="slow" p14:dur="2000"/>
-    </mc:Choice>
-    <mc:Fallback>
-      <p:transition spd="slow"/>
-    </mc:Fallback>
-  </mc:AlternateContent>
+  <p:clrMapOvr>
+    <a:masterClrMapping/>
+  </p:clrMapOvr>
 </p:sld>
 </file>
 
 <file path=ppt/slides/slide4.xml><?xml version="1.0" encoding="utf-8"?>
-<p:sld xmlns:a="http://schemas.openxmlformats.org/drawingml/2006/main" xmlns:p="http://schemas.openxmlformats.org/presentationml/2006/main" xmlns:r="http://schemas.openxmlformats.org/officeDocument/2006/relationships" xmlns:p14="http://schemas.microsoft.com/office/powerpoint/2010/main" xmlns:p15="http://schemas.microsoft.com/office/powerpoint/2012/main" xmlns:mc="http://schemas.openxmlformats.org/markup-compatibility/2006">
+<p:sld xmlns:a="http://schemas.openxmlformats.org/drawingml/2006/main" xmlns:r="http://schemas.openxmlformats.org/officeDocument/2006/relationships" xmlns:p="http://schemas.openxmlformats.org/presentationml/2006/main">
   <p:cSld>
     <p:spTree>
       <p:nvGrpSpPr>
@@ -18587,6 +18772,7 @@
           <a:bodyPr lIns="90000" tIns="45000" rIns="90000" bIns="45000" anchor="t">
             <a:noAutofit/>
           </a:bodyPr>
+          <a:lstStyle/>
           <a:p>
             <a:pPr indent="0" algn="l" defTabSz="914040">
               <a:lnSpc>
@@ -18671,6 +18857,7 @@
           <a:bodyPr lIns="90000" tIns="45000" rIns="90000" bIns="45000" anchor="t">
             <a:noAutofit/>
           </a:bodyPr>
+          <a:lstStyle/>
           <a:p>
             <a:pPr indent="0" algn="ctr" defTabSz="914040">
               <a:lnSpc>
@@ -18730,42 +18917,7 @@
           <a:bodyPr lIns="90000" tIns="45000" rIns="90000" bIns="45000" anchor="t">
             <a:noAutofit/>
           </a:bodyPr>
-          <a:p>
-            <a:pPr marL="352440" indent="-342720" algn="l" defTabSz="914040">
-              <a:lnSpc>
-                <a:spcPct val="100000"/>
-              </a:lnSpc>
-              <a:spcBef>
-                <a:spcPts val="1001"/>
-              </a:spcBef>
-              <a:buSzPct val="100000"/>
-              <a:buBlip>
-                <a:blip r:embed="rId1"/>
-              </a:buBlip>
-              <a:tabLst>
-                <a:tab pos="0" algn="l"/>
-              </a:tabLst>
-            </a:pPr>
-            <a:r>
-              <a:rPr lang="de-DE" sz="2400" b="1" u="none" strike="noStrike">
-                <a:solidFill>
-                  <a:schemeClr val="dk1"/>
-                </a:solidFill>
-                <a:effectLst/>
-                <a:uFillTx/>
-                <a:latin typeface="Rubik"/>
-              </a:rPr>
-              <a:t>Fehler lassen sich schneller finden und beheben</a:t>
-            </a:r>
-            <a:endParaRPr lang="de-DE" sz="2400" b="0" u="none" strike="noStrike">
-              <a:solidFill>
-                <a:schemeClr val="dk1"/>
-              </a:solidFill>
-              <a:effectLst/>
-              <a:uFillTx/>
-              <a:latin typeface="Rubik"/>
-            </a:endParaRPr>
-          </a:p>
+          <a:lstStyle/>
           <a:p>
             <a:pPr marL="352440" indent="-342720" algn="l" defTabSz="914040">
               <a:lnSpc>
@@ -18791,6 +18943,42 @@
                 <a:uFillTx/>
                 <a:latin typeface="Rubik"/>
               </a:rPr>
+              <a:t>Fehler lassen sich schneller finden und beheben</a:t>
+            </a:r>
+            <a:endParaRPr lang="de-DE" sz="2400" b="0" u="none" strike="noStrike">
+              <a:solidFill>
+                <a:schemeClr val="dk1"/>
+              </a:solidFill>
+              <a:effectLst/>
+              <a:uFillTx/>
+              <a:latin typeface="Rubik"/>
+            </a:endParaRPr>
+          </a:p>
+          <a:p>
+            <a:pPr marL="352440" indent="-342720" algn="l" defTabSz="914040">
+              <a:lnSpc>
+                <a:spcPct val="100000"/>
+              </a:lnSpc>
+              <a:spcBef>
+                <a:spcPts val="1001"/>
+              </a:spcBef>
+              <a:buSzPct val="100000"/>
+              <a:buBlip>
+                <a:blip r:embed="rId2"/>
+              </a:buBlip>
+              <a:tabLst>
+                <a:tab pos="0" algn="l"/>
+              </a:tabLst>
+            </a:pPr>
+            <a:r>
+              <a:rPr lang="de-DE" sz="2400" b="1" u="none" strike="noStrike">
+                <a:solidFill>
+                  <a:schemeClr val="dk1"/>
+                </a:solidFill>
+                <a:effectLst/>
+                <a:uFillTx/>
+                <a:latin typeface="Rubik"/>
+              </a:rPr>
               <a:t>Bessere Zusammenarbeit im Team:</a:t>
             </a:r>
             <a:br>
@@ -18807,14 +18995,6 @@
               </a:rPr>
               <a:t>Einheitliche und lesbare Struktur erspart allen Zeit, besonders wenn mehrere an einem Projekt arbeiten.</a:t>
             </a:r>
-            <a:endParaRPr lang="de-DE" sz="2400" b="0" u="none" strike="noStrike">
-              <a:solidFill>
-                <a:schemeClr val="dk1"/>
-              </a:solidFill>
-              <a:effectLst/>
-              <a:uFillTx/>
-              <a:latin typeface="Rubik"/>
-            </a:endParaRPr>
           </a:p>
           <a:p>
             <a:pPr marL="352440" indent="-342720" algn="l" defTabSz="914040">
@@ -18826,7 +19006,7 @@
               </a:spcBef>
               <a:buSzPct val="100000"/>
               <a:buBlip>
-                <a:blip r:embed="rId3"/>
+                <a:blip r:embed="rId2"/>
               </a:buBlip>
               <a:tabLst>
                 <a:tab pos="0" algn="l"/>
@@ -18857,14 +19037,6 @@
               </a:rPr>
               <a:t>Kann später leichter neue Funktionen einbauen, ohne gleich alles neu machen zu müssen.</a:t>
             </a:r>
-            <a:endParaRPr lang="de-DE" sz="2400" b="0" u="none" strike="noStrike">
-              <a:solidFill>
-                <a:schemeClr val="dk1"/>
-              </a:solidFill>
-              <a:effectLst/>
-              <a:uFillTx/>
-              <a:latin typeface="Rubik"/>
-            </a:endParaRPr>
           </a:p>
           <a:p>
             <a:pPr marL="352440" indent="-342720" algn="l" defTabSz="914040">
@@ -18876,7 +19048,7 @@
               </a:spcBef>
               <a:buSzPct val="100000"/>
               <a:buBlip>
-                <a:blip r:embed="rId4"/>
+                <a:blip r:embed="rId2"/>
               </a:buBlip>
               <a:tabLst>
                 <a:tab pos="0" algn="l"/>
@@ -18907,14 +19079,6 @@
               </a:rPr>
               <a:t>Spätestens beim nächsten Update ist jeder dankbar, wenn der Code nach ein paar Wochen noch verständlich ist.</a:t>
             </a:r>
-            <a:endParaRPr lang="de-DE" sz="2400" b="0" u="none" strike="noStrike">
-              <a:solidFill>
-                <a:schemeClr val="dk1"/>
-              </a:solidFill>
-              <a:effectLst/>
-              <a:uFillTx/>
-              <a:latin typeface="Rubik"/>
-            </a:endParaRPr>
           </a:p>
           <a:p>
             <a:pPr marL="9360" indent="0" algn="l" defTabSz="914040">
@@ -18964,19 +19128,14 @@
       </p:sp>
     </p:spTree>
   </p:cSld>
-  <mc:AlternateContent>
-    <mc:Choice Requires="p14">
-      <p:transition spd="slow" p14:dur="2000"/>
-    </mc:Choice>
-    <mc:Fallback>
-      <p:transition spd="slow"/>
-    </mc:Fallback>
-  </mc:AlternateContent>
+  <p:clrMapOvr>
+    <a:masterClrMapping/>
+  </p:clrMapOvr>
 </p:sld>
 </file>
 
 <file path=ppt/slides/slide5.xml><?xml version="1.0" encoding="utf-8"?>
-<p:sld xmlns:a="http://schemas.openxmlformats.org/drawingml/2006/main" xmlns:p="http://schemas.openxmlformats.org/presentationml/2006/main" xmlns:r="http://schemas.openxmlformats.org/officeDocument/2006/relationships" xmlns:p14="http://schemas.microsoft.com/office/powerpoint/2010/main" xmlns:p15="http://schemas.microsoft.com/office/powerpoint/2012/main" xmlns:mc="http://schemas.openxmlformats.org/markup-compatibility/2006">
+<p:sld xmlns:a="http://schemas.openxmlformats.org/drawingml/2006/main" xmlns:r="http://schemas.openxmlformats.org/officeDocument/2006/relationships" xmlns:p="http://schemas.openxmlformats.org/presentationml/2006/main">
   <p:cSld>
     <p:spTree>
       <p:nvGrpSpPr>
@@ -19019,6 +19178,7 @@
           <a:bodyPr lIns="90000" tIns="45000" rIns="90000" bIns="45000" anchor="t">
             <a:noAutofit/>
           </a:bodyPr>
+          <a:lstStyle/>
           <a:p>
             <a:pPr indent="0" algn="l" defTabSz="914040">
               <a:lnSpc>
@@ -19103,6 +19263,7 @@
           <a:bodyPr lIns="90000" tIns="45000" rIns="90000" bIns="45000" anchor="t">
             <a:noAutofit/>
           </a:bodyPr>
+          <a:lstStyle/>
           <a:p>
             <a:pPr indent="0" algn="l" defTabSz="914040">
               <a:lnSpc>
@@ -19162,6 +19323,7 @@
           <a:bodyPr lIns="90000" tIns="45000" rIns="90000" bIns="45000" anchor="t">
             <a:noAutofit/>
           </a:bodyPr>
+          <a:lstStyle/>
           <a:p>
             <a:pPr marL="228600" indent="-228600" algn="l" defTabSz="914040">
               <a:lnSpc>
@@ -19172,7 +19334,7 @@
               </a:spcBef>
               <a:buSzPct val="100000"/>
               <a:buBlip>
-                <a:blip r:embed="rId1"/>
+                <a:blip r:embed="rId2"/>
               </a:buBlip>
               <a:tabLst>
                 <a:tab pos="0" algn="l"/>
@@ -19377,7 +19539,7 @@
               </a:spcBef>
               <a:buSzPct val="100000"/>
               <a:buBlip>
-                <a:blip r:embed="rId3"/>
+                <a:blip r:embed="rId2"/>
               </a:buBlip>
               <a:tabLst>
                 <a:tab pos="0" algn="l"/>
@@ -19436,15 +19598,22 @@
           </a:ln>
         </p:spPr>
         <p:style>
-          <a:lnRef idx="0"/>
-          <a:fillRef idx="0"/>
-          <a:effectRef idx="0"/>
+          <a:lnRef idx="0">
+            <a:scrgbClr r="0" g="0" b="0"/>
+          </a:lnRef>
+          <a:fillRef idx="0">
+            <a:scrgbClr r="0" g="0" b="0"/>
+          </a:fillRef>
+          <a:effectRef idx="0">
+            <a:scrgbClr r="0" g="0" b="0"/>
+          </a:effectRef>
           <a:fontRef idx="minor"/>
         </p:style>
         <p:txBody>
           <a:bodyPr lIns="90000" tIns="45000" rIns="90000" bIns="45000" anchor="t">
             <a:spAutoFit/>
           </a:bodyPr>
+          <a:lstStyle/>
           <a:p>
             <a:pPr defTabSz="457200">
               <a:lnSpc>
@@ -19470,7 +19639,7 @@
                 <a:effectLst/>
                 <a:uFillTx/>
                 <a:latin typeface="Calibri"/>
-                <a:hlinkClick r:id="rId4"/>
+                <a:hlinkClick r:id="rId3"/>
               </a:rPr>
               <a:t>stepsize.com</a:t>
             </a:r>
@@ -19492,7 +19661,7 @@
           <p:nvPr/>
         </p:nvPicPr>
         <p:blipFill>
-          <a:blip r:embed="rId5"/>
+          <a:blip r:embed="rId4"/>
           <a:stretch/>
         </p:blipFill>
         <p:spPr>
@@ -19511,19 +19680,14 @@
       </p:pic>
     </p:spTree>
   </p:cSld>
-  <mc:AlternateContent>
-    <mc:Choice Requires="p14">
-      <p:transition spd="slow" p14:dur="2000"/>
-    </mc:Choice>
-    <mc:Fallback>
-      <p:transition spd="slow"/>
-    </mc:Fallback>
-  </mc:AlternateContent>
+  <p:clrMapOvr>
+    <a:masterClrMapping/>
+  </p:clrMapOvr>
 </p:sld>
 </file>
 
 <file path=ppt/slides/slide6.xml><?xml version="1.0" encoding="utf-8"?>
-<p:sld xmlns:a="http://schemas.openxmlformats.org/drawingml/2006/main" xmlns:p="http://schemas.openxmlformats.org/presentationml/2006/main" xmlns:r="http://schemas.openxmlformats.org/officeDocument/2006/relationships" xmlns:p14="http://schemas.microsoft.com/office/powerpoint/2010/main" xmlns:p15="http://schemas.microsoft.com/office/powerpoint/2012/main" xmlns:mc="http://schemas.openxmlformats.org/markup-compatibility/2006">
+<p:sld xmlns:a="http://schemas.openxmlformats.org/drawingml/2006/main" xmlns:r="http://schemas.openxmlformats.org/officeDocument/2006/relationships" xmlns:p="http://schemas.openxmlformats.org/presentationml/2006/main">
   <p:cSld>
     <p:spTree>
       <p:nvGrpSpPr>
@@ -19566,6 +19730,7 @@
           <a:bodyPr lIns="90000" tIns="45000" rIns="90000" bIns="45000" anchor="t">
             <a:noAutofit/>
           </a:bodyPr>
+          <a:lstStyle/>
           <a:p>
             <a:pPr indent="0" algn="l" defTabSz="914040">
               <a:lnSpc>
@@ -19650,6 +19815,7 @@
           <a:bodyPr lIns="90000" tIns="45000" rIns="90000" bIns="45000" anchor="t">
             <a:noAutofit/>
           </a:bodyPr>
+          <a:lstStyle/>
           <a:p>
             <a:pPr indent="0" algn="l" defTabSz="914040">
               <a:lnSpc>
@@ -19709,6 +19875,7 @@
           <a:bodyPr lIns="90000" tIns="45000" rIns="90000" bIns="45000" anchor="t">
             <a:noAutofit/>
           </a:bodyPr>
+          <a:lstStyle/>
           <a:p>
             <a:pPr marL="228600" indent="-228600" algn="l" defTabSz="914040">
               <a:lnSpc>
@@ -19719,7 +19886,7 @@
               </a:spcBef>
               <a:buSzPct val="100000"/>
               <a:buBlip>
-                <a:blip r:embed="rId1"/>
+                <a:blip r:embed="rId2"/>
               </a:buBlip>
               <a:tabLst>
                 <a:tab pos="0" algn="l"/>
@@ -20043,15 +20210,22 @@
           </a:ln>
         </p:spPr>
         <p:style>
-          <a:lnRef idx="0"/>
-          <a:fillRef idx="0"/>
-          <a:effectRef idx="0"/>
+          <a:lnRef idx="0">
+            <a:scrgbClr r="0" g="0" b="0"/>
+          </a:lnRef>
+          <a:fillRef idx="0">
+            <a:scrgbClr r="0" g="0" b="0"/>
+          </a:fillRef>
+          <a:effectRef idx="0">
+            <a:scrgbClr r="0" g="0" b="0"/>
+          </a:effectRef>
           <a:fontRef idx="minor"/>
         </p:style>
         <p:txBody>
           <a:bodyPr lIns="90000" tIns="45000" rIns="90000" bIns="45000" anchor="t">
             <a:spAutoFit/>
           </a:bodyPr>
+          <a:lstStyle/>
           <a:p>
             <a:pPr defTabSz="457200">
               <a:lnSpc>
@@ -20118,19 +20292,14 @@
       </p:pic>
     </p:spTree>
   </p:cSld>
-  <mc:AlternateContent>
-    <mc:Choice Requires="p14">
-      <p:transition spd="slow" p14:dur="2000"/>
-    </mc:Choice>
-    <mc:Fallback>
-      <p:transition spd="slow"/>
-    </mc:Fallback>
-  </mc:AlternateContent>
+  <p:clrMapOvr>
+    <a:masterClrMapping/>
+  </p:clrMapOvr>
 </p:sld>
 </file>
 
 <file path=ppt/slides/slide7.xml><?xml version="1.0" encoding="utf-8"?>
-<p:sld xmlns:a="http://schemas.openxmlformats.org/drawingml/2006/main" xmlns:p="http://schemas.openxmlformats.org/presentationml/2006/main" xmlns:r="http://schemas.openxmlformats.org/officeDocument/2006/relationships" xmlns:p14="http://schemas.microsoft.com/office/powerpoint/2010/main" xmlns:p15="http://schemas.microsoft.com/office/powerpoint/2012/main" xmlns:mc="http://schemas.openxmlformats.org/markup-compatibility/2006">
+<p:sld xmlns:a="http://schemas.openxmlformats.org/drawingml/2006/main" xmlns:r="http://schemas.openxmlformats.org/officeDocument/2006/relationships" xmlns:p="http://schemas.openxmlformats.org/presentationml/2006/main">
   <p:cSld>
     <p:spTree>
       <p:nvGrpSpPr>
@@ -20173,6 +20342,7 @@
           <a:bodyPr lIns="90000" tIns="45000" rIns="90000" bIns="45000" anchor="t">
             <a:noAutofit/>
           </a:bodyPr>
+          <a:lstStyle/>
           <a:p>
             <a:pPr indent="0" algn="l" defTabSz="914040">
               <a:lnSpc>
@@ -20257,6 +20427,7 @@
           <a:bodyPr lIns="90000" tIns="45000" rIns="90000" bIns="45000" anchor="t">
             <a:noAutofit/>
           </a:bodyPr>
+          <a:lstStyle/>
           <a:p>
             <a:pPr indent="0" algn="ctr" defTabSz="914040">
               <a:lnSpc>
@@ -20312,21 +20483,28 @@
             <a:noFill/>
           </a:ln>
           <a:effectLst>
-            <a:outerShdw algn="tl" dir="2700000" dist="88586" rotWithShape="0">
+            <a:outerShdw dist="88586" dir="2700000" algn="tl" rotWithShape="0">
               <a:srgbClr val="140046"/>
             </a:outerShdw>
           </a:effectLst>
         </p:spPr>
         <p:style>
-          <a:lnRef idx="0"/>
-          <a:fillRef idx="0"/>
-          <a:effectRef idx="0"/>
+          <a:lnRef idx="0">
+            <a:scrgbClr r="0" g="0" b="0"/>
+          </a:lnRef>
+          <a:fillRef idx="0">
+            <a:scrgbClr r="0" g="0" b="0"/>
+          </a:fillRef>
+          <a:effectRef idx="0">
+            <a:scrgbClr r="0" g="0" b="0"/>
+          </a:effectRef>
           <a:fontRef idx="minor"/>
         </p:style>
         <p:txBody>
           <a:bodyPr lIns="288000" tIns="108000" rIns="288000" bIns="180000" anchor="ctr">
             <a:noAutofit/>
           </a:bodyPr>
+          <a:lstStyle/>
           <a:p>
             <a:pPr algn="ctr" defTabSz="914400">
               <a:lnSpc>
@@ -20381,21 +20559,28 @@
             <a:noFill/>
           </a:ln>
           <a:effectLst>
-            <a:outerShdw algn="tl" dir="2700000" dist="88586" rotWithShape="0">
+            <a:outerShdw dist="88586" dir="2700000" algn="tl" rotWithShape="0">
               <a:srgbClr val="140046"/>
             </a:outerShdw>
           </a:effectLst>
         </p:spPr>
         <p:style>
-          <a:lnRef idx="0"/>
-          <a:fillRef idx="0"/>
-          <a:effectRef idx="0"/>
+          <a:lnRef idx="0">
+            <a:scrgbClr r="0" g="0" b="0"/>
+          </a:lnRef>
+          <a:fillRef idx="0">
+            <a:scrgbClr r="0" g="0" b="0"/>
+          </a:fillRef>
+          <a:effectRef idx="0">
+            <a:scrgbClr r="0" g="0" b="0"/>
+          </a:effectRef>
           <a:fontRef idx="minor"/>
         </p:style>
         <p:txBody>
           <a:bodyPr lIns="288000" tIns="108000" rIns="288000" bIns="180000" anchor="ctr">
             <a:noAutofit/>
           </a:bodyPr>
+          <a:lstStyle/>
           <a:p>
             <a:pPr algn="ctr" defTabSz="914400">
               <a:lnSpc>
@@ -20434,7 +20619,7 @@
           <p:nvPr/>
         </p:nvPicPr>
         <p:blipFill>
-          <a:blip r:embed="rId1"/>
+          <a:blip r:embed="rId2"/>
           <a:stretch/>
         </p:blipFill>
         <p:spPr>
@@ -20458,8 +20643,8 @@
           <p:nvPr/>
         </p:nvPicPr>
         <p:blipFill>
-          <a:blip r:embed="rId2"/>
-          <a:srcRect l="0" t="0" r="15457" b="0"/>
+          <a:blip r:embed="rId3"/>
+          <a:srcRect r="15457"/>
           <a:stretch/>
         </p:blipFill>
         <p:spPr>
@@ -20478,19 +20663,14 @@
       </p:pic>
     </p:spTree>
   </p:cSld>
-  <mc:AlternateContent>
-    <mc:Choice Requires="p14">
-      <p:transition spd="slow" p14:dur="2000"/>
-    </mc:Choice>
-    <mc:Fallback>
-      <p:transition spd="slow"/>
-    </mc:Fallback>
-  </mc:AlternateContent>
+  <p:clrMapOvr>
+    <a:masterClrMapping/>
+  </p:clrMapOvr>
 </p:sld>
 </file>
 
 <file path=ppt/slides/slide8.xml><?xml version="1.0" encoding="utf-8"?>
-<p:sld xmlns:a="http://schemas.openxmlformats.org/drawingml/2006/main" xmlns:p="http://schemas.openxmlformats.org/presentationml/2006/main" xmlns:r="http://schemas.openxmlformats.org/officeDocument/2006/relationships" xmlns:p14="http://schemas.microsoft.com/office/powerpoint/2010/main" xmlns:p15="http://schemas.microsoft.com/office/powerpoint/2012/main" xmlns:mc="http://schemas.openxmlformats.org/markup-compatibility/2006">
+<p:sld xmlns:a="http://schemas.openxmlformats.org/drawingml/2006/main" xmlns:r="http://schemas.openxmlformats.org/officeDocument/2006/relationships" xmlns:p="http://schemas.openxmlformats.org/presentationml/2006/main">
   <p:cSld>
     <p:spTree>
       <p:nvGrpSpPr>
@@ -20533,6 +20713,7 @@
           <a:bodyPr lIns="90000" tIns="45000" rIns="90000" bIns="45000" anchor="t">
             <a:noAutofit/>
           </a:bodyPr>
+          <a:lstStyle/>
           <a:p>
             <a:pPr indent="0" algn="l" defTabSz="914040">
               <a:lnSpc>
@@ -20617,6 +20798,7 @@
           <a:bodyPr lIns="90000" tIns="45000" rIns="90000" bIns="45000" anchor="t">
             <a:noAutofit/>
           </a:bodyPr>
+          <a:lstStyle/>
           <a:p>
             <a:pPr indent="0" algn="ctr" defTabSz="914040">
               <a:lnSpc>
@@ -20672,21 +20854,28 @@
             <a:noFill/>
           </a:ln>
           <a:effectLst>
-            <a:outerShdw algn="tl" dir="2700000" dist="88586" rotWithShape="0">
+            <a:outerShdw dist="88586" dir="2700000" algn="tl" rotWithShape="0">
               <a:srgbClr val="140046"/>
             </a:outerShdw>
           </a:effectLst>
         </p:spPr>
         <p:style>
-          <a:lnRef idx="0"/>
-          <a:fillRef idx="0"/>
-          <a:effectRef idx="0"/>
+          <a:lnRef idx="0">
+            <a:scrgbClr r="0" g="0" b="0"/>
+          </a:lnRef>
+          <a:fillRef idx="0">
+            <a:scrgbClr r="0" g="0" b="0"/>
+          </a:fillRef>
+          <a:effectRef idx="0">
+            <a:scrgbClr r="0" g="0" b="0"/>
+          </a:effectRef>
           <a:fontRef idx="minor"/>
         </p:style>
         <p:txBody>
           <a:bodyPr lIns="288000" tIns="108000" rIns="288000" bIns="180000" anchor="ctr">
             <a:noAutofit/>
           </a:bodyPr>
+          <a:lstStyle/>
           <a:p>
             <a:pPr algn="ctr" defTabSz="914400">
               <a:lnSpc>
@@ -20741,21 +20930,28 @@
             <a:noFill/>
           </a:ln>
           <a:effectLst>
-            <a:outerShdw algn="tl" dir="2700000" dist="88586" rotWithShape="0">
+            <a:outerShdw dist="88586" dir="2700000" algn="tl" rotWithShape="0">
               <a:srgbClr val="140046"/>
             </a:outerShdw>
           </a:effectLst>
         </p:spPr>
         <p:style>
-          <a:lnRef idx="0"/>
-          <a:fillRef idx="0"/>
-          <a:effectRef idx="0"/>
+          <a:lnRef idx="0">
+            <a:scrgbClr r="0" g="0" b="0"/>
+          </a:lnRef>
+          <a:fillRef idx="0">
+            <a:scrgbClr r="0" g="0" b="0"/>
+          </a:fillRef>
+          <a:effectRef idx="0">
+            <a:scrgbClr r="0" g="0" b="0"/>
+          </a:effectRef>
           <a:fontRef idx="minor"/>
         </p:style>
         <p:txBody>
           <a:bodyPr lIns="288000" tIns="108000" rIns="288000" bIns="180000" anchor="ctr">
             <a:noAutofit/>
           </a:bodyPr>
+          <a:lstStyle/>
           <a:p>
             <a:pPr algn="ctr" defTabSz="914400">
               <a:lnSpc>
@@ -20794,8 +20990,8 @@
           <p:nvPr/>
         </p:nvPicPr>
         <p:blipFill>
-          <a:blip r:embed="rId1"/>
-          <a:srcRect l="0" t="0" r="14847" b="0"/>
+          <a:blip r:embed="rId2"/>
+          <a:srcRect r="14847"/>
           <a:stretch/>
         </p:blipFill>
         <p:spPr>
@@ -20819,8 +21015,8 @@
           <p:nvPr/>
         </p:nvPicPr>
         <p:blipFill>
-          <a:blip r:embed="rId2"/>
-          <a:srcRect l="0" t="0" r="19470" b="0"/>
+          <a:blip r:embed="rId3"/>
+          <a:srcRect r="19470"/>
           <a:stretch/>
         </p:blipFill>
         <p:spPr>
@@ -20839,19 +21035,14 @@
       </p:pic>
     </p:spTree>
   </p:cSld>
-  <mc:AlternateContent>
-    <mc:Choice Requires="p14">
-      <p:transition spd="slow" p14:dur="2000"/>
-    </mc:Choice>
-    <mc:Fallback>
-      <p:transition spd="slow"/>
-    </mc:Fallback>
-  </mc:AlternateContent>
+  <p:clrMapOvr>
+    <a:masterClrMapping/>
+  </p:clrMapOvr>
 </p:sld>
 </file>
 
 <file path=ppt/slides/slide9.xml><?xml version="1.0" encoding="utf-8"?>
-<p:sld xmlns:a="http://schemas.openxmlformats.org/drawingml/2006/main" xmlns:p="http://schemas.openxmlformats.org/presentationml/2006/main" xmlns:r="http://schemas.openxmlformats.org/officeDocument/2006/relationships" xmlns:p14="http://schemas.microsoft.com/office/powerpoint/2010/main" xmlns:p15="http://schemas.microsoft.com/office/powerpoint/2012/main" xmlns:mc="http://schemas.openxmlformats.org/markup-compatibility/2006">
+<p:sld xmlns:a="http://schemas.openxmlformats.org/drawingml/2006/main" xmlns:r="http://schemas.openxmlformats.org/officeDocument/2006/relationships" xmlns:p="http://schemas.openxmlformats.org/presentationml/2006/main">
   <p:cSld>
     <p:spTree>
       <p:nvGrpSpPr>
@@ -20894,6 +21085,7 @@
           <a:bodyPr lIns="90000" tIns="45000" rIns="90000" bIns="45000" anchor="t">
             <a:noAutofit/>
           </a:bodyPr>
+          <a:lstStyle/>
           <a:p>
             <a:pPr indent="0" algn="l" defTabSz="914040">
               <a:lnSpc>
@@ -20978,6 +21170,7 @@
           <a:bodyPr lIns="90000" tIns="45000" rIns="90000" bIns="45000" anchor="t">
             <a:noAutofit/>
           </a:bodyPr>
+          <a:lstStyle/>
           <a:p>
             <a:pPr indent="0" algn="ctr" defTabSz="914040">
               <a:lnSpc>
@@ -21033,21 +21226,28 @@
             <a:noFill/>
           </a:ln>
           <a:effectLst>
-            <a:outerShdw algn="tl" dir="2700000" dist="88586" rotWithShape="0">
+            <a:outerShdw dist="88586" dir="2700000" algn="tl" rotWithShape="0">
               <a:srgbClr val="140046"/>
             </a:outerShdw>
           </a:effectLst>
         </p:spPr>
         <p:style>
-          <a:lnRef idx="0"/>
-          <a:fillRef idx="0"/>
-          <a:effectRef idx="0"/>
+          <a:lnRef idx="0">
+            <a:scrgbClr r="0" g="0" b="0"/>
+          </a:lnRef>
+          <a:fillRef idx="0">
+            <a:scrgbClr r="0" g="0" b="0"/>
+          </a:fillRef>
+          <a:effectRef idx="0">
+            <a:scrgbClr r="0" g="0" b="0"/>
+          </a:effectRef>
           <a:fontRef idx="minor"/>
         </p:style>
         <p:txBody>
           <a:bodyPr lIns="288000" tIns="108000" rIns="288000" bIns="180000" anchor="ctr">
             <a:noAutofit/>
           </a:bodyPr>
+          <a:lstStyle/>
           <a:p>
             <a:pPr algn="ctr" defTabSz="914400">
               <a:lnSpc>
@@ -21102,21 +21302,28 @@
             <a:noFill/>
           </a:ln>
           <a:effectLst>
-            <a:outerShdw algn="tl" dir="2700000" dist="88586" rotWithShape="0">
+            <a:outerShdw dist="88586" dir="2700000" algn="tl" rotWithShape="0">
               <a:srgbClr val="140046"/>
             </a:outerShdw>
           </a:effectLst>
         </p:spPr>
         <p:style>
-          <a:lnRef idx="0"/>
-          <a:fillRef idx="0"/>
-          <a:effectRef idx="0"/>
+          <a:lnRef idx="0">
+            <a:scrgbClr r="0" g="0" b="0"/>
+          </a:lnRef>
+          <a:fillRef idx="0">
+            <a:scrgbClr r="0" g="0" b="0"/>
+          </a:fillRef>
+          <a:effectRef idx="0">
+            <a:scrgbClr r="0" g="0" b="0"/>
+          </a:effectRef>
           <a:fontRef idx="minor"/>
         </p:style>
         <p:txBody>
           <a:bodyPr lIns="288000" tIns="108000" rIns="288000" bIns="180000" anchor="ctr">
             <a:noAutofit/>
           </a:bodyPr>
+          <a:lstStyle/>
           <a:p>
             <a:pPr algn="ctr" defTabSz="914400">
               <a:lnSpc>
@@ -21155,8 +21362,8 @@
           <p:nvPr/>
         </p:nvPicPr>
         <p:blipFill>
-          <a:blip r:embed="rId1"/>
-          <a:srcRect l="0" t="5849" r="0" b="0"/>
+          <a:blip r:embed="rId2"/>
+          <a:srcRect t="5849"/>
           <a:stretch/>
         </p:blipFill>
         <p:spPr>
@@ -21180,8 +21387,8 @@
           <p:nvPr/>
         </p:nvPicPr>
         <p:blipFill>
-          <a:blip r:embed="rId2"/>
-          <a:srcRect l="0" t="0" r="3419" b="0"/>
+          <a:blip r:embed="rId3"/>
+          <a:srcRect r="3419"/>
           <a:stretch/>
         </p:blipFill>
         <p:spPr>
@@ -21200,19 +21407,14 @@
       </p:pic>
     </p:spTree>
   </p:cSld>
-  <mc:AlternateContent>
-    <mc:Choice Requires="p14">
-      <p:transition spd="slow" p14:dur="2000"/>
-    </mc:Choice>
-    <mc:Fallback>
-      <p:transition spd="slow"/>
-    </mc:Fallback>
-  </mc:AlternateContent>
+  <p:clrMapOvr>
+    <a:masterClrMapping/>
+  </p:clrMapOvr>
 </p:sld>
 </file>
 
 <file path=ppt/theme/theme1.xml><?xml version="1.0" encoding="utf-8"?>
-<a:theme xmlns:a="http://schemas.openxmlformats.org/drawingml/2006/main" xmlns:r="http://schemas.openxmlformats.org/officeDocument/2006/relationships" name="StackFuel Theme">
+<a:theme xmlns:a="http://schemas.openxmlformats.org/drawingml/2006/main" name="StackFuel Theme">
   <a:themeElements>
     <a:clrScheme name="Benutzerdefiniert 1">
       <a:dk1>
@@ -21254,12 +21456,12 @@
     </a:clrScheme>
     <a:fontScheme name="Lymo">
       <a:majorFont>
-        <a:latin typeface="Century Gothic" pitchFamily="0" charset="1"/>
+        <a:latin typeface="Century Gothic"/>
         <a:ea typeface=""/>
         <a:cs typeface=""/>
       </a:majorFont>
       <a:minorFont>
-        <a:latin typeface="Calibri" pitchFamily="0" charset="1"/>
+        <a:latin typeface="Calibri"/>
         <a:ea typeface=""/>
         <a:cs typeface=""/>
       </a:minorFont>
@@ -21291,7 +21493,7 @@
             </a:gs>
           </a:gsLst>
           <a:lin ang="5400000" scaled="0"/>
-          <a:tileRect l="0" t="0" r="0" b="0"/>
+          <a:tileRect/>
         </a:gradFill>
         <a:gradFill>
           <a:gsLst>
@@ -21315,7 +21517,7 @@
             </a:gs>
           </a:gsLst>
           <a:lin ang="5400000" scaled="0"/>
-          <a:tileRect l="0" t="0" r="0" b="0"/>
+          <a:tileRect/>
         </a:gradFill>
       </a:fillStyleLst>
       <a:lnStyleLst>
@@ -21375,309 +21577,12 @@
             </a:gs>
           </a:gsLst>
           <a:lin ang="5400000" scaled="0"/>
-          <a:tileRect l="0" t="0" r="0" b="0"/>
+          <a:tileRect/>
         </a:gradFill>
       </a:bgFillStyleLst>
     </a:fmtScheme>
   </a:themeElements>
+  <a:objectDefaults/>
+  <a:extraClrSchemeLst/>
 </a:theme>
-</file>
-
-<file path=customXml/item1.xml><?xml version="1.0" encoding="utf-8"?>
-<ct:contentTypeSchema xmlns:ct="http://schemas.microsoft.com/office/2006/metadata/contentType" xmlns:ma="http://schemas.microsoft.com/office/2006/metadata/properties/metaAttributes" ct:_="" ma:_="" ma:contentTypeName="Dokument" ma:contentTypeID="0x010100DBE362C6EE420543B698485AC74F8397" ma:contentTypeVersion="15" ma:contentTypeDescription="Ein neues Dokument erstellen." ma:contentTypeScope="" ma:versionID="ece25feff8eaf4ae94d93f45f1a09ea7">
-  <xsd:schema xmlns:xsd="http://www.w3.org/2001/XMLSchema" xmlns:xs="http://www.w3.org/2001/XMLSchema" xmlns:p="http://schemas.microsoft.com/office/2006/metadata/properties" xmlns:ns2="52c83538-2338-46ef-bbce-bf2b5cdd8f3a" xmlns:ns3="3b61b577-587e-4579-bf30-e7747f8b66e7" targetNamespace="http://schemas.microsoft.com/office/2006/metadata/properties" ma:root="true" ma:fieldsID="f526c11618efe884860c9ffb4f4cafeb" ns2:_="" ns3:_="">
-    <xsd:import namespace="52c83538-2338-46ef-bbce-bf2b5cdd8f3a"/>
-    <xsd:import namespace="3b61b577-587e-4579-bf30-e7747f8b66e7"/>
-    <xsd:element name="properties">
-      <xsd:complexType>
-        <xsd:sequence>
-          <xsd:element name="documentManagement">
-            <xsd:complexType>
-              <xsd:all>
-                <xsd:element ref="ns2:MediaServiceMetadata" minOccurs="0"/>
-                <xsd:element ref="ns2:MediaServiceFastMetadata" minOccurs="0"/>
-                <xsd:element ref="ns2:MediaServiceSearchProperties" minOccurs="0"/>
-                <xsd:element ref="ns2:MediaServiceDateTaken" minOccurs="0"/>
-                <xsd:element ref="ns2:MediaServiceObjectDetectorVersions" minOccurs="0"/>
-                <xsd:element ref="ns2:MediaServiceGenerationTime" minOccurs="0"/>
-                <xsd:element ref="ns2:MediaServiceEventHashCode" minOccurs="0"/>
-                <xsd:element ref="ns2:MediaLengthInSeconds" minOccurs="0"/>
-                <xsd:element ref="ns2:lcf76f155ced4ddcb4097134ff3c332f" minOccurs="0"/>
-                <xsd:element ref="ns3:TaxCatchAll" minOccurs="0"/>
-                <xsd:element ref="ns2:MediaServiceOCR" minOccurs="0"/>
-                <xsd:element ref="ns2:MediaServiceLocation" minOccurs="0"/>
-                <xsd:element ref="ns3:SharedWithUsers" minOccurs="0"/>
-                <xsd:element ref="ns3:SharedWithDetails" minOccurs="0"/>
-              </xsd:all>
-            </xsd:complexType>
-          </xsd:element>
-        </xsd:sequence>
-      </xsd:complexType>
-    </xsd:element>
-  </xsd:schema>
-  <xsd:schema xmlns:xsd="http://www.w3.org/2001/XMLSchema" xmlns:xs="http://www.w3.org/2001/XMLSchema" xmlns:dms="http://schemas.microsoft.com/office/2006/documentManagement/types" xmlns:pc="http://schemas.microsoft.com/office/infopath/2007/PartnerControls" targetNamespace="52c83538-2338-46ef-bbce-bf2b5cdd8f3a" elementFormDefault="qualified">
-    <xsd:import namespace="http://schemas.microsoft.com/office/2006/documentManagement/types"/>
-    <xsd:import namespace="http://schemas.microsoft.com/office/infopath/2007/PartnerControls"/>
-    <xsd:element name="MediaServiceMetadata" ma:index="8" nillable="true" ma:displayName="MediaServiceMetadata" ma:hidden="true" ma:internalName="MediaServiceMetadata" ma:readOnly="true">
-      <xsd:simpleType>
-        <xsd:restriction base="dms:Note"/>
-      </xsd:simpleType>
-    </xsd:element>
-    <xsd:element name="MediaServiceFastMetadata" ma:index="9" nillable="true" ma:displayName="MediaServiceFastMetadata" ma:hidden="true" ma:internalName="MediaServiceFastMetadata" ma:readOnly="true">
-      <xsd:simpleType>
-        <xsd:restriction base="dms:Note"/>
-      </xsd:simpleType>
-    </xsd:element>
-    <xsd:element name="MediaServiceSearchProperties" ma:index="10" nillable="true" ma:displayName="MediaServiceSearchProperties" ma:hidden="true" ma:internalName="MediaServiceSearchProperties" ma:readOnly="true">
-      <xsd:simpleType>
-        <xsd:restriction base="dms:Note"/>
-      </xsd:simpleType>
-    </xsd:element>
-    <xsd:element name="MediaServiceDateTaken" ma:index="11" nillable="true" ma:displayName="MediaServiceDateTaken" ma:hidden="true" ma:indexed="true" ma:internalName="MediaServiceDateTaken" ma:readOnly="true">
-      <xsd:simpleType>
-        <xsd:restriction base="dms:Text"/>
-      </xsd:simpleType>
-    </xsd:element>
-    <xsd:element name="MediaServiceObjectDetectorVersions" ma:index="12" nillable="true" ma:displayName="MediaServiceObjectDetectorVersions" ma:hidden="true" ma:indexed="true" ma:internalName="MediaServiceObjectDetectorVersions" ma:readOnly="true">
-      <xsd:simpleType>
-        <xsd:restriction base="dms:Text"/>
-      </xsd:simpleType>
-    </xsd:element>
-    <xsd:element name="MediaServiceGenerationTime" ma:index="13" nillable="true" ma:displayName="MediaServiceGenerationTime" ma:hidden="true" ma:internalName="MediaServiceGenerationTime" ma:readOnly="true">
-      <xsd:simpleType>
-        <xsd:restriction base="dms:Text"/>
-      </xsd:simpleType>
-    </xsd:element>
-    <xsd:element name="MediaServiceEventHashCode" ma:index="14" nillable="true" ma:displayName="MediaServiceEventHashCode" ma:hidden="true" ma:internalName="MediaServiceEventHashCode" ma:readOnly="true">
-      <xsd:simpleType>
-        <xsd:restriction base="dms:Text"/>
-      </xsd:simpleType>
-    </xsd:element>
-    <xsd:element name="MediaLengthInSeconds" ma:index="15" nillable="true" ma:displayName="MediaLengthInSeconds" ma:hidden="true" ma:internalName="MediaLengthInSeconds" ma:readOnly="true">
-      <xsd:simpleType>
-        <xsd:restriction base="dms:Unknown"/>
-      </xsd:simpleType>
-    </xsd:element>
-    <xsd:element name="lcf76f155ced4ddcb4097134ff3c332f" ma:index="17" nillable="true" ma:taxonomy="true" ma:internalName="lcf76f155ced4ddcb4097134ff3c332f" ma:taxonomyFieldName="MediaServiceImageTags" ma:displayName="Bildmarkierungen" ma:readOnly="false" ma:fieldId="{5cf76f15-5ced-4ddc-b409-7134ff3c332f}" ma:taxonomyMulti="true" ma:sspId="80cc94bf-af72-47f4-a772-37b3f9bade0a" ma:termSetId="09814cd3-568e-fe90-9814-8d621ff8fb84" ma:anchorId="fba54fb3-c3e1-fe81-a776-ca4b69148c4d" ma:open="true" ma:isKeyword="false">
-      <xsd:complexType>
-        <xsd:sequence>
-          <xsd:element ref="pc:Terms" minOccurs="0" maxOccurs="1"/>
-        </xsd:sequence>
-      </xsd:complexType>
-    </xsd:element>
-    <xsd:element name="MediaServiceOCR" ma:index="19" nillable="true" ma:displayName="Extracted Text" ma:internalName="MediaServiceOCR" ma:readOnly="true">
-      <xsd:simpleType>
-        <xsd:restriction base="dms:Note">
-          <xsd:maxLength value="255"/>
-        </xsd:restriction>
-      </xsd:simpleType>
-    </xsd:element>
-    <xsd:element name="MediaServiceLocation" ma:index="20" nillable="true" ma:displayName="Location" ma:indexed="true" ma:internalName="MediaServiceLocation" ma:readOnly="true">
-      <xsd:simpleType>
-        <xsd:restriction base="dms:Text"/>
-      </xsd:simpleType>
-    </xsd:element>
-  </xsd:schema>
-  <xsd:schema xmlns:xsd="http://www.w3.org/2001/XMLSchema" xmlns:xs="http://www.w3.org/2001/XMLSchema" xmlns:dms="http://schemas.microsoft.com/office/2006/documentManagement/types" xmlns:pc="http://schemas.microsoft.com/office/infopath/2007/PartnerControls" targetNamespace="3b61b577-587e-4579-bf30-e7747f8b66e7" elementFormDefault="qualified">
-    <xsd:import namespace="http://schemas.microsoft.com/office/2006/documentManagement/types"/>
-    <xsd:import namespace="http://schemas.microsoft.com/office/infopath/2007/PartnerControls"/>
-    <xsd:element name="TaxCatchAll" ma:index="18" nillable="true" ma:displayName="Taxonomy Catch All Column" ma:hidden="true" ma:list="{4f9edd67-6349-4b78-8c88-424897d85d77}" ma:internalName="TaxCatchAll" ma:showField="CatchAllData" ma:web="3b61b577-587e-4579-bf30-e7747f8b66e7">
-      <xsd:complexType>
-        <xsd:complexContent>
-          <xsd:extension base="dms:MultiChoiceLookup">
-            <xsd:sequence>
-              <xsd:element name="Value" type="dms:Lookup" maxOccurs="unbounded" minOccurs="0" nillable="true"/>
-            </xsd:sequence>
-          </xsd:extension>
-        </xsd:complexContent>
-      </xsd:complexType>
-    </xsd:element>
-    <xsd:element name="SharedWithUsers" ma:index="21" nillable="true" ma:displayName="Freigegeben für" ma:internalName="SharedWithUsers" ma:readOnly="true">
-      <xsd:complexType>
-        <xsd:complexContent>
-          <xsd:extension base="dms:UserMulti">
-            <xsd:sequence>
-              <xsd:element name="UserInfo" minOccurs="0" maxOccurs="unbounded">
-                <xsd:complexType>
-                  <xsd:sequence>
-                    <xsd:element name="DisplayName" type="xsd:string" minOccurs="0"/>
-                    <xsd:element name="AccountId" type="dms:UserId" minOccurs="0" nillable="true"/>
-                    <xsd:element name="AccountType" type="xsd:string" minOccurs="0"/>
-                  </xsd:sequence>
-                </xsd:complexType>
-              </xsd:element>
-            </xsd:sequence>
-          </xsd:extension>
-        </xsd:complexContent>
-      </xsd:complexType>
-    </xsd:element>
-    <xsd:element name="SharedWithDetails" ma:index="22" nillable="true" ma:displayName="Freigegeben für - Details" ma:internalName="SharedWithDetails" ma:readOnly="true">
-      <xsd:simpleType>
-        <xsd:restriction base="dms:Note">
-          <xsd:maxLength value="255"/>
-        </xsd:restriction>
-      </xsd:simpleType>
-    </xsd:element>
-  </xsd:schema>
-  <xsd:schema xmlns="http://schemas.openxmlformats.org/package/2006/metadata/core-properties" xmlns:xsd="http://www.w3.org/2001/XMLSchema" xmlns:xsi="http://www.w3.org/2001/XMLSchema-instance" xmlns:dc="http://purl.org/dc/elements/1.1/" xmlns:dcterms="http://purl.org/dc/terms/" xmlns:odoc="http://schemas.microsoft.com/internal/obd" targetNamespace="http://schemas.openxmlformats.org/package/2006/metadata/core-properties" elementFormDefault="qualified" attributeFormDefault="unqualified" blockDefault="#all">
-    <xsd:import namespace="http://purl.org/dc/elements/1.1/" schemaLocation="http://dublincore.org/schemas/xmls/qdc/2003/04/02/dc.xsd"/>
-    <xsd:import namespace="http://purl.org/dc/terms/" schemaLocation="http://dublincore.org/schemas/xmls/qdc/2003/04/02/dcterms.xsd"/>
-    <xsd:element name="coreProperties" type="CT_coreProperties"/>
-    <xsd:complexType name="CT_coreProperties">
-      <xsd:all>
-        <xsd:element ref="dc:creator" minOccurs="0" maxOccurs="1"/>
-        <xsd:element ref="dcterms:created" minOccurs="0" maxOccurs="1"/>
-        <xsd:element ref="dc:identifier" minOccurs="0" maxOccurs="1"/>
-        <xsd:element name="contentType" minOccurs="0" maxOccurs="1" type="xsd:string" ma:index="0" ma:displayName="Inhaltstyp"/>
-        <xsd:element ref="dc:title" minOccurs="0" maxOccurs="1" ma:index="4" ma:displayName="Titel"/>
-        <xsd:element ref="dc:subject" minOccurs="0" maxOccurs="1"/>
-        <xsd:element ref="dc:description" minOccurs="0" maxOccurs="1"/>
-        <xsd:element name="keywords" minOccurs="0" maxOccurs="1" type="xsd:string"/>
-        <xsd:element ref="dc:language" minOccurs="0" maxOccurs="1"/>
-        <xsd:element name="category" minOccurs="0" maxOccurs="1" type="xsd:string"/>
-        <xsd:element name="version" minOccurs="0" maxOccurs="1" type="xsd:string"/>
-        <xsd:element name="revision" minOccurs="0" maxOccurs="1" type="xsd:string">
-          <xsd:annotation>
-            <xsd:documentation>
-                        This value indicates the number of saves or revisions. The application is responsible for updating this value after each revision.
-                    </xsd:documentation>
-          </xsd:annotation>
-        </xsd:element>
-        <xsd:element name="lastModifiedBy" minOccurs="0" maxOccurs="1" type="xsd:string"/>
-        <xsd:element ref="dcterms:modified" minOccurs="0" maxOccurs="1"/>
-        <xsd:element name="contentStatus" minOccurs="0" maxOccurs="1" type="xsd:string"/>
-      </xsd:all>
-    </xsd:complexType>
-  </xsd:schema>
-  <xs:schema xmlns:pc="http://schemas.microsoft.com/office/infopath/2007/PartnerControls" xmlns:xs="http://www.w3.org/2001/XMLSchema" targetNamespace="http://schemas.microsoft.com/office/infopath/2007/PartnerControls" elementFormDefault="qualified" attributeFormDefault="unqualified">
-    <xs:element name="Person">
-      <xs:complexType>
-        <xs:sequence>
-          <xs:element ref="pc:DisplayName" minOccurs="0"/>
-          <xs:element ref="pc:AccountId" minOccurs="0"/>
-          <xs:element ref="pc:AccountType" minOccurs="0"/>
-        </xs:sequence>
-      </xs:complexType>
-    </xs:element>
-    <xs:element name="DisplayName" type="xs:string"/>
-    <xs:element name="AccountId" type="xs:string"/>
-    <xs:element name="AccountType" type="xs:string"/>
-    <xs:element name="BDCAssociatedEntity">
-      <xs:complexType>
-        <xs:sequence>
-          <xs:element ref="pc:BDCEntity" minOccurs="0" maxOccurs="unbounded"/>
-        </xs:sequence>
-        <xs:attribute ref="pc:EntityNamespace"/>
-        <xs:attribute ref="pc:EntityName"/>
-        <xs:attribute ref="pc:SystemInstanceName"/>
-        <xs:attribute ref="pc:AssociationName"/>
-      </xs:complexType>
-    </xs:element>
-    <xs:attribute name="EntityNamespace" type="xs:string"/>
-    <xs:attribute name="EntityName" type="xs:string"/>
-    <xs:attribute name="SystemInstanceName" type="xs:string"/>
-    <xs:attribute name="AssociationName" type="xs:string"/>
-    <xs:element name="BDCEntity">
-      <xs:complexType>
-        <xs:sequence>
-          <xs:element ref="pc:EntityDisplayName" minOccurs="0"/>
-          <xs:element ref="pc:EntityInstanceReference" minOccurs="0"/>
-          <xs:element ref="pc:EntityId1" minOccurs="0"/>
-          <xs:element ref="pc:EntityId2" minOccurs="0"/>
-          <xs:element ref="pc:EntityId3" minOccurs="0"/>
-          <xs:element ref="pc:EntityId4" minOccurs="0"/>
-          <xs:element ref="pc:EntityId5" minOccurs="0"/>
-        </xs:sequence>
-      </xs:complexType>
-    </xs:element>
-    <xs:element name="EntityDisplayName" type="xs:string"/>
-    <xs:element name="EntityInstanceReference" type="xs:string"/>
-    <xs:element name="EntityId1" type="xs:string"/>
-    <xs:element name="EntityId2" type="xs:string"/>
-    <xs:element name="EntityId3" type="xs:string"/>
-    <xs:element name="EntityId4" type="xs:string"/>
-    <xs:element name="EntityId5" type="xs:string"/>
-    <xs:element name="Terms">
-      <xs:complexType>
-        <xs:sequence>
-          <xs:element ref="pc:TermInfo" minOccurs="0" maxOccurs="unbounded"/>
-        </xs:sequence>
-      </xs:complexType>
-    </xs:element>
-    <xs:element name="TermInfo">
-      <xs:complexType>
-        <xs:sequence>
-          <xs:element ref="pc:TermName" minOccurs="0"/>
-          <xs:element ref="pc:TermId" minOccurs="0"/>
-        </xs:sequence>
-      </xs:complexType>
-    </xs:element>
-    <xs:element name="TermName" type="xs:string"/>
-    <xs:element name="TermId" type="xs:string"/>
-  </xs:schema>
-</ct:contentTypeSchema>
-</file>
-
-<file path=customXml/item2.xml><?xml version="1.0" encoding="utf-8"?>
-<?mso-contentType ?>
-<FormTemplates xmlns="http://schemas.microsoft.com/sharepoint/v3/contenttype/forms">
-  <Display>DocumentLibraryForm</Display>
-  <Edit>DocumentLibraryForm</Edit>
-  <New>DocumentLibraryForm</New>
-</FormTemplates>
-</file>
-
-<file path=customXml/item3.xml><?xml version="1.0" encoding="utf-8"?>
-<p:properties xmlns:p="http://schemas.microsoft.com/office/2006/metadata/properties" xmlns:xsi="http://www.w3.org/2001/XMLSchema-instance" xmlns:pc="http://schemas.microsoft.com/office/infopath/2007/PartnerControls">
-  <documentManagement>
-    <TaxCatchAll xmlns="3b61b577-587e-4579-bf30-e7747f8b66e7" xsi:nil="true"/>
-    <lcf76f155ced4ddcb4097134ff3c332f xmlns="52c83538-2338-46ef-bbce-bf2b5cdd8f3a">
-      <Terms xmlns="http://schemas.microsoft.com/office/infopath/2007/PartnerControls"/>
-    </lcf76f155ced4ddcb4097134ff3c332f>
-  </documentManagement>
-</p:properties>
-</file>
-
-<file path=customXml/itemProps1.xml><?xml version="1.0" encoding="utf-8"?>
-<ds:datastoreItem xmlns:ds="http://schemas.openxmlformats.org/officeDocument/2006/customXml" ds:itemID="{55ED3D9A-795B-4240-A56A-A7FB358B1F26}">
-  <ds:schemaRefs>
-    <ds:schemaRef ds:uri="http://schemas.microsoft.com/office/2006/metadata/contentType"/>
-    <ds:schemaRef ds:uri="http://schemas.microsoft.com/office/2006/metadata/properties/metaAttributes"/>
-    <ds:schemaRef ds:uri="http://www.w3.org/2001/XMLSchema"/>
-    <ds:schemaRef ds:uri="http://schemas.microsoft.com/office/2006/metadata/properties"/>
-    <ds:schemaRef ds:uri="52c83538-2338-46ef-bbce-bf2b5cdd8f3a"/>
-    <ds:schemaRef ds:uri="3b61b577-587e-4579-bf30-e7747f8b66e7"/>
-    <ds:schemaRef ds:uri="http://schemas.microsoft.com/office/2006/documentManagement/types"/>
-    <ds:schemaRef ds:uri="http://schemas.microsoft.com/office/infopath/2007/PartnerControls"/>
-    <ds:schemaRef ds:uri="http://schemas.openxmlformats.org/package/2006/metadata/core-properties"/>
-    <ds:schemaRef ds:uri="http://purl.org/dc/elements/1.1/"/>
-    <ds:schemaRef ds:uri="http://purl.org/dc/terms/"/>
-    <ds:schemaRef ds:uri="http://schemas.microsoft.com/internal/obd"/>
-  </ds:schemaRefs>
-</ds:datastoreItem>
-</file>
-
-<file path=customXml/itemProps2.xml><?xml version="1.0" encoding="utf-8"?>
-<ds:datastoreItem xmlns:ds="http://schemas.openxmlformats.org/officeDocument/2006/customXml" ds:itemID="{44114351-584F-4508-AC74-29F4CFE9A81B}">
-  <ds:schemaRefs>
-    <ds:schemaRef ds:uri="http://schemas.microsoft.com/sharepoint/v3/contenttype/forms"/>
-  </ds:schemaRefs>
-</ds:datastoreItem>
-</file>
-
-<file path=customXml/itemProps3.xml><?xml version="1.0" encoding="utf-8"?>
-<ds:datastoreItem xmlns:ds="http://schemas.openxmlformats.org/officeDocument/2006/customXml" ds:itemID="{4D4740A2-912B-40C3-9AD5-AA7CE96645C7}">
-  <ds:schemaRefs>
-    <ds:schemaRef ds:uri="3b61b577-587e-4579-bf30-e7747f8b66e7"/>
-    <ds:schemaRef ds:uri="http://www.w3.org/XML/1998/namespace"/>
-    <ds:schemaRef ds:uri="http://schemas.microsoft.com/office/2006/documentManagement/types"/>
-    <ds:schemaRef ds:uri="http://schemas.microsoft.com/office/2006/metadata/properties"/>
-    <ds:schemaRef ds:uri="52c83538-2338-46ef-bbce-bf2b5cdd8f3a"/>
-    <ds:schemaRef ds:uri="http://purl.org/dc/elements/1.1/"/>
-    <ds:schemaRef ds:uri="http://schemas.microsoft.com/office/infopath/2007/PartnerControls"/>
-    <ds:schemaRef ds:uri="http://schemas.openxmlformats.org/package/2006/metadata/core-properties"/>
-    <ds:schemaRef ds:uri="http://purl.org/dc/dcmitype/"/>
-    <ds:schemaRef ds:uri="http://purl.org/dc/terms/"/>
-  </ds:schemaRefs>
-</ds:datastoreItem>
 </file>